--- a/docs/Shikayat.pptx
+++ b/docs/Shikayat.pptx
@@ -5,15 +5,15 @@
     <p:sldMasterId id="2147483648" r:id="rId1"/>
   </p:sldMasterIdLst>
   <p:sldIdLst>
-    <p:sldId id="256" r:id="rId7"/>
-    <p:sldId id="257" r:id="rId8"/>
-    <p:sldId id="258" r:id="rId9"/>
-    <p:sldId id="259" r:id="rId10"/>
-    <p:sldId id="260" r:id="rId11"/>
-    <p:sldId id="261" r:id="rId12"/>
-    <p:sldId id="262" r:id="rId13"/>
+    <p:sldId id="256" r:id="rId2"/>
+    <p:sldId id="257" r:id="rId3"/>
+    <p:sldId id="258" r:id="rId4"/>
+    <p:sldId id="259" r:id="rId5"/>
+    <p:sldId id="260" r:id="rId6"/>
+    <p:sldId id="261" r:id="rId7"/>
+    <p:sldId id="262" r:id="rId8"/>
   </p:sldIdLst>
-  <p:sldSz cx="12191695" cy="6858000" type="screen4x3"/>
+  <p:sldSz cx="12192000" cy="6858000"/>
   <p:notesSz cx="6858000" cy="9144000"/>
   <p:defaultTextStyle>
     <a:defPPr>
@@ -110,6 +110,22 @@
       </a:defRPr>
     </a:lvl9pPr>
   </p:defaultTextStyle>
+  <p:extLst>
+    <p:ext uri="{EFAFB233-063F-42B5-8137-9DF3F51BA10A}">
+      <p15:sldGuideLst xmlns:p15="http://schemas.microsoft.com/office/powerpoint/2012/main">
+        <p15:guide id="1" orient="horz" pos="2160">
+          <p15:clr>
+            <a:srgbClr val="A4A3A4"/>
+          </p15:clr>
+        </p15:guide>
+        <p15:guide id="2" pos="2880">
+          <p15:clr>
+            <a:srgbClr val="A4A3A4"/>
+          </p15:clr>
+        </p15:guide>
+      </p15:sldGuideLst>
+    </p:ext>
+  </p:extLst>
 </p:presentation>
 </file>
 
@@ -151,10 +167,9 @@
           <a:lstStyle/>
           <a:p>
             <a:r>
-              <a:rPr lang="en-US" smtClean="0"/>
+              <a:rPr lang="en-US"/>
               <a:t>Click to edit Master title style</a:t>
             </a:r>
-            <a:endParaRPr lang="en-US"/>
           </a:p>
         </p:txBody>
       </p:sp>
@@ -270,10 +285,9 @@
           </a:lstStyle>
           <a:p>
             <a:r>
-              <a:rPr lang="en-US" smtClean="0"/>
+              <a:rPr lang="en-US"/>
               <a:t>Click to edit Master subtitle style</a:t>
             </a:r>
-            <a:endParaRPr lang="en-US"/>
           </a:p>
         </p:txBody>
       </p:sp>
@@ -294,7 +308,7 @@
           <a:p>
             <a:fld id="{5BCAD085-E8A6-8845-BD4E-CB4CCA059FC4}" type="datetimeFigureOut">
               <a:rPr lang="en-US" smtClean="0"/>
-              <a:t>1/27/13</a:t>
+              <a:t>10/10/2026</a:t>
             </a:fld>
             <a:endParaRPr lang="en-US"/>
           </a:p>
@@ -388,10 +402,9 @@
           <a:lstStyle/>
           <a:p>
             <a:r>
-              <a:rPr lang="en-US" smtClean="0"/>
+              <a:rPr lang="en-US"/>
               <a:t>Click to edit Master title style</a:t>
             </a:r>
-            <a:endParaRPr lang="en-US"/>
           </a:p>
         </p:txBody>
       </p:sp>
@@ -412,38 +425,37 @@
           <a:p>
             <a:pPr lvl="0"/>
             <a:r>
-              <a:rPr lang="en-US" smtClean="0"/>
+              <a:rPr lang="en-US"/>
               <a:t>Click to edit Master text styles</a:t>
             </a:r>
           </a:p>
           <a:p>
             <a:pPr lvl="1"/>
             <a:r>
-              <a:rPr lang="en-US" smtClean="0"/>
+              <a:rPr lang="en-US"/>
               <a:t>Second level</a:t>
             </a:r>
           </a:p>
           <a:p>
             <a:pPr lvl="2"/>
             <a:r>
-              <a:rPr lang="en-US" smtClean="0"/>
+              <a:rPr lang="en-US"/>
               <a:t>Third level</a:t>
             </a:r>
           </a:p>
           <a:p>
             <a:pPr lvl="3"/>
             <a:r>
-              <a:rPr lang="en-US" smtClean="0"/>
+              <a:rPr lang="en-US"/>
               <a:t>Fourth level</a:t>
             </a:r>
           </a:p>
           <a:p>
             <a:pPr lvl="4"/>
             <a:r>
-              <a:rPr lang="en-US" smtClean="0"/>
+              <a:rPr lang="en-US"/>
               <a:t>Fifth level</a:t>
             </a:r>
-            <a:endParaRPr lang="en-US"/>
           </a:p>
         </p:txBody>
       </p:sp>
@@ -464,7 +476,7 @@
           <a:p>
             <a:fld id="{5BCAD085-E8A6-8845-BD4E-CB4CCA059FC4}" type="datetimeFigureOut">
               <a:rPr lang="en-US" smtClean="0"/>
-              <a:t>1/27/13</a:t>
+              <a:t>10/10/2026</a:t>
             </a:fld>
             <a:endParaRPr lang="en-US"/>
           </a:p>
@@ -563,10 +575,9 @@
           <a:lstStyle/>
           <a:p>
             <a:r>
-              <a:rPr lang="en-US" smtClean="0"/>
+              <a:rPr lang="en-US"/>
               <a:t>Click to edit Master title style</a:t>
             </a:r>
-            <a:endParaRPr lang="en-US"/>
           </a:p>
         </p:txBody>
       </p:sp>
@@ -592,38 +603,37 @@
           <a:p>
             <a:pPr lvl="0"/>
             <a:r>
-              <a:rPr lang="en-US" smtClean="0"/>
+              <a:rPr lang="en-US"/>
               <a:t>Click to edit Master text styles</a:t>
             </a:r>
           </a:p>
           <a:p>
             <a:pPr lvl="1"/>
             <a:r>
-              <a:rPr lang="en-US" smtClean="0"/>
+              <a:rPr lang="en-US"/>
               <a:t>Second level</a:t>
             </a:r>
           </a:p>
           <a:p>
             <a:pPr lvl="2"/>
             <a:r>
-              <a:rPr lang="en-US" smtClean="0"/>
+              <a:rPr lang="en-US"/>
               <a:t>Third level</a:t>
             </a:r>
           </a:p>
           <a:p>
             <a:pPr lvl="3"/>
             <a:r>
-              <a:rPr lang="en-US" smtClean="0"/>
+              <a:rPr lang="en-US"/>
               <a:t>Fourth level</a:t>
             </a:r>
           </a:p>
           <a:p>
             <a:pPr lvl="4"/>
             <a:r>
-              <a:rPr lang="en-US" smtClean="0"/>
+              <a:rPr lang="en-US"/>
               <a:t>Fifth level</a:t>
             </a:r>
-            <a:endParaRPr lang="en-US"/>
           </a:p>
         </p:txBody>
       </p:sp>
@@ -644,7 +654,7 @@
           <a:p>
             <a:fld id="{5BCAD085-E8A6-8845-BD4E-CB4CCA059FC4}" type="datetimeFigureOut">
               <a:rPr lang="en-US" smtClean="0"/>
-              <a:t>1/27/13</a:t>
+              <a:t>10/10/2026</a:t>
             </a:fld>
             <a:endParaRPr lang="en-US"/>
           </a:p>
@@ -738,10 +748,9 @@
           <a:lstStyle/>
           <a:p>
             <a:r>
-              <a:rPr lang="en-US" smtClean="0"/>
+              <a:rPr lang="en-US"/>
               <a:t>Click to edit Master title style</a:t>
             </a:r>
-            <a:endParaRPr lang="en-US"/>
           </a:p>
         </p:txBody>
       </p:sp>
@@ -762,38 +771,37 @@
           <a:p>
             <a:pPr lvl="0"/>
             <a:r>
-              <a:rPr lang="en-US" smtClean="0"/>
+              <a:rPr lang="en-US"/>
               <a:t>Click to edit Master text styles</a:t>
             </a:r>
           </a:p>
           <a:p>
             <a:pPr lvl="1"/>
             <a:r>
-              <a:rPr lang="en-US" smtClean="0"/>
+              <a:rPr lang="en-US"/>
               <a:t>Second level</a:t>
             </a:r>
           </a:p>
           <a:p>
             <a:pPr lvl="2"/>
             <a:r>
-              <a:rPr lang="en-US" smtClean="0"/>
+              <a:rPr lang="en-US"/>
               <a:t>Third level</a:t>
             </a:r>
           </a:p>
           <a:p>
             <a:pPr lvl="3"/>
             <a:r>
-              <a:rPr lang="en-US" smtClean="0"/>
+              <a:rPr lang="en-US"/>
               <a:t>Fourth level</a:t>
             </a:r>
           </a:p>
           <a:p>
             <a:pPr lvl="4"/>
             <a:r>
-              <a:rPr lang="en-US" smtClean="0"/>
+              <a:rPr lang="en-US"/>
               <a:t>Fifth level</a:t>
             </a:r>
-            <a:endParaRPr lang="en-US"/>
           </a:p>
         </p:txBody>
       </p:sp>
@@ -814,7 +822,7 @@
           <a:p>
             <a:fld id="{5BCAD085-E8A6-8845-BD4E-CB4CCA059FC4}" type="datetimeFigureOut">
               <a:rPr lang="en-US" smtClean="0"/>
-              <a:t>1/27/13</a:t>
+              <a:t>10/10/2026</a:t>
             </a:fld>
             <a:endParaRPr lang="en-US"/>
           </a:p>
@@ -917,10 +925,9 @@
           </a:lstStyle>
           <a:p>
             <a:r>
-              <a:rPr lang="en-US" smtClean="0"/>
+              <a:rPr lang="en-US"/>
               <a:t>Click to edit Master title style</a:t>
             </a:r>
-            <a:endParaRPr lang="en-US"/>
           </a:p>
         </p:txBody>
       </p:sp>
@@ -1037,7 +1044,7 @@
           <a:p>
             <a:pPr lvl="0"/>
             <a:r>
-              <a:rPr lang="en-US" smtClean="0"/>
+              <a:rPr lang="en-US"/>
               <a:t>Click to edit Master text styles</a:t>
             </a:r>
           </a:p>
@@ -1060,7 +1067,7 @@
           <a:p>
             <a:fld id="{5BCAD085-E8A6-8845-BD4E-CB4CCA059FC4}" type="datetimeFigureOut">
               <a:rPr lang="en-US" smtClean="0"/>
-              <a:t>1/27/13</a:t>
+              <a:t>10/10/2026</a:t>
             </a:fld>
             <a:endParaRPr lang="en-US"/>
           </a:p>
@@ -1154,10 +1161,9 @@
           <a:lstStyle/>
           <a:p>
             <a:r>
-              <a:rPr lang="en-US" smtClean="0"/>
+              <a:rPr lang="en-US"/>
               <a:t>Click to edit Master title style</a:t>
             </a:r>
-            <a:endParaRPr lang="en-US"/>
           </a:p>
         </p:txBody>
       </p:sp>
@@ -1211,38 +1217,37 @@
           <a:p>
             <a:pPr lvl="0"/>
             <a:r>
-              <a:rPr lang="en-US" smtClean="0"/>
+              <a:rPr lang="en-US"/>
               <a:t>Click to edit Master text styles</a:t>
             </a:r>
           </a:p>
           <a:p>
             <a:pPr lvl="1"/>
             <a:r>
-              <a:rPr lang="en-US" smtClean="0"/>
+              <a:rPr lang="en-US"/>
               <a:t>Second level</a:t>
             </a:r>
           </a:p>
           <a:p>
             <a:pPr lvl="2"/>
             <a:r>
-              <a:rPr lang="en-US" smtClean="0"/>
+              <a:rPr lang="en-US"/>
               <a:t>Third level</a:t>
             </a:r>
           </a:p>
           <a:p>
             <a:pPr lvl="3"/>
             <a:r>
-              <a:rPr lang="en-US" smtClean="0"/>
+              <a:rPr lang="en-US"/>
               <a:t>Fourth level</a:t>
             </a:r>
           </a:p>
           <a:p>
             <a:pPr lvl="4"/>
             <a:r>
-              <a:rPr lang="en-US" smtClean="0"/>
+              <a:rPr lang="en-US"/>
               <a:t>Fifth level</a:t>
             </a:r>
-            <a:endParaRPr lang="en-US"/>
           </a:p>
         </p:txBody>
       </p:sp>
@@ -1296,38 +1301,37 @@
           <a:p>
             <a:pPr lvl="0"/>
             <a:r>
-              <a:rPr lang="en-US" smtClean="0"/>
+              <a:rPr lang="en-US"/>
               <a:t>Click to edit Master text styles</a:t>
             </a:r>
           </a:p>
           <a:p>
             <a:pPr lvl="1"/>
             <a:r>
-              <a:rPr lang="en-US" smtClean="0"/>
+              <a:rPr lang="en-US"/>
               <a:t>Second level</a:t>
             </a:r>
           </a:p>
           <a:p>
             <a:pPr lvl="2"/>
             <a:r>
-              <a:rPr lang="en-US" smtClean="0"/>
+              <a:rPr lang="en-US"/>
               <a:t>Third level</a:t>
             </a:r>
           </a:p>
           <a:p>
             <a:pPr lvl="3"/>
             <a:r>
-              <a:rPr lang="en-US" smtClean="0"/>
+              <a:rPr lang="en-US"/>
               <a:t>Fourth level</a:t>
             </a:r>
           </a:p>
           <a:p>
             <a:pPr lvl="4"/>
             <a:r>
-              <a:rPr lang="en-US" smtClean="0"/>
+              <a:rPr lang="en-US"/>
               <a:t>Fifth level</a:t>
             </a:r>
-            <a:endParaRPr lang="en-US"/>
           </a:p>
         </p:txBody>
       </p:sp>
@@ -1348,7 +1352,7 @@
           <a:p>
             <a:fld id="{5BCAD085-E8A6-8845-BD4E-CB4CCA059FC4}" type="datetimeFigureOut">
               <a:rPr lang="en-US" smtClean="0"/>
-              <a:t>1/27/13</a:t>
+              <a:t>10/10/2026</a:t>
             </a:fld>
             <a:endParaRPr lang="en-US"/>
           </a:p>
@@ -1446,10 +1450,9 @@
           </a:lstStyle>
           <a:p>
             <a:r>
-              <a:rPr lang="en-US" smtClean="0"/>
+              <a:rPr lang="en-US"/>
               <a:t>Click to edit Master title style</a:t>
             </a:r>
-            <a:endParaRPr lang="en-US"/>
           </a:p>
         </p:txBody>
       </p:sp>
@@ -1512,7 +1515,7 @@
           <a:p>
             <a:pPr lvl="0"/>
             <a:r>
-              <a:rPr lang="en-US" smtClean="0"/>
+              <a:rPr lang="en-US"/>
               <a:t>Click to edit Master text styles</a:t>
             </a:r>
           </a:p>
@@ -1568,38 +1571,37 @@
           <a:p>
             <a:pPr lvl="0"/>
             <a:r>
-              <a:rPr lang="en-US" smtClean="0"/>
+              <a:rPr lang="en-US"/>
               <a:t>Click to edit Master text styles</a:t>
             </a:r>
           </a:p>
           <a:p>
             <a:pPr lvl="1"/>
             <a:r>
-              <a:rPr lang="en-US" smtClean="0"/>
+              <a:rPr lang="en-US"/>
               <a:t>Second level</a:t>
             </a:r>
           </a:p>
           <a:p>
             <a:pPr lvl="2"/>
             <a:r>
-              <a:rPr lang="en-US" smtClean="0"/>
+              <a:rPr lang="en-US"/>
               <a:t>Third level</a:t>
             </a:r>
           </a:p>
           <a:p>
             <a:pPr lvl="3"/>
             <a:r>
-              <a:rPr lang="en-US" smtClean="0"/>
+              <a:rPr lang="en-US"/>
               <a:t>Fourth level</a:t>
             </a:r>
           </a:p>
           <a:p>
             <a:pPr lvl="4"/>
             <a:r>
-              <a:rPr lang="en-US" smtClean="0"/>
+              <a:rPr lang="en-US"/>
               <a:t>Fifth level</a:t>
             </a:r>
-            <a:endParaRPr lang="en-US"/>
           </a:p>
         </p:txBody>
       </p:sp>
@@ -1662,7 +1664,7 @@
           <a:p>
             <a:pPr lvl="0"/>
             <a:r>
-              <a:rPr lang="en-US" smtClean="0"/>
+              <a:rPr lang="en-US"/>
               <a:t>Click to edit Master text styles</a:t>
             </a:r>
           </a:p>
@@ -1718,38 +1720,37 @@
           <a:p>
             <a:pPr lvl="0"/>
             <a:r>
-              <a:rPr lang="en-US" smtClean="0"/>
+              <a:rPr lang="en-US"/>
               <a:t>Click to edit Master text styles</a:t>
             </a:r>
           </a:p>
           <a:p>
             <a:pPr lvl="1"/>
             <a:r>
-              <a:rPr lang="en-US" smtClean="0"/>
+              <a:rPr lang="en-US"/>
               <a:t>Second level</a:t>
             </a:r>
           </a:p>
           <a:p>
             <a:pPr lvl="2"/>
             <a:r>
-              <a:rPr lang="en-US" smtClean="0"/>
+              <a:rPr lang="en-US"/>
               <a:t>Third level</a:t>
             </a:r>
           </a:p>
           <a:p>
             <a:pPr lvl="3"/>
             <a:r>
-              <a:rPr lang="en-US" smtClean="0"/>
+              <a:rPr lang="en-US"/>
               <a:t>Fourth level</a:t>
             </a:r>
           </a:p>
           <a:p>
             <a:pPr lvl="4"/>
             <a:r>
-              <a:rPr lang="en-US" smtClean="0"/>
+              <a:rPr lang="en-US"/>
               <a:t>Fifth level</a:t>
             </a:r>
-            <a:endParaRPr lang="en-US"/>
           </a:p>
         </p:txBody>
       </p:sp>
@@ -1770,7 +1771,7 @@
           <a:p>
             <a:fld id="{5BCAD085-E8A6-8845-BD4E-CB4CCA059FC4}" type="datetimeFigureOut">
               <a:rPr lang="en-US" smtClean="0"/>
-              <a:t>1/27/13</a:t>
+              <a:t>10/10/2026</a:t>
             </a:fld>
             <a:endParaRPr lang="en-US"/>
           </a:p>
@@ -1864,10 +1865,9 @@
           <a:lstStyle/>
           <a:p>
             <a:r>
-              <a:rPr lang="en-US" smtClean="0"/>
+              <a:rPr lang="en-US"/>
               <a:t>Click to edit Master title style</a:t>
             </a:r>
-            <a:endParaRPr lang="en-US"/>
           </a:p>
         </p:txBody>
       </p:sp>
@@ -1888,7 +1888,7 @@
           <a:p>
             <a:fld id="{5BCAD085-E8A6-8845-BD4E-CB4CCA059FC4}" type="datetimeFigureOut">
               <a:rPr lang="en-US" smtClean="0"/>
-              <a:t>1/27/13</a:t>
+              <a:t>10/10/2026</a:t>
             </a:fld>
             <a:endParaRPr lang="en-US"/>
           </a:p>
@@ -1983,7 +1983,7 @@
           <a:p>
             <a:fld id="{5BCAD085-E8A6-8845-BD4E-CB4CCA059FC4}" type="datetimeFigureOut">
               <a:rPr lang="en-US" smtClean="0"/>
-              <a:t>1/27/13</a:t>
+              <a:t>10/10/2026</a:t>
             </a:fld>
             <a:endParaRPr lang="en-US"/>
           </a:p>
@@ -2086,10 +2086,9 @@
           </a:lstStyle>
           <a:p>
             <a:r>
-              <a:rPr lang="en-US" smtClean="0"/>
+              <a:rPr lang="en-US"/>
               <a:t>Click to edit Master title style</a:t>
             </a:r>
-            <a:endParaRPr lang="en-US"/>
           </a:p>
         </p:txBody>
       </p:sp>
@@ -2143,38 +2142,37 @@
           <a:p>
             <a:pPr lvl="0"/>
             <a:r>
-              <a:rPr lang="en-US" smtClean="0"/>
+              <a:rPr lang="en-US"/>
               <a:t>Click to edit Master text styles</a:t>
             </a:r>
           </a:p>
           <a:p>
             <a:pPr lvl="1"/>
             <a:r>
-              <a:rPr lang="en-US" smtClean="0"/>
+              <a:rPr lang="en-US"/>
               <a:t>Second level</a:t>
             </a:r>
           </a:p>
           <a:p>
             <a:pPr lvl="2"/>
             <a:r>
-              <a:rPr lang="en-US" smtClean="0"/>
+              <a:rPr lang="en-US"/>
               <a:t>Third level</a:t>
             </a:r>
           </a:p>
           <a:p>
             <a:pPr lvl="3"/>
             <a:r>
-              <a:rPr lang="en-US" smtClean="0"/>
+              <a:rPr lang="en-US"/>
               <a:t>Fourth level</a:t>
             </a:r>
           </a:p>
           <a:p>
             <a:pPr lvl="4"/>
             <a:r>
-              <a:rPr lang="en-US" smtClean="0"/>
+              <a:rPr lang="en-US"/>
               <a:t>Fifth level</a:t>
             </a:r>
-            <a:endParaRPr lang="en-US"/>
           </a:p>
         </p:txBody>
       </p:sp>
@@ -2237,7 +2235,7 @@
           <a:p>
             <a:pPr lvl="0"/>
             <a:r>
-              <a:rPr lang="en-US" smtClean="0"/>
+              <a:rPr lang="en-US"/>
               <a:t>Click to edit Master text styles</a:t>
             </a:r>
           </a:p>
@@ -2260,7 +2258,7 @@
           <a:p>
             <a:fld id="{5BCAD085-E8A6-8845-BD4E-CB4CCA059FC4}" type="datetimeFigureOut">
               <a:rPr lang="en-US" smtClean="0"/>
-              <a:t>1/27/13</a:t>
+              <a:t>10/10/2026</a:t>
             </a:fld>
             <a:endParaRPr lang="en-US"/>
           </a:p>
@@ -2363,10 +2361,9 @@
           </a:lstStyle>
           <a:p>
             <a:r>
-              <a:rPr lang="en-US" smtClean="0"/>
+              <a:rPr lang="en-US"/>
               <a:t>Click to edit Master title style</a:t>
             </a:r>
-            <a:endParaRPr lang="en-US"/>
           </a:p>
         </p:txBody>
       </p:sp>
@@ -2490,7 +2487,7 @@
           <a:p>
             <a:pPr lvl="0"/>
             <a:r>
-              <a:rPr lang="en-US" smtClean="0"/>
+              <a:rPr lang="en-US"/>
               <a:t>Click to edit Master text styles</a:t>
             </a:r>
           </a:p>
@@ -2513,7 +2510,7 @@
           <a:p>
             <a:fld id="{5BCAD085-E8A6-8845-BD4E-CB4CCA059FC4}" type="datetimeFigureOut">
               <a:rPr lang="en-US" smtClean="0"/>
-              <a:t>1/27/13</a:t>
+              <a:t>10/10/2026</a:t>
             </a:fld>
             <a:endParaRPr lang="en-US"/>
           </a:p>
@@ -2622,10 +2619,9 @@
           <a:lstStyle/>
           <a:p>
             <a:r>
-              <a:rPr lang="en-US" smtClean="0"/>
+              <a:rPr lang="en-US"/>
               <a:t>Click to edit Master title style</a:t>
             </a:r>
-            <a:endParaRPr lang="en-US"/>
           </a:p>
         </p:txBody>
       </p:sp>
@@ -2656,38 +2652,37 @@
           <a:p>
             <a:pPr lvl="0"/>
             <a:r>
-              <a:rPr lang="en-US" smtClean="0"/>
+              <a:rPr lang="en-US"/>
               <a:t>Click to edit Master text styles</a:t>
             </a:r>
           </a:p>
           <a:p>
             <a:pPr lvl="1"/>
             <a:r>
-              <a:rPr lang="en-US" smtClean="0"/>
+              <a:rPr lang="en-US"/>
               <a:t>Second level</a:t>
             </a:r>
           </a:p>
           <a:p>
             <a:pPr lvl="2"/>
             <a:r>
-              <a:rPr lang="en-US" smtClean="0"/>
+              <a:rPr lang="en-US"/>
               <a:t>Third level</a:t>
             </a:r>
           </a:p>
           <a:p>
             <a:pPr lvl="3"/>
             <a:r>
-              <a:rPr lang="en-US" smtClean="0"/>
+              <a:rPr lang="en-US"/>
               <a:t>Fourth level</a:t>
             </a:r>
           </a:p>
           <a:p>
             <a:pPr lvl="4"/>
             <a:r>
-              <a:rPr lang="en-US" smtClean="0"/>
+              <a:rPr lang="en-US"/>
               <a:t>Fifth level</a:t>
             </a:r>
-            <a:endParaRPr lang="en-US"/>
           </a:p>
         </p:txBody>
       </p:sp>
@@ -2726,7 +2721,7 @@
           <a:p>
             <a:fld id="{5BCAD085-E8A6-8845-BD4E-CB4CCA059FC4}" type="datetimeFigureOut">
               <a:rPr lang="en-US" smtClean="0"/>
-              <a:t>1/27/13</a:t>
+              <a:t>10/10/2026</a:t>
             </a:fld>
             <a:endParaRPr lang="en-US"/>
           </a:p>
@@ -3085,7 +3080,7 @@
 </file>
 
 <file path=ppt/slides/slide1.xml><?xml version="1.0" encoding="utf-8"?>
-<p:sld xmlns:a="http://schemas.openxmlformats.org/drawingml/2006/main" xmlns:p="http://schemas.openxmlformats.org/presentationml/2006/main" xmlns:r="http://schemas.openxmlformats.org/officeDocument/2006/relationships">
+<p:sld xmlns:a="http://schemas.openxmlformats.org/drawingml/2006/main" xmlns:r="http://schemas.openxmlformats.org/officeDocument/2006/relationships" xmlns:p="http://schemas.openxmlformats.org/presentationml/2006/main">
   <p:cSld>
     <p:spTree>
       <p:nvGrpSpPr>
@@ -3093,7 +3088,14 @@
         <p:cNvGrpSpPr/>
         <p:nvPr/>
       </p:nvGrpSpPr>
-      <p:grpSpPr/>
+      <p:grpSpPr>
+        <a:xfrm>
+          <a:off x="0" y="0"/>
+          <a:ext cx="0" cy="0"/>
+          <a:chOff x="0" y="0"/>
+          <a:chExt cx="0" cy="0"/>
+        </a:xfrm>
+      </p:grpSpPr>
       <p:sp>
         <p:nvSpPr>
           <p:cNvPr id="2" name="Rectangle 1"/>
@@ -3135,6 +3137,7 @@
           <a:lstStyle/>
           <a:p>
             <a:pPr algn="ctr"/>
+            <a:endParaRPr/>
           </a:p>
         </p:txBody>
       </p:sp>
@@ -3179,6 +3182,7 @@
           <a:lstStyle/>
           <a:p>
             <a:pPr algn="ctr"/>
+            <a:endParaRPr/>
           </a:p>
         </p:txBody>
       </p:sp>
@@ -3364,7 +3368,7 @@
 </file>
 
 <file path=ppt/slides/slide2.xml><?xml version="1.0" encoding="utf-8"?>
-<p:sld xmlns:a="http://schemas.openxmlformats.org/drawingml/2006/main" xmlns:p="http://schemas.openxmlformats.org/presentationml/2006/main" xmlns:r="http://schemas.openxmlformats.org/officeDocument/2006/relationships">
+<p:sld xmlns:a="http://schemas.openxmlformats.org/drawingml/2006/main" xmlns:r="http://schemas.openxmlformats.org/officeDocument/2006/relationships" xmlns:p="http://schemas.openxmlformats.org/presentationml/2006/main">
   <p:cSld>
     <p:spTree>
       <p:nvGrpSpPr>
@@ -3372,7 +3376,14 @@
         <p:cNvGrpSpPr/>
         <p:nvPr/>
       </p:nvGrpSpPr>
-      <p:grpSpPr/>
+      <p:grpSpPr>
+        <a:xfrm>
+          <a:off x="0" y="0"/>
+          <a:ext cx="0" cy="0"/>
+          <a:chOff x="0" y="0"/>
+          <a:chExt cx="0" cy="0"/>
+        </a:xfrm>
+      </p:grpSpPr>
       <p:sp>
         <p:nvSpPr>
           <p:cNvPr id="2" name="Rectangle 1"/>
@@ -3414,6 +3425,7 @@
           <a:lstStyle/>
           <a:p>
             <a:pPr algn="ctr"/>
+            <a:endParaRPr/>
           </a:p>
         </p:txBody>
       </p:sp>
@@ -3536,6 +3548,7 @@
           <a:lstStyle/>
           <a:p>
             <a:pPr algn="ctr"/>
+            <a:endParaRPr/>
           </a:p>
         </p:txBody>
       </p:sp>
@@ -3692,6 +3705,7 @@
           <a:lstStyle/>
           <a:p>
             <a:pPr algn="ctr"/>
+            <a:endParaRPr/>
           </a:p>
         </p:txBody>
       </p:sp>
@@ -3743,7 +3757,7 @@
 </file>
 
 <file path=ppt/slides/slide3.xml><?xml version="1.0" encoding="utf-8"?>
-<p:sld xmlns:a="http://schemas.openxmlformats.org/drawingml/2006/main" xmlns:p="http://schemas.openxmlformats.org/presentationml/2006/main" xmlns:r="http://schemas.openxmlformats.org/officeDocument/2006/relationships">
+<p:sld xmlns:a="http://schemas.openxmlformats.org/drawingml/2006/main" xmlns:r="http://schemas.openxmlformats.org/officeDocument/2006/relationships" xmlns:p="http://schemas.openxmlformats.org/presentationml/2006/main">
   <p:cSld>
     <p:spTree>
       <p:nvGrpSpPr>
@@ -3751,7 +3765,14 @@
         <p:cNvGrpSpPr/>
         <p:nvPr/>
       </p:nvGrpSpPr>
-      <p:grpSpPr/>
+      <p:grpSpPr>
+        <a:xfrm>
+          <a:off x="0" y="0"/>
+          <a:ext cx="0" cy="0"/>
+          <a:chOff x="0" y="0"/>
+          <a:chExt cx="0" cy="0"/>
+        </a:xfrm>
+      </p:grpSpPr>
       <p:sp>
         <p:nvSpPr>
           <p:cNvPr id="2" name="Rectangle 1"/>
@@ -3760,7 +3781,7 @@
         </p:nvSpPr>
         <p:spPr>
           <a:xfrm>
-            <a:off x="0" y="0"/>
+            <a:off x="0" y="-5862"/>
             <a:ext cx="12191695" cy="6858000"/>
           </a:xfrm>
           <a:prstGeom prst="rect">
@@ -3793,6 +3814,7 @@
           <a:lstStyle/>
           <a:p>
             <a:pPr algn="ctr"/>
+            <a:endParaRPr dirty="0"/>
           </a:p>
         </p:txBody>
       </p:sp>
@@ -3874,9 +3896,160 @@
           </a:p>
         </p:txBody>
       </p:sp>
+      <p:sp>
+        <p:nvSpPr>
+          <p:cNvPr id="6" name="TextBox 5"/>
+          <p:cNvSpPr txBox="1"/>
+          <p:nvPr/>
+        </p:nvSpPr>
+        <p:spPr>
+          <a:xfrm>
+            <a:off x="7955279" y="1920240"/>
+            <a:ext cx="3474720" cy="4114800"/>
+          </a:xfrm>
+          <a:prstGeom prst="rect">
+            <a:avLst/>
+          </a:prstGeom>
+          <a:noFill/>
+        </p:spPr>
+        <p:txBody>
+          <a:bodyPr wrap="square">
+            <a:spAutoFit/>
+          </a:bodyPr>
+          <a:lstStyle/>
+          <a:p>
+            <a:pPr algn="l">
+              <a:lnSpc>
+                <a:spcPct val="125000"/>
+              </a:lnSpc>
+            </a:pPr>
+            <a:r>
+              <a:rPr sz="2400" b="1">
+                <a:solidFill>
+                  <a:srgbClr val="111827"/>
+                </a:solidFill>
+                <a:latin typeface="Arial"/>
+              </a:rPr>
+              <a:t>46 complaints</a:t>
+            </a:r>
+          </a:p>
+          <a:p>
+            <a:pPr algn="l">
+              <a:lnSpc>
+                <a:spcPct val="125000"/>
+              </a:lnSpc>
+            </a:pPr>
+            <a:r>
+              <a:rPr sz="1500" b="0">
+                <a:solidFill>
+                  <a:srgbClr val="6B7280"/>
+                </a:solidFill>
+                <a:latin typeface="Arial"/>
+              </a:rPr>
+              <a:t>39 open · 7 escalated</a:t>
+            </a:r>
+          </a:p>
+          <a:p>
+            <a:pPr algn="l">
+              <a:lnSpc>
+                <a:spcPct val="125000"/>
+              </a:lnSpc>
+            </a:pPr>
+            <a:endParaRPr sz="1500" b="0">
+              <a:solidFill>
+                <a:srgbClr val="6B7280"/>
+              </a:solidFill>
+              <a:latin typeface="Arial"/>
+            </a:endParaRPr>
+          </a:p>
+          <a:p>
+            <a:pPr algn="l">
+              <a:lnSpc>
+                <a:spcPct val="125000"/>
+              </a:lnSpc>
+            </a:pPr>
+            <a:r>
+              <a:rPr sz="1500" b="1">
+                <a:solidFill>
+                  <a:srgbClr val="4F46E5"/>
+                </a:solidFill>
+                <a:latin typeface="Arial"/>
+              </a:rPr>
+              <a:t>priority = reports × severity</a:t>
+            </a:r>
+          </a:p>
+          <a:p>
+            <a:pPr algn="l">
+              <a:lnSpc>
+                <a:spcPct val="125000"/>
+              </a:lnSpc>
+            </a:pPr>
+            <a:r>
+              <a:rPr sz="1400" b="0">
+                <a:solidFill>
+                  <a:srgbClr val="6B7280"/>
+                </a:solidFill>
+                <a:latin typeface="Arial"/>
+              </a:rPr>
+              <a:t>Computed in code, never by the model. An issue escalates at 5 reports, or instantly if it is a safety risk.</a:t>
+            </a:r>
+          </a:p>
+          <a:p>
+            <a:pPr algn="l">
+              <a:lnSpc>
+                <a:spcPct val="125000"/>
+              </a:lnSpc>
+            </a:pPr>
+            <a:endParaRPr sz="1400" b="0">
+              <a:solidFill>
+                <a:srgbClr val="6B7280"/>
+              </a:solidFill>
+              <a:latin typeface="Arial"/>
+            </a:endParaRPr>
+          </a:p>
+          <a:p>
+            <a:pPr algn="l">
+              <a:lnSpc>
+                <a:spcPct val="125000"/>
+              </a:lnSpc>
+            </a:pPr>
+            <a:r>
+              <a:rPr sz="1500" b="1">
+                <a:solidFill>
+                  <a:srgbClr val="4F46E5"/>
+                </a:solidFill>
+                <a:latin typeface="Arial"/>
+              </a:rPr>
+              <a:t>15 buckets</a:t>
+            </a:r>
+          </a:p>
+          <a:p>
+            <a:pPr algn="l">
+              <a:lnSpc>
+                <a:spcPct val="125000"/>
+              </a:lnSpc>
+            </a:pPr>
+            <a:r>
+              <a:rPr sz="1400" b="0">
+                <a:solidFill>
+                  <a:srgbClr val="6B7280"/>
+                </a:solidFill>
+                <a:latin typeface="Arial"/>
+              </a:rPr>
+              <a:t>Each authority — Hostel Office, Mess Committee, IT Cell — sees only its own queue.</a:t>
+            </a:r>
+          </a:p>
+        </p:txBody>
+      </p:sp>
       <p:pic>
         <p:nvPicPr>
-          <p:cNvPr id="5" name="Picture 4" descr="screenshot.png"/>
+          <p:cNvPr id="10" name="Picture 9">
+            <a:extLst>
+              <a:ext uri="{FF2B5EF4-FFF2-40B4-BE49-F238E27FC236}">
+                <a16:creationId xmlns:a16="http://schemas.microsoft.com/office/drawing/2014/main" id="{9134C842-9589-D39B-3CDB-01DB1A5A90C8}"/>
+              </a:ext>
+            </a:extLst>
+          </p:cNvPr>
           <p:cNvPicPr>
             <a:picLocks noChangeAspect="1"/>
           </p:cNvPicPr>
@@ -3890,165 +4063,14 @@
         </p:blipFill>
         <p:spPr>
           <a:xfrm>
-            <a:off x="822960" y="1828800"/>
-            <a:ext cx="6766560" cy="8458200"/>
+            <a:off x="645942" y="1920240"/>
+            <a:ext cx="7181560" cy="3965918"/>
           </a:xfrm>
           <a:prstGeom prst="rect">
             <a:avLst/>
           </a:prstGeom>
         </p:spPr>
       </p:pic>
-      <p:sp>
-        <p:nvSpPr>
-          <p:cNvPr id="6" name="TextBox 5"/>
-          <p:cNvSpPr txBox="1"/>
-          <p:nvPr/>
-        </p:nvSpPr>
-        <p:spPr>
-          <a:xfrm>
-            <a:off x="7955279" y="1920240"/>
-            <a:ext cx="3474720" cy="4114800"/>
-          </a:xfrm>
-          <a:prstGeom prst="rect">
-            <a:avLst/>
-          </a:prstGeom>
-          <a:noFill/>
-        </p:spPr>
-        <p:txBody>
-          <a:bodyPr wrap="square">
-            <a:spAutoFit/>
-          </a:bodyPr>
-          <a:lstStyle/>
-          <a:p>
-            <a:pPr algn="l">
-              <a:lnSpc>
-                <a:spcPct val="125000"/>
-              </a:lnSpc>
-            </a:pPr>
-            <a:r>
-              <a:rPr sz="2400" b="1">
-                <a:solidFill>
-                  <a:srgbClr val="111827"/>
-                </a:solidFill>
-                <a:latin typeface="Arial"/>
-              </a:rPr>
-              <a:t>46 complaints</a:t>
-            </a:r>
-          </a:p>
-          <a:p>
-            <a:pPr algn="l">
-              <a:lnSpc>
-                <a:spcPct val="125000"/>
-              </a:lnSpc>
-            </a:pPr>
-            <a:r>
-              <a:rPr sz="1500" b="0">
-                <a:solidFill>
-                  <a:srgbClr val="6B7280"/>
-                </a:solidFill>
-                <a:latin typeface="Arial"/>
-              </a:rPr>
-              <a:t>39 open · 7 escalated</a:t>
-            </a:r>
-          </a:p>
-          <a:p>
-            <a:pPr algn="l">
-              <a:lnSpc>
-                <a:spcPct val="125000"/>
-              </a:lnSpc>
-            </a:pPr>
-            <a:r>
-              <a:rPr sz="800" b="0">
-                <a:solidFill>
-                  <a:srgbClr val="6B7280"/>
-                </a:solidFill>
-                <a:latin typeface="Arial"/>
-              </a:rPr>
-              <a:t/>
-            </a:r>
-          </a:p>
-          <a:p>
-            <a:pPr algn="l">
-              <a:lnSpc>
-                <a:spcPct val="125000"/>
-              </a:lnSpc>
-            </a:pPr>
-            <a:r>
-              <a:rPr sz="1500" b="1">
-                <a:solidFill>
-                  <a:srgbClr val="4F46E5"/>
-                </a:solidFill>
-                <a:latin typeface="Arial"/>
-              </a:rPr>
-              <a:t>priority = reports × severity</a:t>
-            </a:r>
-          </a:p>
-          <a:p>
-            <a:pPr algn="l">
-              <a:lnSpc>
-                <a:spcPct val="125000"/>
-              </a:lnSpc>
-            </a:pPr>
-            <a:r>
-              <a:rPr sz="1400" b="0">
-                <a:solidFill>
-                  <a:srgbClr val="6B7280"/>
-                </a:solidFill>
-                <a:latin typeface="Arial"/>
-              </a:rPr>
-              <a:t>Computed in code, never by the model. An issue escalates at 5 reports, or instantly if it is a safety risk.</a:t>
-            </a:r>
-          </a:p>
-          <a:p>
-            <a:pPr algn="l">
-              <a:lnSpc>
-                <a:spcPct val="125000"/>
-              </a:lnSpc>
-            </a:pPr>
-            <a:r>
-              <a:rPr sz="800" b="0">
-                <a:solidFill>
-                  <a:srgbClr val="6B7280"/>
-                </a:solidFill>
-                <a:latin typeface="Arial"/>
-              </a:rPr>
-              <a:t/>
-            </a:r>
-          </a:p>
-          <a:p>
-            <a:pPr algn="l">
-              <a:lnSpc>
-                <a:spcPct val="125000"/>
-              </a:lnSpc>
-            </a:pPr>
-            <a:r>
-              <a:rPr sz="1500" b="1">
-                <a:solidFill>
-                  <a:srgbClr val="4F46E5"/>
-                </a:solidFill>
-                <a:latin typeface="Arial"/>
-              </a:rPr>
-              <a:t>15 buckets</a:t>
-            </a:r>
-          </a:p>
-          <a:p>
-            <a:pPr algn="l">
-              <a:lnSpc>
-                <a:spcPct val="125000"/>
-              </a:lnSpc>
-            </a:pPr>
-            <a:r>
-              <a:rPr sz="1400" b="0">
-                <a:solidFill>
-                  <a:srgbClr val="6B7280"/>
-                </a:solidFill>
-                <a:latin typeface="Arial"/>
-              </a:rPr>
-              <a:t>Each authority — Hostel Office, Mess Committee, IT Cell — sees only its own queue.</a:t>
-            </a:r>
-          </a:p>
-        </p:txBody>
-      </p:sp>
     </p:spTree>
   </p:cSld>
   <p:clrMapOvr>
@@ -4058,7 +4080,7 @@
 </file>
 
 <file path=ppt/slides/slide4.xml><?xml version="1.0" encoding="utf-8"?>
-<p:sld xmlns:a="http://schemas.openxmlformats.org/drawingml/2006/main" xmlns:p="http://schemas.openxmlformats.org/presentationml/2006/main" xmlns:r="http://schemas.openxmlformats.org/officeDocument/2006/relationships">
+<p:sld xmlns:a="http://schemas.openxmlformats.org/drawingml/2006/main" xmlns:r="http://schemas.openxmlformats.org/officeDocument/2006/relationships" xmlns:p="http://schemas.openxmlformats.org/presentationml/2006/main">
   <p:cSld>
     <p:spTree>
       <p:nvGrpSpPr>
@@ -4066,7 +4088,14 @@
         <p:cNvGrpSpPr/>
         <p:nvPr/>
       </p:nvGrpSpPr>
-      <p:grpSpPr/>
+      <p:grpSpPr>
+        <a:xfrm>
+          <a:off x="0" y="0"/>
+          <a:ext cx="0" cy="0"/>
+          <a:chOff x="0" y="0"/>
+          <a:chExt cx="0" cy="0"/>
+        </a:xfrm>
+      </p:grpSpPr>
       <p:sp>
         <p:nvSpPr>
           <p:cNvPr id="2" name="Rectangle 1"/>
@@ -4108,6 +4137,7 @@
           <a:lstStyle/>
           <a:p>
             <a:pPr algn="ctr"/>
+            <a:endParaRPr/>
           </a:p>
         </p:txBody>
       </p:sp>
@@ -4230,6 +4260,7 @@
           <a:lstStyle/>
           <a:p>
             <a:pPr algn="ctr"/>
+            <a:endParaRPr/>
           </a:p>
         </p:txBody>
       </p:sp>
@@ -4315,6 +4346,7 @@
           <a:lstStyle/>
           <a:p>
             <a:pPr algn="ctr"/>
+            <a:endParaRPr/>
           </a:p>
         </p:txBody>
       </p:sp>
@@ -4377,14 +4409,27 @@
                 <a:spcPct val="120000"/>
               </a:lnSpc>
             </a:pPr>
-            <a:r>
-              <a:rPr sz="700" b="0">
-                <a:solidFill>
-                  <a:srgbClr val="6B7280"/>
+            <a:endParaRPr sz="1700" b="0">
+              <a:solidFill>
+                <a:srgbClr val="111827"/>
+              </a:solidFill>
+              <a:latin typeface="Arial"/>
+            </a:endParaRPr>
+          </a:p>
+          <a:p>
+            <a:pPr algn="l">
+              <a:lnSpc>
+                <a:spcPct val="120000"/>
+              </a:lnSpc>
+            </a:pPr>
+            <a:r>
+              <a:rPr sz="1100" b="1">
+                <a:solidFill>
+                  <a:srgbClr val="4F46E5"/>
                 </a:solidFill>
                 <a:latin typeface="Arial"/>
               </a:rPr>
-              <a:t/>
+              <a:t>Gemma</a:t>
             </a:r>
           </a:p>
           <a:p>
@@ -4394,13 +4439,13 @@
               </a:lnSpc>
             </a:pPr>
             <a:r>
-              <a:rPr sz="1100" b="1">
+              <a:rPr sz="1700" b="0">
                 <a:solidFill>
                   <a:srgbClr val="4F46E5"/>
                 </a:solidFill>
                 <a:latin typeface="Arial"/>
               </a:rPr>
-              <a:t>Gemma</a:t>
+              <a:t>Kaunse hostel aur kis room mein AC se paani tapak raha hai?</a:t>
             </a:r>
           </a:p>
           <a:p>
@@ -4409,31 +4454,12 @@
                 <a:spcPct val="120000"/>
               </a:lnSpc>
             </a:pPr>
-            <a:r>
-              <a:rPr sz="1700" b="0">
-                <a:solidFill>
-                  <a:srgbClr val="4F46E5"/>
-                </a:solidFill>
-                <a:latin typeface="Arial"/>
-              </a:rPr>
-              <a:t>Kaunse hostel aur kis room mein AC se paani tapak raha hai?</a:t>
-            </a:r>
-          </a:p>
-          <a:p>
-            <a:pPr algn="l">
-              <a:lnSpc>
-                <a:spcPct val="120000"/>
-              </a:lnSpc>
-            </a:pPr>
-            <a:r>
-              <a:rPr sz="700" b="0">
-                <a:solidFill>
-                  <a:srgbClr val="6B7280"/>
-                </a:solidFill>
-                <a:latin typeface="Arial"/>
-              </a:rPr>
-              <a:t/>
-            </a:r>
+            <a:endParaRPr sz="1700" b="0">
+              <a:solidFill>
+                <a:srgbClr val="4F46E5"/>
+              </a:solidFill>
+              <a:latin typeface="Arial"/>
+            </a:endParaRPr>
           </a:p>
           <a:p>
             <a:pPr algn="l">
@@ -4528,15 +4554,12 @@
                 <a:spcPct val="125000"/>
               </a:lnSpc>
             </a:pPr>
-            <a:r>
-              <a:rPr sz="900" b="0">
-                <a:solidFill>
-                  <a:srgbClr val="6B7280"/>
-                </a:solidFill>
-                <a:latin typeface="Arial"/>
-              </a:rPr>
-              <a:t/>
-            </a:r>
+            <a:endParaRPr sz="1500" b="0">
+              <a:solidFill>
+                <a:srgbClr val="6B7280"/>
+              </a:solidFill>
+              <a:latin typeface="Arial"/>
+            </a:endParaRPr>
           </a:p>
           <a:p>
             <a:pPr algn="l">
@@ -4615,6 +4638,7 @@
           <a:lstStyle/>
           <a:p>
             <a:pPr algn="ctr"/>
+            <a:endParaRPr/>
           </a:p>
         </p:txBody>
       </p:sp>
@@ -4666,7 +4690,7 @@
 </file>
 
 <file path=ppt/slides/slide5.xml><?xml version="1.0" encoding="utf-8"?>
-<p:sld xmlns:a="http://schemas.openxmlformats.org/drawingml/2006/main" xmlns:p="http://schemas.openxmlformats.org/presentationml/2006/main" xmlns:r="http://schemas.openxmlformats.org/officeDocument/2006/relationships">
+<p:sld xmlns:a="http://schemas.openxmlformats.org/drawingml/2006/main" xmlns:r="http://schemas.openxmlformats.org/officeDocument/2006/relationships" xmlns:p="http://schemas.openxmlformats.org/presentationml/2006/main">
   <p:cSld>
     <p:spTree>
       <p:nvGrpSpPr>
@@ -4674,7 +4698,14 @@
         <p:cNvGrpSpPr/>
         <p:nvPr/>
       </p:nvGrpSpPr>
-      <p:grpSpPr/>
+      <p:grpSpPr>
+        <a:xfrm>
+          <a:off x="0" y="0"/>
+          <a:ext cx="0" cy="0"/>
+          <a:chOff x="0" y="0"/>
+          <a:chExt cx="0" cy="0"/>
+        </a:xfrm>
+      </p:grpSpPr>
       <p:sp>
         <p:nvSpPr>
           <p:cNvPr id="2" name="Rectangle 1"/>
@@ -4716,6 +4747,7 @@
           <a:lstStyle/>
           <a:p>
             <a:pPr algn="ctr"/>
+            <a:endParaRPr/>
           </a:p>
         </p:txBody>
       </p:sp>
@@ -4838,6 +4870,7 @@
           <a:lstStyle/>
           <a:p>
             <a:pPr algn="ctr"/>
+            <a:endParaRPr/>
           </a:p>
         </p:txBody>
       </p:sp>
@@ -4900,15 +4933,12 @@
                 <a:spcPct val="125000"/>
               </a:lnSpc>
             </a:pPr>
-            <a:r>
-              <a:rPr sz="1000" b="0">
-                <a:solidFill>
-                  <a:srgbClr val="6B7280"/>
-                </a:solidFill>
-                <a:latin typeface="Arial"/>
-              </a:rPr>
-              <a:t/>
-            </a:r>
+            <a:endParaRPr sz="1500" b="0">
+              <a:solidFill>
+                <a:srgbClr val="6B7280"/>
+              </a:solidFill>
+              <a:latin typeface="Arial"/>
+            </a:endParaRPr>
           </a:p>
           <a:p>
             <a:pPr algn="l">
@@ -4987,6 +5017,7 @@
           <a:lstStyle/>
           <a:p>
             <a:pPr algn="ctr"/>
+            <a:endParaRPr/>
           </a:p>
         </p:txBody>
       </p:sp>
@@ -5136,15 +5167,12 @@
                 <a:spcPct val="125000"/>
               </a:lnSpc>
             </a:pPr>
-            <a:r>
-              <a:rPr sz="800" b="0">
-                <a:solidFill>
-                  <a:srgbClr val="6B7280"/>
-                </a:solidFill>
-                <a:latin typeface="Arial"/>
-              </a:rPr>
-              <a:t/>
-            </a:r>
+            <a:endParaRPr sz="1500" b="0">
+              <a:solidFill>
+                <a:srgbClr val="6B7280"/>
+              </a:solidFill>
+              <a:latin typeface="Arial"/>
+            </a:endParaRPr>
           </a:p>
           <a:p>
             <a:pPr algn="l">
@@ -5173,7 +5201,7 @@
 </file>
 
 <file path=ppt/slides/slide6.xml><?xml version="1.0" encoding="utf-8"?>
-<p:sld xmlns:a="http://schemas.openxmlformats.org/drawingml/2006/main" xmlns:p="http://schemas.openxmlformats.org/presentationml/2006/main" xmlns:r="http://schemas.openxmlformats.org/officeDocument/2006/relationships">
+<p:sld xmlns:a="http://schemas.openxmlformats.org/drawingml/2006/main" xmlns:r="http://schemas.openxmlformats.org/officeDocument/2006/relationships" xmlns:p="http://schemas.openxmlformats.org/presentationml/2006/main">
   <p:cSld>
     <p:spTree>
       <p:nvGrpSpPr>
@@ -5181,7 +5209,14 @@
         <p:cNvGrpSpPr/>
         <p:nvPr/>
       </p:nvGrpSpPr>
-      <p:grpSpPr/>
+      <p:grpSpPr>
+        <a:xfrm>
+          <a:off x="0" y="0"/>
+          <a:ext cx="0" cy="0"/>
+          <a:chOff x="0" y="0"/>
+          <a:chExt cx="0" cy="0"/>
+        </a:xfrm>
+      </p:grpSpPr>
       <p:sp>
         <p:nvSpPr>
           <p:cNvPr id="2" name="Rectangle 1"/>
@@ -5223,6 +5258,7 @@
           <a:lstStyle/>
           <a:p>
             <a:pPr algn="ctr"/>
+            <a:endParaRPr/>
           </a:p>
         </p:txBody>
       </p:sp>
@@ -5345,6 +5381,7 @@
           <a:lstStyle/>
           <a:p>
             <a:pPr algn="ctr"/>
+            <a:endParaRPr/>
           </a:p>
         </p:txBody>
       </p:sp>
@@ -5389,6 +5426,7 @@
           <a:lstStyle/>
           <a:p>
             <a:pPr algn="ctr"/>
+            <a:endParaRPr/>
           </a:p>
         </p:txBody>
       </p:sp>
@@ -5511,6 +5549,7 @@
           <a:lstStyle/>
           <a:p>
             <a:pPr algn="ctr"/>
+            <a:endParaRPr/>
           </a:p>
         </p:txBody>
       </p:sp>
@@ -5633,6 +5672,7 @@
           <a:lstStyle/>
           <a:p>
             <a:pPr algn="ctr"/>
+            <a:endParaRPr/>
           </a:p>
         </p:txBody>
       </p:sp>
@@ -5755,6 +5795,7 @@
           <a:lstStyle/>
           <a:p>
             <a:pPr algn="ctr"/>
+            <a:endParaRPr/>
           </a:p>
         </p:txBody>
       </p:sp>
@@ -5877,6 +5918,7 @@
           <a:lstStyle/>
           <a:p>
             <a:pPr algn="ctr"/>
+            <a:endParaRPr/>
           </a:p>
         </p:txBody>
       </p:sp>
@@ -6001,6 +6043,7 @@
           <a:lstStyle/>
           <a:p>
             <a:pPr algn="ctr"/>
+            <a:endParaRPr/>
           </a:p>
         </p:txBody>
       </p:sp>
@@ -6052,7 +6095,7 @@
 </file>
 
 <file path=ppt/slides/slide7.xml><?xml version="1.0" encoding="utf-8"?>
-<p:sld xmlns:a="http://schemas.openxmlformats.org/drawingml/2006/main" xmlns:p="http://schemas.openxmlformats.org/presentationml/2006/main" xmlns:r="http://schemas.openxmlformats.org/officeDocument/2006/relationships">
+<p:sld xmlns:a="http://schemas.openxmlformats.org/drawingml/2006/main" xmlns:r="http://schemas.openxmlformats.org/officeDocument/2006/relationships" xmlns:p="http://schemas.openxmlformats.org/presentationml/2006/main">
   <p:cSld>
     <p:spTree>
       <p:nvGrpSpPr>
@@ -6060,7 +6103,14 @@
         <p:cNvGrpSpPr/>
         <p:nvPr/>
       </p:nvGrpSpPr>
-      <p:grpSpPr/>
+      <p:grpSpPr>
+        <a:xfrm>
+          <a:off x="0" y="0"/>
+          <a:ext cx="0" cy="0"/>
+          <a:chOff x="0" y="0"/>
+          <a:chExt cx="0" cy="0"/>
+        </a:xfrm>
+      </p:grpSpPr>
       <p:sp>
         <p:nvSpPr>
           <p:cNvPr id="2" name="Rectangle 1"/>
@@ -6102,6 +6152,7 @@
           <a:lstStyle/>
           <a:p>
             <a:pPr algn="ctr"/>
+            <a:endParaRPr/>
           </a:p>
         </p:txBody>
       </p:sp>
@@ -6224,6 +6275,7 @@
           <a:lstStyle/>
           <a:p>
             <a:pPr algn="ctr"/>
+            <a:endParaRPr/>
           </a:p>
         </p:txBody>
       </p:sp>

--- a/docs/Shikayat.pptx
+++ b/docs/Shikayat.pptx
@@ -5,15 +5,15 @@
     <p:sldMasterId id="2147483648" r:id="rId1"/>
   </p:sldMasterIdLst>
   <p:sldIdLst>
-    <p:sldId id="256" r:id="rId2"/>
-    <p:sldId id="257" r:id="rId3"/>
-    <p:sldId id="258" r:id="rId4"/>
-    <p:sldId id="259" r:id="rId5"/>
-    <p:sldId id="260" r:id="rId6"/>
-    <p:sldId id="261" r:id="rId7"/>
-    <p:sldId id="262" r:id="rId8"/>
+    <p:sldId id="256" r:id="rId7"/>
+    <p:sldId id="257" r:id="rId8"/>
+    <p:sldId id="258" r:id="rId9"/>
+    <p:sldId id="259" r:id="rId10"/>
+    <p:sldId id="260" r:id="rId11"/>
+    <p:sldId id="261" r:id="rId12"/>
+    <p:sldId id="262" r:id="rId13"/>
   </p:sldIdLst>
-  <p:sldSz cx="12192000" cy="6858000"/>
+  <p:sldSz cx="12191695" cy="6858000" type="screen4x3"/>
   <p:notesSz cx="6858000" cy="9144000"/>
   <p:defaultTextStyle>
     <a:defPPr>
@@ -110,22 +110,6 @@
       </a:defRPr>
     </a:lvl9pPr>
   </p:defaultTextStyle>
-  <p:extLst>
-    <p:ext uri="{EFAFB233-063F-42B5-8137-9DF3F51BA10A}">
-      <p15:sldGuideLst xmlns:p15="http://schemas.microsoft.com/office/powerpoint/2012/main">
-        <p15:guide id="1" orient="horz" pos="2160">
-          <p15:clr>
-            <a:srgbClr val="A4A3A4"/>
-          </p15:clr>
-        </p15:guide>
-        <p15:guide id="2" pos="2880">
-          <p15:clr>
-            <a:srgbClr val="A4A3A4"/>
-          </p15:clr>
-        </p15:guide>
-      </p15:sldGuideLst>
-    </p:ext>
-  </p:extLst>
 </p:presentation>
 </file>
 
@@ -167,9 +151,10 @@
           <a:lstStyle/>
           <a:p>
             <a:r>
-              <a:rPr lang="en-US"/>
+              <a:rPr lang="en-US" smtClean="0"/>
               <a:t>Click to edit Master title style</a:t>
             </a:r>
+            <a:endParaRPr lang="en-US"/>
           </a:p>
         </p:txBody>
       </p:sp>
@@ -285,9 +270,10 @@
           </a:lstStyle>
           <a:p>
             <a:r>
-              <a:rPr lang="en-US"/>
+              <a:rPr lang="en-US" smtClean="0"/>
               <a:t>Click to edit Master subtitle style</a:t>
             </a:r>
+            <a:endParaRPr lang="en-US"/>
           </a:p>
         </p:txBody>
       </p:sp>
@@ -308,7 +294,7 @@
           <a:p>
             <a:fld id="{5BCAD085-E8A6-8845-BD4E-CB4CCA059FC4}" type="datetimeFigureOut">
               <a:rPr lang="en-US" smtClean="0"/>
-              <a:t>10/10/2026</a:t>
+              <a:t>1/27/13</a:t>
             </a:fld>
             <a:endParaRPr lang="en-US"/>
           </a:p>
@@ -402,9 +388,10 @@
           <a:lstStyle/>
           <a:p>
             <a:r>
-              <a:rPr lang="en-US"/>
+              <a:rPr lang="en-US" smtClean="0"/>
               <a:t>Click to edit Master title style</a:t>
             </a:r>
+            <a:endParaRPr lang="en-US"/>
           </a:p>
         </p:txBody>
       </p:sp>
@@ -425,37 +412,38 @@
           <a:p>
             <a:pPr lvl="0"/>
             <a:r>
-              <a:rPr lang="en-US"/>
+              <a:rPr lang="en-US" smtClean="0"/>
               <a:t>Click to edit Master text styles</a:t>
             </a:r>
           </a:p>
           <a:p>
             <a:pPr lvl="1"/>
             <a:r>
-              <a:rPr lang="en-US"/>
+              <a:rPr lang="en-US" smtClean="0"/>
               <a:t>Second level</a:t>
             </a:r>
           </a:p>
           <a:p>
             <a:pPr lvl="2"/>
             <a:r>
-              <a:rPr lang="en-US"/>
+              <a:rPr lang="en-US" smtClean="0"/>
               <a:t>Third level</a:t>
             </a:r>
           </a:p>
           <a:p>
             <a:pPr lvl="3"/>
             <a:r>
-              <a:rPr lang="en-US"/>
+              <a:rPr lang="en-US" smtClean="0"/>
               <a:t>Fourth level</a:t>
             </a:r>
           </a:p>
           <a:p>
             <a:pPr lvl="4"/>
             <a:r>
-              <a:rPr lang="en-US"/>
+              <a:rPr lang="en-US" smtClean="0"/>
               <a:t>Fifth level</a:t>
             </a:r>
+            <a:endParaRPr lang="en-US"/>
           </a:p>
         </p:txBody>
       </p:sp>
@@ -476,7 +464,7 @@
           <a:p>
             <a:fld id="{5BCAD085-E8A6-8845-BD4E-CB4CCA059FC4}" type="datetimeFigureOut">
               <a:rPr lang="en-US" smtClean="0"/>
-              <a:t>10/10/2026</a:t>
+              <a:t>1/27/13</a:t>
             </a:fld>
             <a:endParaRPr lang="en-US"/>
           </a:p>
@@ -575,9 +563,10 @@
           <a:lstStyle/>
           <a:p>
             <a:r>
-              <a:rPr lang="en-US"/>
+              <a:rPr lang="en-US" smtClean="0"/>
               <a:t>Click to edit Master title style</a:t>
             </a:r>
+            <a:endParaRPr lang="en-US"/>
           </a:p>
         </p:txBody>
       </p:sp>
@@ -603,37 +592,38 @@
           <a:p>
             <a:pPr lvl="0"/>
             <a:r>
-              <a:rPr lang="en-US"/>
+              <a:rPr lang="en-US" smtClean="0"/>
               <a:t>Click to edit Master text styles</a:t>
             </a:r>
           </a:p>
           <a:p>
             <a:pPr lvl="1"/>
             <a:r>
-              <a:rPr lang="en-US"/>
+              <a:rPr lang="en-US" smtClean="0"/>
               <a:t>Second level</a:t>
             </a:r>
           </a:p>
           <a:p>
             <a:pPr lvl="2"/>
             <a:r>
-              <a:rPr lang="en-US"/>
+              <a:rPr lang="en-US" smtClean="0"/>
               <a:t>Third level</a:t>
             </a:r>
           </a:p>
           <a:p>
             <a:pPr lvl="3"/>
             <a:r>
-              <a:rPr lang="en-US"/>
+              <a:rPr lang="en-US" smtClean="0"/>
               <a:t>Fourth level</a:t>
             </a:r>
           </a:p>
           <a:p>
             <a:pPr lvl="4"/>
             <a:r>
-              <a:rPr lang="en-US"/>
+              <a:rPr lang="en-US" smtClean="0"/>
               <a:t>Fifth level</a:t>
             </a:r>
+            <a:endParaRPr lang="en-US"/>
           </a:p>
         </p:txBody>
       </p:sp>
@@ -654,7 +644,7 @@
           <a:p>
             <a:fld id="{5BCAD085-E8A6-8845-BD4E-CB4CCA059FC4}" type="datetimeFigureOut">
               <a:rPr lang="en-US" smtClean="0"/>
-              <a:t>10/10/2026</a:t>
+              <a:t>1/27/13</a:t>
             </a:fld>
             <a:endParaRPr lang="en-US"/>
           </a:p>
@@ -748,9 +738,10 @@
           <a:lstStyle/>
           <a:p>
             <a:r>
-              <a:rPr lang="en-US"/>
+              <a:rPr lang="en-US" smtClean="0"/>
               <a:t>Click to edit Master title style</a:t>
             </a:r>
+            <a:endParaRPr lang="en-US"/>
           </a:p>
         </p:txBody>
       </p:sp>
@@ -771,37 +762,38 @@
           <a:p>
             <a:pPr lvl="0"/>
             <a:r>
-              <a:rPr lang="en-US"/>
+              <a:rPr lang="en-US" smtClean="0"/>
               <a:t>Click to edit Master text styles</a:t>
             </a:r>
           </a:p>
           <a:p>
             <a:pPr lvl="1"/>
             <a:r>
-              <a:rPr lang="en-US"/>
+              <a:rPr lang="en-US" smtClean="0"/>
               <a:t>Second level</a:t>
             </a:r>
           </a:p>
           <a:p>
             <a:pPr lvl="2"/>
             <a:r>
-              <a:rPr lang="en-US"/>
+              <a:rPr lang="en-US" smtClean="0"/>
               <a:t>Third level</a:t>
             </a:r>
           </a:p>
           <a:p>
             <a:pPr lvl="3"/>
             <a:r>
-              <a:rPr lang="en-US"/>
+              <a:rPr lang="en-US" smtClean="0"/>
               <a:t>Fourth level</a:t>
             </a:r>
           </a:p>
           <a:p>
             <a:pPr lvl="4"/>
             <a:r>
-              <a:rPr lang="en-US"/>
+              <a:rPr lang="en-US" smtClean="0"/>
               <a:t>Fifth level</a:t>
             </a:r>
+            <a:endParaRPr lang="en-US"/>
           </a:p>
         </p:txBody>
       </p:sp>
@@ -822,7 +814,7 @@
           <a:p>
             <a:fld id="{5BCAD085-E8A6-8845-BD4E-CB4CCA059FC4}" type="datetimeFigureOut">
               <a:rPr lang="en-US" smtClean="0"/>
-              <a:t>10/10/2026</a:t>
+              <a:t>1/27/13</a:t>
             </a:fld>
             <a:endParaRPr lang="en-US"/>
           </a:p>
@@ -925,9 +917,10 @@
           </a:lstStyle>
           <a:p>
             <a:r>
-              <a:rPr lang="en-US"/>
+              <a:rPr lang="en-US" smtClean="0"/>
               <a:t>Click to edit Master title style</a:t>
             </a:r>
+            <a:endParaRPr lang="en-US"/>
           </a:p>
         </p:txBody>
       </p:sp>
@@ -1044,7 +1037,7 @@
           <a:p>
             <a:pPr lvl="0"/>
             <a:r>
-              <a:rPr lang="en-US"/>
+              <a:rPr lang="en-US" smtClean="0"/>
               <a:t>Click to edit Master text styles</a:t>
             </a:r>
           </a:p>
@@ -1067,7 +1060,7 @@
           <a:p>
             <a:fld id="{5BCAD085-E8A6-8845-BD4E-CB4CCA059FC4}" type="datetimeFigureOut">
               <a:rPr lang="en-US" smtClean="0"/>
-              <a:t>10/10/2026</a:t>
+              <a:t>1/27/13</a:t>
             </a:fld>
             <a:endParaRPr lang="en-US"/>
           </a:p>
@@ -1161,9 +1154,10 @@
           <a:lstStyle/>
           <a:p>
             <a:r>
-              <a:rPr lang="en-US"/>
+              <a:rPr lang="en-US" smtClean="0"/>
               <a:t>Click to edit Master title style</a:t>
             </a:r>
+            <a:endParaRPr lang="en-US"/>
           </a:p>
         </p:txBody>
       </p:sp>
@@ -1217,37 +1211,38 @@
           <a:p>
             <a:pPr lvl="0"/>
             <a:r>
-              <a:rPr lang="en-US"/>
+              <a:rPr lang="en-US" smtClean="0"/>
               <a:t>Click to edit Master text styles</a:t>
             </a:r>
           </a:p>
           <a:p>
             <a:pPr lvl="1"/>
             <a:r>
-              <a:rPr lang="en-US"/>
+              <a:rPr lang="en-US" smtClean="0"/>
               <a:t>Second level</a:t>
             </a:r>
           </a:p>
           <a:p>
             <a:pPr lvl="2"/>
             <a:r>
-              <a:rPr lang="en-US"/>
+              <a:rPr lang="en-US" smtClean="0"/>
               <a:t>Third level</a:t>
             </a:r>
           </a:p>
           <a:p>
             <a:pPr lvl="3"/>
             <a:r>
-              <a:rPr lang="en-US"/>
+              <a:rPr lang="en-US" smtClean="0"/>
               <a:t>Fourth level</a:t>
             </a:r>
           </a:p>
           <a:p>
             <a:pPr lvl="4"/>
             <a:r>
-              <a:rPr lang="en-US"/>
+              <a:rPr lang="en-US" smtClean="0"/>
               <a:t>Fifth level</a:t>
             </a:r>
+            <a:endParaRPr lang="en-US"/>
           </a:p>
         </p:txBody>
       </p:sp>
@@ -1301,37 +1296,38 @@
           <a:p>
             <a:pPr lvl="0"/>
             <a:r>
-              <a:rPr lang="en-US"/>
+              <a:rPr lang="en-US" smtClean="0"/>
               <a:t>Click to edit Master text styles</a:t>
             </a:r>
           </a:p>
           <a:p>
             <a:pPr lvl="1"/>
             <a:r>
-              <a:rPr lang="en-US"/>
+              <a:rPr lang="en-US" smtClean="0"/>
               <a:t>Second level</a:t>
             </a:r>
           </a:p>
           <a:p>
             <a:pPr lvl="2"/>
             <a:r>
-              <a:rPr lang="en-US"/>
+              <a:rPr lang="en-US" smtClean="0"/>
               <a:t>Third level</a:t>
             </a:r>
           </a:p>
           <a:p>
             <a:pPr lvl="3"/>
             <a:r>
-              <a:rPr lang="en-US"/>
+              <a:rPr lang="en-US" smtClean="0"/>
               <a:t>Fourth level</a:t>
             </a:r>
           </a:p>
           <a:p>
             <a:pPr lvl="4"/>
             <a:r>
-              <a:rPr lang="en-US"/>
+              <a:rPr lang="en-US" smtClean="0"/>
               <a:t>Fifth level</a:t>
             </a:r>
+            <a:endParaRPr lang="en-US"/>
           </a:p>
         </p:txBody>
       </p:sp>
@@ -1352,7 +1348,7 @@
           <a:p>
             <a:fld id="{5BCAD085-E8A6-8845-BD4E-CB4CCA059FC4}" type="datetimeFigureOut">
               <a:rPr lang="en-US" smtClean="0"/>
-              <a:t>10/10/2026</a:t>
+              <a:t>1/27/13</a:t>
             </a:fld>
             <a:endParaRPr lang="en-US"/>
           </a:p>
@@ -1450,9 +1446,10 @@
           </a:lstStyle>
           <a:p>
             <a:r>
-              <a:rPr lang="en-US"/>
+              <a:rPr lang="en-US" smtClean="0"/>
               <a:t>Click to edit Master title style</a:t>
             </a:r>
+            <a:endParaRPr lang="en-US"/>
           </a:p>
         </p:txBody>
       </p:sp>
@@ -1515,7 +1512,7 @@
           <a:p>
             <a:pPr lvl="0"/>
             <a:r>
-              <a:rPr lang="en-US"/>
+              <a:rPr lang="en-US" smtClean="0"/>
               <a:t>Click to edit Master text styles</a:t>
             </a:r>
           </a:p>
@@ -1571,37 +1568,38 @@
           <a:p>
             <a:pPr lvl="0"/>
             <a:r>
-              <a:rPr lang="en-US"/>
+              <a:rPr lang="en-US" smtClean="0"/>
               <a:t>Click to edit Master text styles</a:t>
             </a:r>
           </a:p>
           <a:p>
             <a:pPr lvl="1"/>
             <a:r>
-              <a:rPr lang="en-US"/>
+              <a:rPr lang="en-US" smtClean="0"/>
               <a:t>Second level</a:t>
             </a:r>
           </a:p>
           <a:p>
             <a:pPr lvl="2"/>
             <a:r>
-              <a:rPr lang="en-US"/>
+              <a:rPr lang="en-US" smtClean="0"/>
               <a:t>Third level</a:t>
             </a:r>
           </a:p>
           <a:p>
             <a:pPr lvl="3"/>
             <a:r>
-              <a:rPr lang="en-US"/>
+              <a:rPr lang="en-US" smtClean="0"/>
               <a:t>Fourth level</a:t>
             </a:r>
           </a:p>
           <a:p>
             <a:pPr lvl="4"/>
             <a:r>
-              <a:rPr lang="en-US"/>
+              <a:rPr lang="en-US" smtClean="0"/>
               <a:t>Fifth level</a:t>
             </a:r>
+            <a:endParaRPr lang="en-US"/>
           </a:p>
         </p:txBody>
       </p:sp>
@@ -1664,7 +1662,7 @@
           <a:p>
             <a:pPr lvl="0"/>
             <a:r>
-              <a:rPr lang="en-US"/>
+              <a:rPr lang="en-US" smtClean="0"/>
               <a:t>Click to edit Master text styles</a:t>
             </a:r>
           </a:p>
@@ -1720,37 +1718,38 @@
           <a:p>
             <a:pPr lvl="0"/>
             <a:r>
-              <a:rPr lang="en-US"/>
+              <a:rPr lang="en-US" smtClean="0"/>
               <a:t>Click to edit Master text styles</a:t>
             </a:r>
           </a:p>
           <a:p>
             <a:pPr lvl="1"/>
             <a:r>
-              <a:rPr lang="en-US"/>
+              <a:rPr lang="en-US" smtClean="0"/>
               <a:t>Second level</a:t>
             </a:r>
           </a:p>
           <a:p>
             <a:pPr lvl="2"/>
             <a:r>
-              <a:rPr lang="en-US"/>
+              <a:rPr lang="en-US" smtClean="0"/>
               <a:t>Third level</a:t>
             </a:r>
           </a:p>
           <a:p>
             <a:pPr lvl="3"/>
             <a:r>
-              <a:rPr lang="en-US"/>
+              <a:rPr lang="en-US" smtClean="0"/>
               <a:t>Fourth level</a:t>
             </a:r>
           </a:p>
           <a:p>
             <a:pPr lvl="4"/>
             <a:r>
-              <a:rPr lang="en-US"/>
+              <a:rPr lang="en-US" smtClean="0"/>
               <a:t>Fifth level</a:t>
             </a:r>
+            <a:endParaRPr lang="en-US"/>
           </a:p>
         </p:txBody>
       </p:sp>
@@ -1771,7 +1770,7 @@
           <a:p>
             <a:fld id="{5BCAD085-E8A6-8845-BD4E-CB4CCA059FC4}" type="datetimeFigureOut">
               <a:rPr lang="en-US" smtClean="0"/>
-              <a:t>10/10/2026</a:t>
+              <a:t>1/27/13</a:t>
             </a:fld>
             <a:endParaRPr lang="en-US"/>
           </a:p>
@@ -1865,9 +1864,10 @@
           <a:lstStyle/>
           <a:p>
             <a:r>
-              <a:rPr lang="en-US"/>
+              <a:rPr lang="en-US" smtClean="0"/>
               <a:t>Click to edit Master title style</a:t>
             </a:r>
+            <a:endParaRPr lang="en-US"/>
           </a:p>
         </p:txBody>
       </p:sp>
@@ -1888,7 +1888,7 @@
           <a:p>
             <a:fld id="{5BCAD085-E8A6-8845-BD4E-CB4CCA059FC4}" type="datetimeFigureOut">
               <a:rPr lang="en-US" smtClean="0"/>
-              <a:t>10/10/2026</a:t>
+              <a:t>1/27/13</a:t>
             </a:fld>
             <a:endParaRPr lang="en-US"/>
           </a:p>
@@ -1983,7 +1983,7 @@
           <a:p>
             <a:fld id="{5BCAD085-E8A6-8845-BD4E-CB4CCA059FC4}" type="datetimeFigureOut">
               <a:rPr lang="en-US" smtClean="0"/>
-              <a:t>10/10/2026</a:t>
+              <a:t>1/27/13</a:t>
             </a:fld>
             <a:endParaRPr lang="en-US"/>
           </a:p>
@@ -2086,9 +2086,10 @@
           </a:lstStyle>
           <a:p>
             <a:r>
-              <a:rPr lang="en-US"/>
+              <a:rPr lang="en-US" smtClean="0"/>
               <a:t>Click to edit Master title style</a:t>
             </a:r>
+            <a:endParaRPr lang="en-US"/>
           </a:p>
         </p:txBody>
       </p:sp>
@@ -2142,37 +2143,38 @@
           <a:p>
             <a:pPr lvl="0"/>
             <a:r>
-              <a:rPr lang="en-US"/>
+              <a:rPr lang="en-US" smtClean="0"/>
               <a:t>Click to edit Master text styles</a:t>
             </a:r>
           </a:p>
           <a:p>
             <a:pPr lvl="1"/>
             <a:r>
-              <a:rPr lang="en-US"/>
+              <a:rPr lang="en-US" smtClean="0"/>
               <a:t>Second level</a:t>
             </a:r>
           </a:p>
           <a:p>
             <a:pPr lvl="2"/>
             <a:r>
-              <a:rPr lang="en-US"/>
+              <a:rPr lang="en-US" smtClean="0"/>
               <a:t>Third level</a:t>
             </a:r>
           </a:p>
           <a:p>
             <a:pPr lvl="3"/>
             <a:r>
-              <a:rPr lang="en-US"/>
+              <a:rPr lang="en-US" smtClean="0"/>
               <a:t>Fourth level</a:t>
             </a:r>
           </a:p>
           <a:p>
             <a:pPr lvl="4"/>
             <a:r>
-              <a:rPr lang="en-US"/>
+              <a:rPr lang="en-US" smtClean="0"/>
               <a:t>Fifth level</a:t>
             </a:r>
+            <a:endParaRPr lang="en-US"/>
           </a:p>
         </p:txBody>
       </p:sp>
@@ -2235,7 +2237,7 @@
           <a:p>
             <a:pPr lvl="0"/>
             <a:r>
-              <a:rPr lang="en-US"/>
+              <a:rPr lang="en-US" smtClean="0"/>
               <a:t>Click to edit Master text styles</a:t>
             </a:r>
           </a:p>
@@ -2258,7 +2260,7 @@
           <a:p>
             <a:fld id="{5BCAD085-E8A6-8845-BD4E-CB4CCA059FC4}" type="datetimeFigureOut">
               <a:rPr lang="en-US" smtClean="0"/>
-              <a:t>10/10/2026</a:t>
+              <a:t>1/27/13</a:t>
             </a:fld>
             <a:endParaRPr lang="en-US"/>
           </a:p>
@@ -2361,9 +2363,10 @@
           </a:lstStyle>
           <a:p>
             <a:r>
-              <a:rPr lang="en-US"/>
+              <a:rPr lang="en-US" smtClean="0"/>
               <a:t>Click to edit Master title style</a:t>
             </a:r>
+            <a:endParaRPr lang="en-US"/>
           </a:p>
         </p:txBody>
       </p:sp>
@@ -2487,7 +2490,7 @@
           <a:p>
             <a:pPr lvl="0"/>
             <a:r>
-              <a:rPr lang="en-US"/>
+              <a:rPr lang="en-US" smtClean="0"/>
               <a:t>Click to edit Master text styles</a:t>
             </a:r>
           </a:p>
@@ -2510,7 +2513,7 @@
           <a:p>
             <a:fld id="{5BCAD085-E8A6-8845-BD4E-CB4CCA059FC4}" type="datetimeFigureOut">
               <a:rPr lang="en-US" smtClean="0"/>
-              <a:t>10/10/2026</a:t>
+              <a:t>1/27/13</a:t>
             </a:fld>
             <a:endParaRPr lang="en-US"/>
           </a:p>
@@ -2619,9 +2622,10 @@
           <a:lstStyle/>
           <a:p>
             <a:r>
-              <a:rPr lang="en-US"/>
+              <a:rPr lang="en-US" smtClean="0"/>
               <a:t>Click to edit Master title style</a:t>
             </a:r>
+            <a:endParaRPr lang="en-US"/>
           </a:p>
         </p:txBody>
       </p:sp>
@@ -2652,37 +2656,38 @@
           <a:p>
             <a:pPr lvl="0"/>
             <a:r>
-              <a:rPr lang="en-US"/>
+              <a:rPr lang="en-US" smtClean="0"/>
               <a:t>Click to edit Master text styles</a:t>
             </a:r>
           </a:p>
           <a:p>
             <a:pPr lvl="1"/>
             <a:r>
-              <a:rPr lang="en-US"/>
+              <a:rPr lang="en-US" smtClean="0"/>
               <a:t>Second level</a:t>
             </a:r>
           </a:p>
           <a:p>
             <a:pPr lvl="2"/>
             <a:r>
-              <a:rPr lang="en-US"/>
+              <a:rPr lang="en-US" smtClean="0"/>
               <a:t>Third level</a:t>
             </a:r>
           </a:p>
           <a:p>
             <a:pPr lvl="3"/>
             <a:r>
-              <a:rPr lang="en-US"/>
+              <a:rPr lang="en-US" smtClean="0"/>
               <a:t>Fourth level</a:t>
             </a:r>
           </a:p>
           <a:p>
             <a:pPr lvl="4"/>
             <a:r>
-              <a:rPr lang="en-US"/>
+              <a:rPr lang="en-US" smtClean="0"/>
               <a:t>Fifth level</a:t>
             </a:r>
+            <a:endParaRPr lang="en-US"/>
           </a:p>
         </p:txBody>
       </p:sp>
@@ -2721,7 +2726,7 @@
           <a:p>
             <a:fld id="{5BCAD085-E8A6-8845-BD4E-CB4CCA059FC4}" type="datetimeFigureOut">
               <a:rPr lang="en-US" smtClean="0"/>
-              <a:t>10/10/2026</a:t>
+              <a:t>1/27/13</a:t>
             </a:fld>
             <a:endParaRPr lang="en-US"/>
           </a:p>
@@ -3080,7 +3085,7 @@
 </file>
 
 <file path=ppt/slides/slide1.xml><?xml version="1.0" encoding="utf-8"?>
-<p:sld xmlns:a="http://schemas.openxmlformats.org/drawingml/2006/main" xmlns:r="http://schemas.openxmlformats.org/officeDocument/2006/relationships" xmlns:p="http://schemas.openxmlformats.org/presentationml/2006/main">
+<p:sld xmlns:a="http://schemas.openxmlformats.org/drawingml/2006/main" xmlns:p="http://schemas.openxmlformats.org/presentationml/2006/main" xmlns:r="http://schemas.openxmlformats.org/officeDocument/2006/relationships">
   <p:cSld>
     <p:spTree>
       <p:nvGrpSpPr>
@@ -3088,14 +3093,7 @@
         <p:cNvGrpSpPr/>
         <p:nvPr/>
       </p:nvGrpSpPr>
-      <p:grpSpPr>
-        <a:xfrm>
-          <a:off x="0" y="0"/>
-          <a:ext cx="0" cy="0"/>
-          <a:chOff x="0" y="0"/>
-          <a:chExt cx="0" cy="0"/>
-        </a:xfrm>
-      </p:grpSpPr>
+      <p:grpSpPr/>
       <p:sp>
         <p:nvSpPr>
           <p:cNvPr id="2" name="Rectangle 1"/>
@@ -3111,7 +3109,7 @@
             <a:avLst/>
           </a:prstGeom>
           <a:solidFill>
-            <a:srgbClr val="FFFFFF"/>
+            <a:srgbClr val="111827"/>
           </a:solidFill>
           <a:ln>
             <a:noFill/>
@@ -3137,7 +3135,6 @@
           <a:lstStyle/>
           <a:p>
             <a:pPr algn="ctr"/>
-            <a:endParaRPr/>
           </a:p>
         </p:txBody>
       </p:sp>
@@ -3149,8 +3146,8 @@
         </p:nvSpPr>
         <p:spPr>
           <a:xfrm>
-            <a:off x="0" y="0"/>
-            <a:ext cx="201168" cy="6858000"/>
+            <a:off x="1188720" y="2240280"/>
+            <a:ext cx="1005840" cy="76200"/>
           </a:xfrm>
           <a:prstGeom prst="rect">
             <a:avLst/>
@@ -3182,7 +3179,6 @@
           <a:lstStyle/>
           <a:p>
             <a:pPr algn="ctr"/>
-            <a:endParaRPr/>
           </a:p>
         </p:txBody>
       </p:sp>
@@ -3194,8 +3190,8 @@
         </p:nvSpPr>
         <p:spPr>
           <a:xfrm>
-            <a:off x="1097280" y="1920240"/>
-            <a:ext cx="10058400" cy="1097280"/>
+            <a:off x="1188720" y="2514600"/>
+            <a:ext cx="10058400" cy="1280160"/>
           </a:xfrm>
           <a:prstGeom prst="rect">
             <a:avLst/>
@@ -3214,9 +3210,9 @@
               </a:lnSpc>
             </a:pPr>
             <a:r>
-              <a:rPr sz="6600" b="1">
-                <a:solidFill>
-                  <a:srgbClr val="111827"/>
+              <a:rPr sz="7600" b="1">
+                <a:solidFill>
+                  <a:srgbClr val="FFFFFF"/>
                 </a:solidFill>
                 <a:latin typeface="Arial"/>
               </a:rPr>
@@ -3233,8 +3229,8 @@
         </p:nvSpPr>
         <p:spPr>
           <a:xfrm>
-            <a:off x="1097280" y="2971800"/>
-            <a:ext cx="9601200" cy="822960"/>
+            <a:off x="1188720" y="3703320"/>
+            <a:ext cx="9601200" cy="548640"/>
           </a:xfrm>
           <a:prstGeom prst="rect">
             <a:avLst/>
@@ -3253,9 +3249,9 @@
               </a:lnSpc>
             </a:pPr>
             <a:r>
-              <a:rPr sz="2600" b="0">
-                <a:solidFill>
-                  <a:srgbClr val="6B7280"/>
+              <a:rPr sz="2700" b="0">
+                <a:solidFill>
+                  <a:srgbClr val="C7D2FE"/>
                 </a:solidFill>
                 <a:latin typeface="Arial"/>
               </a:rPr>
@@ -3272,8 +3268,8 @@
         </p:nvSpPr>
         <p:spPr>
           <a:xfrm>
-            <a:off x="1097280" y="3931920"/>
-            <a:ext cx="9601200" cy="1280160"/>
+            <a:off x="1188720" y="4526280"/>
+            <a:ext cx="8961120" cy="914400"/>
           </a:xfrm>
           <a:prstGeom prst="rect">
             <a:avLst/>
@@ -3292,14 +3288,13 @@
               </a:lnSpc>
             </a:pPr>
             <a:r>
-              <a:rPr sz="1700" b="0">
-                <a:solidFill>
-                  <a:srgbClr val="111827"/>
-                </a:solidFill>
-                <a:latin typeface="Arial"/>
-              </a:rPr>
-              <a:t>A student writes a complaint in English, Hinglish or Hindi. Gemma 4 buckets it,
-spots the duplicates, and asks back when it is unsure.</a:t>
+              <a:rPr sz="1600" b="0">
+                <a:solidFill>
+                  <a:srgbClr val="9CA3AF"/>
+                </a:solidFill>
+                <a:latin typeface="Arial"/>
+              </a:rPr>
+              <a:t>A student writes in English, Hinglish or Hindi. Gemma 4 buckets it, spots the duplicates, and asks back when it is unsure.</a:t>
             </a:r>
           </a:p>
         </p:txBody>
@@ -3312,8 +3307,8 @@
         </p:nvSpPr>
         <p:spPr>
           <a:xfrm>
-            <a:off x="1097280" y="5715000"/>
-            <a:ext cx="10058400" cy="822960"/>
+            <a:off x="1188720" y="5806440"/>
+            <a:ext cx="10058400" cy="731520"/>
           </a:xfrm>
           <a:prstGeom prst="rect">
             <a:avLst/>
@@ -3332,13 +3327,13 @@
               </a:lnSpc>
             </a:pPr>
             <a:r>
-              <a:rPr sz="1300" b="0">
+              <a:rPr sz="1200" b="0">
                 <a:solidFill>
                   <a:srgbClr val="6B7280"/>
                 </a:solidFill>
                 <a:latin typeface="Arial"/>
               </a:rPr>
-              <a:t>Sarthak Shrivastava  ·  Vedant  ·  Sumagna Das  ·  Devanshu Sabharwal  ·  Neil</a:t>
+              <a:t>Sarthak Shrivastava · Vedant · Sumagna Das · Devanshu Sabharwal · Neil</a:t>
             </a:r>
           </a:p>
           <a:p>
@@ -3348,13 +3343,13 @@
               </a:lnSpc>
             </a:pPr>
             <a:r>
-              <a:rPr sz="1300" b="0">
+              <a:rPr sz="1200" b="0">
                 <a:solidFill>
                   <a:srgbClr val="6B7280"/>
                 </a:solidFill>
                 <a:latin typeface="Arial"/>
               </a:rPr>
-              <a:t>OpenLake × MLH Hack Day  ·  IIT Bhilai  ·  10 October 2026</a:t>
+              <a:t>OpenLake × MLH Hack Day · IIT Bhilai · 10 October 2026</a:t>
             </a:r>
           </a:p>
         </p:txBody>
@@ -3368,7 +3363,7 @@
 </file>
 
 <file path=ppt/slides/slide2.xml><?xml version="1.0" encoding="utf-8"?>
-<p:sld xmlns:a="http://schemas.openxmlformats.org/drawingml/2006/main" xmlns:r="http://schemas.openxmlformats.org/officeDocument/2006/relationships" xmlns:p="http://schemas.openxmlformats.org/presentationml/2006/main">
+<p:sld xmlns:a="http://schemas.openxmlformats.org/drawingml/2006/main" xmlns:p="http://schemas.openxmlformats.org/presentationml/2006/main" xmlns:r="http://schemas.openxmlformats.org/officeDocument/2006/relationships">
   <p:cSld>
     <p:spTree>
       <p:nvGrpSpPr>
@@ -3376,14 +3371,7 @@
         <p:cNvGrpSpPr/>
         <p:nvPr/>
       </p:nvGrpSpPr>
-      <p:grpSpPr>
-        <a:xfrm>
-          <a:off x="0" y="0"/>
-          <a:ext cx="0" cy="0"/>
-          <a:chOff x="0" y="0"/>
-          <a:chExt cx="0" cy="0"/>
-        </a:xfrm>
-      </p:grpSpPr>
+      <p:grpSpPr/>
       <p:sp>
         <p:nvSpPr>
           <p:cNvPr id="2" name="Rectangle 1"/>
@@ -3425,7 +3413,6 @@
           <a:lstStyle/>
           <a:p>
             <a:pPr algn="ctr"/>
-            <a:endParaRPr/>
           </a:p>
         </p:txBody>
       </p:sp>
@@ -3548,130 +3535,19 @@
           <a:lstStyle/>
           <a:p>
             <a:pPr algn="ctr"/>
-            <a:endParaRPr/>
-          </a:p>
-        </p:txBody>
-      </p:sp>
-      <p:sp>
-        <p:nvSpPr>
-          <p:cNvPr id="6" name="TextBox 5"/>
-          <p:cNvSpPr txBox="1"/>
-          <p:nvPr/>
-        </p:nvSpPr>
-        <p:spPr>
-          <a:xfrm>
-            <a:off x="822960" y="2286000"/>
-            <a:ext cx="5120640" cy="2743200"/>
-          </a:xfrm>
-          <a:prstGeom prst="rect">
-            <a:avLst/>
-          </a:prstGeom>
-          <a:noFill/>
-        </p:spPr>
-        <p:txBody>
-          <a:bodyPr wrap="square">
-            <a:spAutoFit/>
-          </a:bodyPr>
-          <a:lstStyle/>
-          <a:p>
-            <a:pPr algn="l">
-              <a:lnSpc>
-                <a:spcPct val="130000"/>
-              </a:lnSpc>
-            </a:pPr>
-            <a:r>
-              <a:rPr sz="2200" b="1">
-                <a:solidFill>
-                  <a:srgbClr val="111827"/>
-                </a:solidFill>
-                <a:latin typeface="Arial"/>
-              </a:rPr>
-              <a:t>They make you fill forms.</a:t>
-            </a:r>
-          </a:p>
-          <a:p>
-            <a:pPr algn="l">
-              <a:lnSpc>
-                <a:spcPct val="130000"/>
-              </a:lnSpc>
-            </a:pPr>
-            <a:r>
-              <a:rPr sz="1600" b="0">
-                <a:solidFill>
-                  <a:srgbClr val="6B7280"/>
-                </a:solidFill>
-                <a:latin typeface="Arial"/>
-              </a:rPr>
-              <a:t>Dropdowns, required fields, a login. So students stop bothering and complain in the hostel WhatsApp group instead.</a:t>
-            </a:r>
-          </a:p>
-        </p:txBody>
-      </p:sp>
-      <p:sp>
-        <p:nvSpPr>
-          <p:cNvPr id="7" name="TextBox 6"/>
-          <p:cNvSpPr txBox="1"/>
-          <p:nvPr/>
-        </p:nvSpPr>
-        <p:spPr>
-          <a:xfrm>
-            <a:off x="6309360" y="2286000"/>
-            <a:ext cx="5120640" cy="2743200"/>
-          </a:xfrm>
-          <a:prstGeom prst="rect">
-            <a:avLst/>
-          </a:prstGeom>
-          <a:noFill/>
-        </p:spPr>
-        <p:txBody>
-          <a:bodyPr wrap="square">
-            <a:spAutoFit/>
-          </a:bodyPr>
-          <a:lstStyle/>
-          <a:p>
-            <a:pPr algn="l">
-              <a:lnSpc>
-                <a:spcPct val="130000"/>
-              </a:lnSpc>
-            </a:pPr>
-            <a:r>
-              <a:rPr sz="2200" b="1">
-                <a:solidFill>
-                  <a:srgbClr val="111827"/>
-                </a:solidFill>
-                <a:latin typeface="Arial"/>
-              </a:rPr>
-              <a:t>And they bury wardens in duplicates.</a:t>
-            </a:r>
-          </a:p>
-          <a:p>
-            <a:pPr algn="l">
-              <a:lnSpc>
-                <a:spcPct val="130000"/>
-              </a:lnSpc>
-            </a:pPr>
-            <a:r>
-              <a:rPr sz="1600" b="0">
-                <a:solidFill>
-                  <a:srgbClr val="6B7280"/>
-                </a:solidFill>
-                <a:latin typeface="Arial"/>
-              </a:rPr>
-              <a:t>Forty students report the same dead Wi-Fi forty times. Nobody can tell which problem is actually the biggest.</a:t>
-            </a:r>
-          </a:p>
-        </p:txBody>
-      </p:sp>
-      <p:sp>
-        <p:nvSpPr>
-          <p:cNvPr id="8" name="Rounded Rectangle 7"/>
+          </a:p>
+        </p:txBody>
+      </p:sp>
+      <p:sp>
+        <p:nvSpPr>
+          <p:cNvPr id="6" name="Rounded Rectangle 5"/>
           <p:cNvSpPr/>
           <p:nvPr/>
         </p:nvSpPr>
         <p:spPr>
           <a:xfrm>
-            <a:off x="822960" y="4663440"/>
-            <a:ext cx="10515600" cy="1280160"/>
+            <a:off x="822960" y="2240280"/>
+            <a:ext cx="5029200" cy="2103120"/>
           </a:xfrm>
           <a:prstGeom prst="roundRect">
             <a:avLst>
@@ -3705,20 +3581,19 @@
           <a:lstStyle/>
           <a:p>
             <a:pPr algn="ctr"/>
-            <a:endParaRPr/>
-          </a:p>
-        </p:txBody>
-      </p:sp>
-      <p:sp>
-        <p:nvSpPr>
-          <p:cNvPr id="9" name="TextBox 8"/>
+          </a:p>
+        </p:txBody>
+      </p:sp>
+      <p:sp>
+        <p:nvSpPr>
+          <p:cNvPr id="7" name="TextBox 6"/>
           <p:cNvSpPr txBox="1"/>
           <p:nvPr/>
         </p:nvSpPr>
         <p:spPr>
           <a:xfrm>
-            <a:off x="1188720" y="4983480"/>
-            <a:ext cx="9875520" cy="822960"/>
+            <a:off x="1188720" y="2514600"/>
+            <a:ext cx="4389120" cy="1737360"/>
           </a:xfrm>
           <a:prstGeom prst="rect">
             <a:avLst/>
@@ -3733,59 +3608,52 @@
           <a:p>
             <a:pPr algn="l">
               <a:lnSpc>
-                <a:spcPct val="125000"/>
-              </a:lnSpc>
-            </a:pPr>
-            <a:r>
-              <a:rPr sz="2000" b="1">
-                <a:solidFill>
-                  <a:srgbClr val="4F46E5"/>
-                </a:solidFill>
-                <a:latin typeface="Arial"/>
-              </a:rPr>
-              <a:t>Nobody counts. So the loudest complaint wins, not the most common one.</a:t>
-            </a:r>
-          </a:p>
-        </p:txBody>
-      </p:sp>
-    </p:spTree>
-  </p:cSld>
-  <p:clrMapOvr>
-    <a:masterClrMapping/>
-  </p:clrMapOvr>
-</p:sld>
-</file>
-
-<file path=ppt/slides/slide3.xml><?xml version="1.0" encoding="utf-8"?>
-<p:sld xmlns:a="http://schemas.openxmlformats.org/drawingml/2006/main" xmlns:r="http://schemas.openxmlformats.org/officeDocument/2006/relationships" xmlns:p="http://schemas.openxmlformats.org/presentationml/2006/main">
-  <p:cSld>
-    <p:spTree>
-      <p:nvGrpSpPr>
-        <p:cNvPr id="1" name=""/>
-        <p:cNvGrpSpPr/>
-        <p:nvPr/>
-      </p:nvGrpSpPr>
-      <p:grpSpPr>
-        <a:xfrm>
-          <a:off x="0" y="0"/>
-          <a:ext cx="0" cy="0"/>
-          <a:chOff x="0" y="0"/>
-          <a:chExt cx="0" cy="0"/>
-        </a:xfrm>
-      </p:grpSpPr>
-      <p:sp>
-        <p:nvSpPr>
-          <p:cNvPr id="2" name="Rectangle 1"/>
+                <a:spcPct val="130000"/>
+              </a:lnSpc>
+            </a:pPr>
+            <a:r>
+              <a:rPr sz="2100" b="1">
+                <a:solidFill>
+                  <a:srgbClr val="111827"/>
+                </a:solidFill>
+                <a:latin typeface="Arial"/>
+              </a:rPr>
+              <a:t>They make you fill forms.</a:t>
+            </a:r>
+          </a:p>
+          <a:p>
+            <a:pPr algn="l">
+              <a:lnSpc>
+                <a:spcPct val="130000"/>
+              </a:lnSpc>
+            </a:pPr>
+            <a:r>
+              <a:rPr sz="1500" b="0">
+                <a:solidFill>
+                  <a:srgbClr val="6B7280"/>
+                </a:solidFill>
+                <a:latin typeface="Arial"/>
+              </a:rPr>
+              <a:t>Dropdowns, required fields, a login. So students give up and complain in the hostel WhatsApp group instead.</a:t>
+            </a:r>
+          </a:p>
+        </p:txBody>
+      </p:sp>
+      <p:sp>
+        <p:nvSpPr>
+          <p:cNvPr id="8" name="Rounded Rectangle 7"/>
           <p:cNvSpPr/>
           <p:nvPr/>
         </p:nvSpPr>
         <p:spPr>
           <a:xfrm>
-            <a:off x="0" y="-5862"/>
-            <a:ext cx="12191695" cy="6858000"/>
-          </a:xfrm>
-          <a:prstGeom prst="rect">
-            <a:avLst/>
+            <a:off x="6309360" y="2240280"/>
+            <a:ext cx="5029200" cy="2103120"/>
+          </a:xfrm>
+          <a:prstGeom prst="roundRect">
+            <a:avLst>
+              <a:gd name="adj" fmla="val 6000"/>
+            </a:avLst>
           </a:prstGeom>
           <a:solidFill>
             <a:srgbClr val="FFFFFF"/>
@@ -3814,20 +3682,19 @@
           <a:lstStyle/>
           <a:p>
             <a:pPr algn="ctr"/>
-            <a:endParaRPr dirty="0"/>
-          </a:p>
-        </p:txBody>
-      </p:sp>
-      <p:sp>
-        <p:nvSpPr>
-          <p:cNvPr id="3" name="TextBox 2"/>
+          </a:p>
+        </p:txBody>
+      </p:sp>
+      <p:sp>
+        <p:nvSpPr>
+          <p:cNvPr id="9" name="TextBox 8"/>
           <p:cNvSpPr txBox="1"/>
           <p:nvPr/>
         </p:nvSpPr>
         <p:spPr>
           <a:xfrm>
-            <a:off x="822960" y="566928"/>
-            <a:ext cx="10058400" cy="365760"/>
+            <a:off x="6675120" y="2514600"/>
+            <a:ext cx="4389120" cy="1737360"/>
           </a:xfrm>
           <a:prstGeom prst="rect">
             <a:avLst/>
@@ -3842,101 +3709,23 @@
           <a:p>
             <a:pPr algn="l">
               <a:lnSpc>
-                <a:spcPct val="125000"/>
-              </a:lnSpc>
-            </a:pPr>
-            <a:r>
-              <a:rPr sz="1200" b="1">
-                <a:solidFill>
-                  <a:srgbClr val="4F46E5"/>
-                </a:solidFill>
-                <a:latin typeface="Arial"/>
-              </a:rPr>
-              <a:t>WHAT WE BUILT</a:t>
-            </a:r>
-          </a:p>
-        </p:txBody>
-      </p:sp>
-      <p:sp>
-        <p:nvSpPr>
-          <p:cNvPr id="4" name="TextBox 3"/>
-          <p:cNvSpPr txBox="1"/>
-          <p:nvPr/>
-        </p:nvSpPr>
-        <p:spPr>
-          <a:xfrm>
-            <a:off x="822960" y="914400"/>
-            <a:ext cx="10515600" cy="731520"/>
-          </a:xfrm>
-          <a:prstGeom prst="rect">
-            <a:avLst/>
-          </a:prstGeom>
-          <a:noFill/>
-        </p:spPr>
-        <p:txBody>
-          <a:bodyPr wrap="square">
-            <a:spAutoFit/>
-          </a:bodyPr>
-          <a:lstStyle/>
-          <a:p>
-            <a:pPr algn="l">
-              <a:lnSpc>
-                <a:spcPct val="125000"/>
-              </a:lnSpc>
-            </a:pPr>
-            <a:r>
-              <a:rPr sz="3200" b="1">
+                <a:spcPct val="130000"/>
+              </a:lnSpc>
+            </a:pPr>
+            <a:r>
+              <a:rPr sz="2100" b="1">
                 <a:solidFill>
                   <a:srgbClr val="111827"/>
                 </a:solidFill>
                 <a:latin typeface="Arial"/>
               </a:rPr>
-              <a:t>One board, ranked by how much it hurts.</a:t>
-            </a:r>
-          </a:p>
-        </p:txBody>
-      </p:sp>
-      <p:sp>
-        <p:nvSpPr>
-          <p:cNvPr id="6" name="TextBox 5"/>
-          <p:cNvSpPr txBox="1"/>
-          <p:nvPr/>
-        </p:nvSpPr>
-        <p:spPr>
-          <a:xfrm>
-            <a:off x="7955279" y="1920240"/>
-            <a:ext cx="3474720" cy="4114800"/>
-          </a:xfrm>
-          <a:prstGeom prst="rect">
-            <a:avLst/>
-          </a:prstGeom>
-          <a:noFill/>
-        </p:spPr>
-        <p:txBody>
-          <a:bodyPr wrap="square">
-            <a:spAutoFit/>
-          </a:bodyPr>
-          <a:lstStyle/>
-          <a:p>
-            <a:pPr algn="l">
-              <a:lnSpc>
-                <a:spcPct val="125000"/>
-              </a:lnSpc>
-            </a:pPr>
-            <a:r>
-              <a:rPr sz="2400" b="1">
-                <a:solidFill>
-                  <a:srgbClr val="111827"/>
-                </a:solidFill>
-                <a:latin typeface="Arial"/>
-              </a:rPr>
-              <a:t>46 complaints</a:t>
-            </a:r>
-          </a:p>
-          <a:p>
-            <a:pPr algn="l">
-              <a:lnSpc>
-                <a:spcPct val="125000"/>
+              <a:t>They bury wardens in duplicates.</a:t>
+            </a:r>
+          </a:p>
+          <a:p>
+            <a:pPr algn="l">
+              <a:lnSpc>
+                <a:spcPct val="130000"/>
               </a:lnSpc>
             </a:pPr>
             <a:r>
@@ -3946,172 +3735,29 @@
                 </a:solidFill>
                 <a:latin typeface="Arial"/>
               </a:rPr>
-              <a:t>39 open · 7 escalated</a:t>
-            </a:r>
-          </a:p>
-          <a:p>
-            <a:pPr algn="l">
-              <a:lnSpc>
-                <a:spcPct val="125000"/>
-              </a:lnSpc>
-            </a:pPr>
-            <a:endParaRPr sz="1500" b="0">
-              <a:solidFill>
-                <a:srgbClr val="6B7280"/>
-              </a:solidFill>
-              <a:latin typeface="Arial"/>
-            </a:endParaRPr>
-          </a:p>
-          <a:p>
-            <a:pPr algn="l">
-              <a:lnSpc>
-                <a:spcPct val="125000"/>
-              </a:lnSpc>
-            </a:pPr>
-            <a:r>
-              <a:rPr sz="1500" b="1">
-                <a:solidFill>
-                  <a:srgbClr val="4F46E5"/>
-                </a:solidFill>
-                <a:latin typeface="Arial"/>
-              </a:rPr>
-              <a:t>priority = reports × severity</a:t>
-            </a:r>
-          </a:p>
-          <a:p>
-            <a:pPr algn="l">
-              <a:lnSpc>
-                <a:spcPct val="125000"/>
-              </a:lnSpc>
-            </a:pPr>
-            <a:r>
-              <a:rPr sz="1400" b="0">
-                <a:solidFill>
-                  <a:srgbClr val="6B7280"/>
-                </a:solidFill>
-                <a:latin typeface="Arial"/>
-              </a:rPr>
-              <a:t>Computed in code, never by the model. An issue escalates at 5 reports, or instantly if it is a safety risk.</a:t>
-            </a:r>
-          </a:p>
-          <a:p>
-            <a:pPr algn="l">
-              <a:lnSpc>
-                <a:spcPct val="125000"/>
-              </a:lnSpc>
-            </a:pPr>
-            <a:endParaRPr sz="1400" b="0">
-              <a:solidFill>
-                <a:srgbClr val="6B7280"/>
-              </a:solidFill>
-              <a:latin typeface="Arial"/>
-            </a:endParaRPr>
-          </a:p>
-          <a:p>
-            <a:pPr algn="l">
-              <a:lnSpc>
-                <a:spcPct val="125000"/>
-              </a:lnSpc>
-            </a:pPr>
-            <a:r>
-              <a:rPr sz="1500" b="1">
-                <a:solidFill>
-                  <a:srgbClr val="4F46E5"/>
-                </a:solidFill>
-                <a:latin typeface="Arial"/>
-              </a:rPr>
-              <a:t>15 buckets</a:t>
-            </a:r>
-          </a:p>
-          <a:p>
-            <a:pPr algn="l">
-              <a:lnSpc>
-                <a:spcPct val="125000"/>
-              </a:lnSpc>
-            </a:pPr>
-            <a:r>
-              <a:rPr sz="1400" b="0">
-                <a:solidFill>
-                  <a:srgbClr val="6B7280"/>
-                </a:solidFill>
-                <a:latin typeface="Arial"/>
-              </a:rPr>
-              <a:t>Each authority — Hostel Office, Mess Committee, IT Cell — sees only its own queue.</a:t>
-            </a:r>
-          </a:p>
-        </p:txBody>
-      </p:sp>
-      <p:pic>
-        <p:nvPicPr>
-          <p:cNvPr id="10" name="Picture 9">
-            <a:extLst>
-              <a:ext uri="{FF2B5EF4-FFF2-40B4-BE49-F238E27FC236}">
-                <a16:creationId xmlns:a16="http://schemas.microsoft.com/office/drawing/2014/main" id="{9134C842-9589-D39B-3CDB-01DB1A5A90C8}"/>
-              </a:ext>
-            </a:extLst>
-          </p:cNvPr>
-          <p:cNvPicPr>
-            <a:picLocks noChangeAspect="1"/>
-          </p:cNvPicPr>
-          <p:nvPr/>
-        </p:nvPicPr>
-        <p:blipFill>
-          <a:blip r:embed="rId2"/>
-          <a:stretch>
-            <a:fillRect/>
-          </a:stretch>
-        </p:blipFill>
-        <p:spPr>
-          <a:xfrm>
-            <a:off x="645942" y="1920240"/>
-            <a:ext cx="7181560" cy="3965918"/>
-          </a:xfrm>
-          <a:prstGeom prst="rect">
-            <a:avLst/>
-          </a:prstGeom>
-        </p:spPr>
-      </p:pic>
-    </p:spTree>
-  </p:cSld>
-  <p:clrMapOvr>
-    <a:masterClrMapping/>
-  </p:clrMapOvr>
-</p:sld>
-</file>
-
-<file path=ppt/slides/slide4.xml><?xml version="1.0" encoding="utf-8"?>
-<p:sld xmlns:a="http://schemas.openxmlformats.org/drawingml/2006/main" xmlns:r="http://schemas.openxmlformats.org/officeDocument/2006/relationships" xmlns:p="http://schemas.openxmlformats.org/presentationml/2006/main">
-  <p:cSld>
-    <p:spTree>
-      <p:nvGrpSpPr>
-        <p:cNvPr id="1" name=""/>
-        <p:cNvGrpSpPr/>
-        <p:nvPr/>
-      </p:nvGrpSpPr>
-      <p:grpSpPr>
-        <a:xfrm>
-          <a:off x="0" y="0"/>
-          <a:ext cx="0" cy="0"/>
-          <a:chOff x="0" y="0"/>
-          <a:chExt cx="0" cy="0"/>
-        </a:xfrm>
-      </p:grpSpPr>
-      <p:sp>
-        <p:nvSpPr>
-          <p:cNvPr id="2" name="Rectangle 1"/>
+              <a:t>Forty students report the same dead Wi-Fi forty times. Nobody can tell which problem is actually the biggest.</a:t>
+            </a:r>
+          </a:p>
+        </p:txBody>
+      </p:sp>
+      <p:sp>
+        <p:nvSpPr>
+          <p:cNvPr id="10" name="Rounded Rectangle 9"/>
           <p:cNvSpPr/>
           <p:nvPr/>
         </p:nvSpPr>
         <p:spPr>
           <a:xfrm>
-            <a:off x="0" y="0"/>
-            <a:ext cx="12191695" cy="6858000"/>
-          </a:xfrm>
-          <a:prstGeom prst="rect">
-            <a:avLst/>
+            <a:off x="822960" y="4709160"/>
+            <a:ext cx="10515600" cy="1051560"/>
+          </a:xfrm>
+          <a:prstGeom prst="roundRect">
+            <a:avLst>
+              <a:gd name="adj" fmla="val 12000"/>
+            </a:avLst>
           </a:prstGeom>
           <a:solidFill>
-            <a:srgbClr val="F5F5F4"/>
+            <a:srgbClr val="111827"/>
           </a:solidFill>
           <a:ln>
             <a:noFill/>
@@ -4137,20 +3783,19 @@
           <a:lstStyle/>
           <a:p>
             <a:pPr algn="ctr"/>
-            <a:endParaRPr/>
-          </a:p>
-        </p:txBody>
-      </p:sp>
-      <p:sp>
-        <p:nvSpPr>
-          <p:cNvPr id="3" name="TextBox 2"/>
+          </a:p>
+        </p:txBody>
+      </p:sp>
+      <p:sp>
+        <p:nvSpPr>
+          <p:cNvPr id="11" name="TextBox 10"/>
           <p:cNvSpPr txBox="1"/>
           <p:nvPr/>
         </p:nvSpPr>
         <p:spPr>
           <a:xfrm>
-            <a:off x="822960" y="566928"/>
-            <a:ext cx="10058400" cy="365760"/>
+            <a:off x="1280160" y="4956048"/>
+            <a:ext cx="9692640" cy="548640"/>
           </a:xfrm>
           <a:prstGeom prst="rect">
             <a:avLst/>
@@ -4169,27 +3814,27 @@
               </a:lnSpc>
             </a:pPr>
             <a:r>
-              <a:rPr sz="1200" b="1">
-                <a:solidFill>
-                  <a:srgbClr val="4F46E5"/>
-                </a:solidFill>
-                <a:latin typeface="Arial"/>
-              </a:rPr>
-              <a:t>THE PART NOBODY ELSE DOES</a:t>
-            </a:r>
-          </a:p>
-        </p:txBody>
-      </p:sp>
-      <p:sp>
-        <p:nvSpPr>
-          <p:cNvPr id="4" name="TextBox 3"/>
+              <a:rPr sz="1900" b="1">
+                <a:solidFill>
+                  <a:srgbClr val="FFFFFF"/>
+                </a:solidFill>
+                <a:latin typeface="Arial"/>
+              </a:rPr>
+              <a:t>Nobody counts. So the loudest complaint wins, not the most common one.</a:t>
+            </a:r>
+          </a:p>
+        </p:txBody>
+      </p:sp>
+      <p:sp>
+        <p:nvSpPr>
+          <p:cNvPr id="12" name="TextBox 11"/>
           <p:cNvSpPr txBox="1"/>
           <p:nvPr/>
         </p:nvSpPr>
         <p:spPr>
           <a:xfrm>
-            <a:off x="822960" y="914400"/>
-            <a:ext cx="10515600" cy="914400"/>
+            <a:off x="822960" y="6355080"/>
+            <a:ext cx="3657600" cy="274320"/>
           </a:xfrm>
           <a:prstGeom prst="rect">
             <a:avLst/>
@@ -4208,33 +3853,90 @@
               </a:lnSpc>
             </a:pPr>
             <a:r>
-              <a:rPr sz="4000" b="1">
-                <a:solidFill>
-                  <a:srgbClr val="111827"/>
-                </a:solidFill>
-                <a:latin typeface="Arial"/>
-              </a:rPr>
-              <a:t>Gemma asks back when it is unsure.</a:t>
-            </a:r>
-          </a:p>
-        </p:txBody>
-      </p:sp>
-      <p:sp>
-        <p:nvSpPr>
-          <p:cNvPr id="5" name="Rectangle 4"/>
+              <a:rPr sz="1000" b="0">
+                <a:solidFill>
+                  <a:srgbClr val="6B7280"/>
+                </a:solidFill>
+                <a:latin typeface="Arial"/>
+              </a:rPr>
+              <a:t>Shikayat</a:t>
+            </a:r>
+          </a:p>
+        </p:txBody>
+      </p:sp>
+      <p:sp>
+        <p:nvSpPr>
+          <p:cNvPr id="13" name="TextBox 12"/>
+          <p:cNvSpPr txBox="1"/>
+          <p:nvPr/>
+        </p:nvSpPr>
+        <p:spPr>
+          <a:xfrm>
+            <a:off x="10424160" y="6355080"/>
+            <a:ext cx="914400" cy="274320"/>
+          </a:xfrm>
+          <a:prstGeom prst="rect">
+            <a:avLst/>
+          </a:prstGeom>
+          <a:noFill/>
+        </p:spPr>
+        <p:txBody>
+          <a:bodyPr wrap="square">
+            <a:spAutoFit/>
+          </a:bodyPr>
+          <a:lstStyle/>
+          <a:p>
+            <a:pPr algn="r">
+              <a:lnSpc>
+                <a:spcPct val="125000"/>
+              </a:lnSpc>
+            </a:pPr>
+            <a:r>
+              <a:rPr sz="1000" b="0">
+                <a:solidFill>
+                  <a:srgbClr val="6B7280"/>
+                </a:solidFill>
+                <a:latin typeface="Arial"/>
+              </a:rPr>
+              <a:t>2</a:t>
+            </a:r>
+          </a:p>
+        </p:txBody>
+      </p:sp>
+    </p:spTree>
+  </p:cSld>
+  <p:clrMapOvr>
+    <a:masterClrMapping/>
+  </p:clrMapOvr>
+</p:sld>
+</file>
+
+<file path=ppt/slides/slide3.xml><?xml version="1.0" encoding="utf-8"?>
+<p:sld xmlns:a="http://schemas.openxmlformats.org/drawingml/2006/main" xmlns:p="http://schemas.openxmlformats.org/presentationml/2006/main" xmlns:r="http://schemas.openxmlformats.org/officeDocument/2006/relationships">
+  <p:cSld>
+    <p:spTree>
+      <p:nvGrpSpPr>
+        <p:cNvPr id="1" name=""/>
+        <p:cNvGrpSpPr/>
+        <p:nvPr/>
+      </p:nvGrpSpPr>
+      <p:grpSpPr/>
+      <p:sp>
+        <p:nvSpPr>
+          <p:cNvPr id="2" name="Rectangle 1"/>
           <p:cNvSpPr/>
           <p:nvPr/>
         </p:nvSpPr>
         <p:spPr>
           <a:xfrm>
-            <a:off x="822960" y="1783080"/>
-            <a:ext cx="822960" cy="63500"/>
+            <a:off x="0" y="0"/>
+            <a:ext cx="12191695" cy="6858000"/>
           </a:xfrm>
           <a:prstGeom prst="rect">
             <a:avLst/>
           </a:prstGeom>
           <a:solidFill>
-            <a:srgbClr val="4F46E5"/>
+            <a:srgbClr val="FFFFFF"/>
           </a:solidFill>
           <a:ln>
             <a:noFill/>
@@ -4260,20 +3962,19 @@
           <a:lstStyle/>
           <a:p>
             <a:pPr algn="ctr"/>
-            <a:endParaRPr/>
-          </a:p>
-        </p:txBody>
-      </p:sp>
-      <p:sp>
-        <p:nvSpPr>
-          <p:cNvPr id="6" name="TextBox 5"/>
+          </a:p>
+        </p:txBody>
+      </p:sp>
+      <p:sp>
+        <p:nvSpPr>
+          <p:cNvPr id="3" name="TextBox 2"/>
           <p:cNvSpPr txBox="1"/>
           <p:nvPr/>
         </p:nvSpPr>
         <p:spPr>
           <a:xfrm>
-            <a:off x="822960" y="2194560"/>
-            <a:ext cx="4937760" cy="457200"/>
+            <a:off x="822960" y="548640"/>
+            <a:ext cx="10058400" cy="320040"/>
           </a:xfrm>
           <a:prstGeom prst="rect">
             <a:avLst/>
@@ -4292,27 +3993,66 @@
               </a:lnSpc>
             </a:pPr>
             <a:r>
-              <a:rPr sz="1500" b="0">
-                <a:solidFill>
-                  <a:srgbClr val="6B7280"/>
-                </a:solidFill>
-                <a:latin typeface="Arial"/>
-              </a:rPr>
-              <a:t>A vague report would normally be filed and ignored:</a:t>
-            </a:r>
-          </a:p>
-        </p:txBody>
-      </p:sp>
-      <p:sp>
-        <p:nvSpPr>
-          <p:cNvPr id="7" name="Rounded Rectangle 6"/>
+              <a:rPr sz="1100" b="1">
+                <a:solidFill>
+                  <a:srgbClr val="4F46E5"/>
+                </a:solidFill>
+                <a:latin typeface="Arial"/>
+              </a:rPr>
+              <a:t>WHAT WE BUILT</a:t>
+            </a:r>
+          </a:p>
+        </p:txBody>
+      </p:sp>
+      <p:sp>
+        <p:nvSpPr>
+          <p:cNvPr id="4" name="TextBox 3"/>
+          <p:cNvSpPr txBox="1"/>
+          <p:nvPr/>
+        </p:nvSpPr>
+        <p:spPr>
+          <a:xfrm>
+            <a:off x="822960" y="868680"/>
+            <a:ext cx="10515600" cy="548640"/>
+          </a:xfrm>
+          <a:prstGeom prst="rect">
+            <a:avLst/>
+          </a:prstGeom>
+          <a:noFill/>
+        </p:spPr>
+        <p:txBody>
+          <a:bodyPr wrap="square">
+            <a:spAutoFit/>
+          </a:bodyPr>
+          <a:lstStyle/>
+          <a:p>
+            <a:pPr algn="l">
+              <a:lnSpc>
+                <a:spcPct val="125000"/>
+              </a:lnSpc>
+            </a:pPr>
+            <a:r>
+              <a:rPr sz="3000" b="1">
+                <a:solidFill>
+                  <a:srgbClr val="111827"/>
+                </a:solidFill>
+                <a:latin typeface="Arial"/>
+              </a:rPr>
+              <a:t>One board, ranked by how much it hurts.</a:t>
+            </a:r>
+          </a:p>
+        </p:txBody>
+      </p:sp>
+      <p:sp>
+        <p:nvSpPr>
+          <p:cNvPr id="5" name="Rounded Rectangle 4"/>
           <p:cNvSpPr/>
           <p:nvPr/>
         </p:nvSpPr>
         <p:spPr>
           <a:xfrm>
-            <a:off x="822960" y="2697480"/>
-            <a:ext cx="4937760" cy="2651760"/>
+            <a:off x="713232" y="1627632"/>
+            <a:ext cx="6986016" cy="4956048"/>
           </a:xfrm>
           <a:prstGeom prst="roundRect">
             <a:avLst>
@@ -4320,7 +4060,7 @@
             </a:avLst>
           </a:prstGeom>
           <a:solidFill>
-            <a:srgbClr val="FFFFFF"/>
+            <a:srgbClr val="F5F5F4"/>
           </a:solidFill>
           <a:ln>
             <a:noFill/>
@@ -4346,20 +4086,43 @@
           <a:lstStyle/>
           <a:p>
             <a:pPr algn="ctr"/>
-            <a:endParaRPr/>
-          </a:p>
-        </p:txBody>
-      </p:sp>
-      <p:sp>
-        <p:nvSpPr>
-          <p:cNvPr id="8" name="TextBox 7"/>
+          </a:p>
+        </p:txBody>
+      </p:sp>
+      <p:pic>
+        <p:nvPicPr>
+          <p:cNvPr id="6" name="Picture 5" descr="screenshot-deck.png"/>
+          <p:cNvPicPr>
+            <a:picLocks noChangeAspect="1"/>
+          </p:cNvPicPr>
+          <p:nvPr/>
+        </p:nvPicPr>
+        <p:blipFill>
+          <a:blip r:embed="rId2"/>
+          <a:stretch>
+            <a:fillRect/>
+          </a:stretch>
+        </p:blipFill>
+        <p:spPr>
+          <a:xfrm>
+            <a:off x="822960" y="1737360"/>
+            <a:ext cx="6766560" cy="4736592"/>
+          </a:xfrm>
+          <a:prstGeom prst="rect">
+            <a:avLst/>
+          </a:prstGeom>
+        </p:spPr>
+      </p:pic>
+      <p:sp>
+        <p:nvSpPr>
+          <p:cNvPr id="7" name="TextBox 6"/>
           <p:cNvSpPr txBox="1"/>
           <p:nvPr/>
         </p:nvSpPr>
         <p:spPr>
           <a:xfrm>
-            <a:off x="1143000" y="2926080"/>
-            <a:ext cx="4389120" cy="2286000"/>
+            <a:off x="8138160" y="1737360"/>
+            <a:ext cx="2377440" cy="731520"/>
           </a:xfrm>
           <a:prstGeom prst="rect">
             <a:avLst/>
@@ -4374,137 +4137,31 @@
           <a:p>
             <a:pPr algn="l">
               <a:lnSpc>
-                <a:spcPct val="120000"/>
-              </a:lnSpc>
-            </a:pPr>
-            <a:r>
-              <a:rPr sz="1100" b="1">
-                <a:solidFill>
-                  <a:srgbClr val="6B7280"/>
-                </a:solidFill>
-                <a:latin typeface="Arial"/>
-              </a:rPr>
-              <a:t>Student</a:t>
-            </a:r>
-          </a:p>
-          <a:p>
-            <a:pPr algn="l">
-              <a:lnSpc>
-                <a:spcPct val="120000"/>
-              </a:lnSpc>
-            </a:pPr>
-            <a:r>
-              <a:rPr sz="1700" b="0">
+                <a:spcPct val="125000"/>
+              </a:lnSpc>
+            </a:pPr>
+            <a:r>
+              <a:rPr sz="4200" b="1">
                 <a:solidFill>
                   <a:srgbClr val="111827"/>
                 </a:solidFill>
                 <a:latin typeface="Arial"/>
               </a:rPr>
-              <a:t>AC se paani tapak raha hai</a:t>
-            </a:r>
-          </a:p>
-          <a:p>
-            <a:pPr algn="l">
-              <a:lnSpc>
-                <a:spcPct val="120000"/>
-              </a:lnSpc>
-            </a:pPr>
-            <a:endParaRPr sz="1700" b="0">
-              <a:solidFill>
-                <a:srgbClr val="111827"/>
-              </a:solidFill>
-              <a:latin typeface="Arial"/>
-            </a:endParaRPr>
-          </a:p>
-          <a:p>
-            <a:pPr algn="l">
-              <a:lnSpc>
-                <a:spcPct val="120000"/>
-              </a:lnSpc>
-            </a:pPr>
-            <a:r>
-              <a:rPr sz="1100" b="1">
-                <a:solidFill>
-                  <a:srgbClr val="4F46E5"/>
-                </a:solidFill>
-                <a:latin typeface="Arial"/>
-              </a:rPr>
-              <a:t>Gemma</a:t>
-            </a:r>
-          </a:p>
-          <a:p>
-            <a:pPr algn="l">
-              <a:lnSpc>
-                <a:spcPct val="120000"/>
-              </a:lnSpc>
-            </a:pPr>
-            <a:r>
-              <a:rPr sz="1700" b="0">
-                <a:solidFill>
-                  <a:srgbClr val="4F46E5"/>
-                </a:solidFill>
-                <a:latin typeface="Arial"/>
-              </a:rPr>
-              <a:t>Kaunse hostel aur kis room mein AC se paani tapak raha hai?</a:t>
-            </a:r>
-          </a:p>
-          <a:p>
-            <a:pPr algn="l">
-              <a:lnSpc>
-                <a:spcPct val="120000"/>
-              </a:lnSpc>
-            </a:pPr>
-            <a:endParaRPr sz="1700" b="0">
-              <a:solidFill>
-                <a:srgbClr val="4F46E5"/>
-              </a:solidFill>
-              <a:latin typeface="Arial"/>
-            </a:endParaRPr>
-          </a:p>
-          <a:p>
-            <a:pPr algn="l">
-              <a:lnSpc>
-                <a:spcPct val="120000"/>
-              </a:lnSpc>
-            </a:pPr>
-            <a:r>
-              <a:rPr sz="1100" b="1">
-                <a:solidFill>
-                  <a:srgbClr val="6B7280"/>
-                </a:solidFill>
-                <a:latin typeface="Arial"/>
-              </a:rPr>
-              <a:t>Student</a:t>
-            </a:r>
-          </a:p>
-          <a:p>
-            <a:pPr algn="l">
-              <a:lnSpc>
-                <a:spcPct val="120000"/>
-              </a:lnSpc>
-            </a:pPr>
-            <a:r>
-              <a:rPr sz="1700" b="0">
-                <a:solidFill>
-                  <a:srgbClr val="111827"/>
-                </a:solidFill>
-                <a:latin typeface="Arial"/>
-              </a:rPr>
-              <a:t>BH2 E207</a:t>
-            </a:r>
-          </a:p>
-        </p:txBody>
-      </p:sp>
-      <p:sp>
-        <p:nvSpPr>
-          <p:cNvPr id="9" name="TextBox 8"/>
+              <a:t>46</a:t>
+            </a:r>
+          </a:p>
+        </p:txBody>
+      </p:sp>
+      <p:sp>
+        <p:nvSpPr>
+          <p:cNvPr id="8" name="TextBox 7"/>
           <p:cNvSpPr txBox="1"/>
           <p:nvPr/>
         </p:nvSpPr>
         <p:spPr>
           <a:xfrm>
-            <a:off x="6309360" y="2194560"/>
-            <a:ext cx="5029200" cy="3108960"/>
+            <a:off x="8138160" y="2395728"/>
+            <a:ext cx="2377440" cy="365760"/>
           </a:xfrm>
           <a:prstGeom prst="rect">
             <a:avLst/>
@@ -4523,15 +4180,38 @@
               </a:lnSpc>
             </a:pPr>
             <a:r>
-              <a:rPr sz="1800" b="1">
-                <a:solidFill>
-                  <a:srgbClr val="111827"/>
-                </a:solidFill>
-                <a:latin typeface="Arial"/>
-              </a:rPr>
-              <a:t>It replies in the student's own language.</a:t>
-            </a:r>
-          </a:p>
+              <a:rPr sz="1200" b="0">
+                <a:solidFill>
+                  <a:srgbClr val="6B7280"/>
+                </a:solidFill>
+                <a:latin typeface="Arial"/>
+              </a:rPr>
+              <a:t>complaints</a:t>
+            </a:r>
+          </a:p>
+        </p:txBody>
+      </p:sp>
+      <p:sp>
+        <p:nvSpPr>
+          <p:cNvPr id="9" name="TextBox 8"/>
+          <p:cNvSpPr txBox="1"/>
+          <p:nvPr/>
+        </p:nvSpPr>
+        <p:spPr>
+          <a:xfrm>
+            <a:off x="9966960" y="1737360"/>
+            <a:ext cx="2377440" cy="731520"/>
+          </a:xfrm>
+          <a:prstGeom prst="rect">
+            <a:avLst/>
+          </a:prstGeom>
+          <a:noFill/>
+        </p:spPr>
+        <p:txBody>
+          <a:bodyPr wrap="square">
+            <a:spAutoFit/>
+          </a:bodyPr>
+          <a:lstStyle/>
           <a:p>
             <a:pPr algn="l">
               <a:lnSpc>
@@ -4539,80 +4219,271 @@
               </a:lnSpc>
             </a:pPr>
             <a:r>
-              <a:rPr sz="1500" b="0">
+              <a:rPr sz="4200" b="1">
+                <a:solidFill>
+                  <a:srgbClr val="4F46E5"/>
+                </a:solidFill>
+                <a:latin typeface="Arial"/>
+              </a:rPr>
+              <a:t>7</a:t>
+            </a:r>
+          </a:p>
+        </p:txBody>
+      </p:sp>
+      <p:sp>
+        <p:nvSpPr>
+          <p:cNvPr id="10" name="TextBox 9"/>
+          <p:cNvSpPr txBox="1"/>
+          <p:nvPr/>
+        </p:nvSpPr>
+        <p:spPr>
+          <a:xfrm>
+            <a:off x="9966960" y="2395728"/>
+            <a:ext cx="2377440" cy="365760"/>
+          </a:xfrm>
+          <a:prstGeom prst="rect">
+            <a:avLst/>
+          </a:prstGeom>
+          <a:noFill/>
+        </p:spPr>
+        <p:txBody>
+          <a:bodyPr wrap="square">
+            <a:spAutoFit/>
+          </a:bodyPr>
+          <a:lstStyle/>
+          <a:p>
+            <a:pPr algn="l">
+              <a:lnSpc>
+                <a:spcPct val="125000"/>
+              </a:lnSpc>
+            </a:pPr>
+            <a:r>
+              <a:rPr sz="1200" b="0">
                 <a:solidFill>
                   <a:srgbClr val="6B7280"/>
                 </a:solidFill>
                 <a:latin typeface="Arial"/>
               </a:rPr>
-              <a:t>Hinglish in, Hinglish out. One short question, at most two per report — a limit our code enforces, not a rule we hope the model follows.</a:t>
-            </a:r>
-          </a:p>
+              <a:t>escalated</a:t>
+            </a:r>
+          </a:p>
+        </p:txBody>
+      </p:sp>
+      <p:sp>
+        <p:nvSpPr>
+          <p:cNvPr id="11" name="TextBox 10"/>
+          <p:cNvSpPr txBox="1"/>
+          <p:nvPr/>
+        </p:nvSpPr>
+        <p:spPr>
+          <a:xfrm>
+            <a:off x="8138160" y="3017520"/>
+            <a:ext cx="3383280" cy="2926080"/>
+          </a:xfrm>
+          <a:prstGeom prst="rect">
+            <a:avLst/>
+          </a:prstGeom>
+          <a:noFill/>
+        </p:spPr>
+        <p:txBody>
+          <a:bodyPr wrap="square">
+            <a:spAutoFit/>
+          </a:bodyPr>
+          <a:lstStyle/>
+          <a:p>
+            <a:pPr algn="l">
+              <a:lnSpc>
+                <a:spcPct val="130000"/>
+              </a:lnSpc>
+            </a:pPr>
+            <a:r>
+              <a:rPr sz="1500" b="1">
+                <a:solidFill>
+                  <a:srgbClr val="4F46E5"/>
+                </a:solidFill>
+                <a:latin typeface="Arial"/>
+              </a:rPr>
+              <a:t>priority = reports × severity</a:t>
+            </a:r>
+          </a:p>
+          <a:p>
+            <a:pPr algn="l">
+              <a:lnSpc>
+                <a:spcPct val="130000"/>
+              </a:lnSpc>
+            </a:pPr>
+            <a:r>
+              <a:rPr sz="1400" b="0">
+                <a:solidFill>
+                  <a:srgbClr val="6B7280"/>
+                </a:solidFill>
+                <a:latin typeface="Arial"/>
+              </a:rPr>
+              <a:t>Computed in code, never by the model. An issue escalates at five reports, or at once if it is a safety risk.</a:t>
+            </a:r>
+          </a:p>
+          <a:p>
+            <a:pPr algn="l">
+              <a:lnSpc>
+                <a:spcPct val="130000"/>
+              </a:lnSpc>
+            </a:pPr>
+            <a:r>
+              <a:rPr sz="700" b="0">
+                <a:solidFill>
+                  <a:srgbClr val="6B7280"/>
+                </a:solidFill>
+                <a:latin typeface="Arial"/>
+              </a:rPr>
+              <a:t/>
+            </a:r>
+          </a:p>
+          <a:p>
+            <a:pPr algn="l">
+              <a:lnSpc>
+                <a:spcPct val="130000"/>
+              </a:lnSpc>
+            </a:pPr>
+            <a:r>
+              <a:rPr sz="1500" b="1">
+                <a:solidFill>
+                  <a:srgbClr val="4F46E5"/>
+                </a:solidFill>
+                <a:latin typeface="Arial"/>
+              </a:rPr>
+              <a:t>15 buckets, 7 authorities</a:t>
+            </a:r>
+          </a:p>
+          <a:p>
+            <a:pPr algn="l">
+              <a:lnSpc>
+                <a:spcPct val="130000"/>
+              </a:lnSpc>
+            </a:pPr>
+            <a:r>
+              <a:rPr sz="1400" b="0">
+                <a:solidFill>
+                  <a:srgbClr val="6B7280"/>
+                </a:solidFill>
+                <a:latin typeface="Arial"/>
+              </a:rPr>
+              <a:t>Hostel Office, Mess Committee, IT Cell and the rest each see only their own queue.</a:t>
+            </a:r>
+          </a:p>
+        </p:txBody>
+      </p:sp>
+      <p:sp>
+        <p:nvSpPr>
+          <p:cNvPr id="12" name="TextBox 11"/>
+          <p:cNvSpPr txBox="1"/>
+          <p:nvPr/>
+        </p:nvSpPr>
+        <p:spPr>
+          <a:xfrm>
+            <a:off x="822960" y="6355080"/>
+            <a:ext cx="3657600" cy="274320"/>
+          </a:xfrm>
+          <a:prstGeom prst="rect">
+            <a:avLst/>
+          </a:prstGeom>
+          <a:noFill/>
+        </p:spPr>
+        <p:txBody>
+          <a:bodyPr wrap="square">
+            <a:spAutoFit/>
+          </a:bodyPr>
+          <a:lstStyle/>
           <a:p>
             <a:pPr algn="l">
               <a:lnSpc>
                 <a:spcPct val="125000"/>
               </a:lnSpc>
             </a:pPr>
-            <a:endParaRPr sz="1500" b="0">
-              <a:solidFill>
-                <a:srgbClr val="6B7280"/>
-              </a:solidFill>
-              <a:latin typeface="Arial"/>
-            </a:endParaRPr>
-          </a:p>
-          <a:p>
-            <a:pPr algn="l">
+            <a:r>
+              <a:rPr sz="1000" b="0">
+                <a:solidFill>
+                  <a:srgbClr val="6B7280"/>
+                </a:solidFill>
+                <a:latin typeface="Arial"/>
+              </a:rPr>
+              <a:t>Shikayat</a:t>
+            </a:r>
+          </a:p>
+        </p:txBody>
+      </p:sp>
+      <p:sp>
+        <p:nvSpPr>
+          <p:cNvPr id="13" name="TextBox 12"/>
+          <p:cNvSpPr txBox="1"/>
+          <p:nvPr/>
+        </p:nvSpPr>
+        <p:spPr>
+          <a:xfrm>
+            <a:off x="10424160" y="6355080"/>
+            <a:ext cx="914400" cy="274320"/>
+          </a:xfrm>
+          <a:prstGeom prst="rect">
+            <a:avLst/>
+          </a:prstGeom>
+          <a:noFill/>
+        </p:spPr>
+        <p:txBody>
+          <a:bodyPr wrap="square">
+            <a:spAutoFit/>
+          </a:bodyPr>
+          <a:lstStyle/>
+          <a:p>
+            <a:pPr algn="r">
               <a:lnSpc>
                 <a:spcPct val="125000"/>
               </a:lnSpc>
             </a:pPr>
             <a:r>
-              <a:rPr sz="1800" b="1">
-                <a:solidFill>
-                  <a:srgbClr val="111827"/>
-                </a:solidFill>
-                <a:latin typeface="Arial"/>
-              </a:rPr>
-              <a:t>It knows what it already has.</a:t>
-            </a:r>
-          </a:p>
-          <a:p>
-            <a:pPr algn="l">
-              <a:lnSpc>
-                <a:spcPct val="125000"/>
-              </a:lnSpc>
-            </a:pPr>
-            <a:r>
-              <a:rPr sz="1500" b="0">
+              <a:rPr sz="1000" b="0">
                 <a:solidFill>
                   <a:srgbClr val="6B7280"/>
                 </a:solidFill>
                 <a:latin typeface="Arial"/>
               </a:rPr>
-              <a:t>Before deciding, it searches the open complaints. Same issue, same place → merged, and the count goes up. Different room → a new complaint.</a:t>
-            </a:r>
-          </a:p>
-        </p:txBody>
-      </p:sp>
-      <p:sp>
-        <p:nvSpPr>
-          <p:cNvPr id="10" name="Rounded Rectangle 9"/>
+              <a:t>3</a:t>
+            </a:r>
+          </a:p>
+        </p:txBody>
+      </p:sp>
+    </p:spTree>
+  </p:cSld>
+  <p:clrMapOvr>
+    <a:masterClrMapping/>
+  </p:clrMapOvr>
+</p:sld>
+</file>
+
+<file path=ppt/slides/slide4.xml><?xml version="1.0" encoding="utf-8"?>
+<p:sld xmlns:a="http://schemas.openxmlformats.org/drawingml/2006/main" xmlns:p="http://schemas.openxmlformats.org/presentationml/2006/main" xmlns:r="http://schemas.openxmlformats.org/officeDocument/2006/relationships">
+  <p:cSld>
+    <p:spTree>
+      <p:nvGrpSpPr>
+        <p:cNvPr id="1" name=""/>
+        <p:cNvGrpSpPr/>
+        <p:nvPr/>
+      </p:nvGrpSpPr>
+      <p:grpSpPr/>
+      <p:sp>
+        <p:nvSpPr>
+          <p:cNvPr id="2" name="Rectangle 1"/>
           <p:cNvSpPr/>
           <p:nvPr/>
         </p:nvSpPr>
         <p:spPr>
           <a:xfrm>
-            <a:off x="822960" y="5577840"/>
-            <a:ext cx="10515600" cy="868680"/>
-          </a:xfrm>
-          <a:prstGeom prst="roundRect">
-            <a:avLst>
-              <a:gd name="adj" fmla="val 6000"/>
-            </a:avLst>
+            <a:off x="0" y="0"/>
+            <a:ext cx="12191695" cy="6858000"/>
+          </a:xfrm>
+          <a:prstGeom prst="rect">
+            <a:avLst/>
           </a:prstGeom>
           <a:solidFill>
-            <a:srgbClr val="FFFFFF"/>
+            <a:srgbClr val="F5F5F4"/>
           </a:solidFill>
           <a:ln>
             <a:noFill/>
@@ -4638,20 +4509,19 @@
           <a:lstStyle/>
           <a:p>
             <a:pPr algn="ctr"/>
-            <a:endParaRPr/>
-          </a:p>
-        </p:txBody>
-      </p:sp>
-      <p:sp>
-        <p:nvSpPr>
-          <p:cNvPr id="11" name="TextBox 10"/>
+          </a:p>
+        </p:txBody>
+      </p:sp>
+      <p:sp>
+        <p:nvSpPr>
+          <p:cNvPr id="3" name="TextBox 2"/>
           <p:cNvSpPr txBox="1"/>
           <p:nvPr/>
         </p:nvSpPr>
         <p:spPr>
           <a:xfrm>
-            <a:off x="1188720" y="5760720"/>
-            <a:ext cx="9875520" cy="548640"/>
+            <a:off x="822960" y="566928"/>
+            <a:ext cx="10058400" cy="365760"/>
           </a:xfrm>
           <a:prstGeom prst="rect">
             <a:avLst/>
@@ -4670,58 +4540,72 @@
               </a:lnSpc>
             </a:pPr>
             <a:r>
-              <a:rPr sz="1600" b="1">
+              <a:rPr sz="1200" b="1">
                 <a:solidFill>
                   <a:srgbClr val="4F46E5"/>
                 </a:solidFill>
                 <a:latin typeface="Arial"/>
               </a:rPr>
-              <a:t>Filed as #47 in the Hostel Office queue — BH2 (Gopad), room E207.</a:t>
-            </a:r>
-          </a:p>
-        </p:txBody>
-      </p:sp>
-    </p:spTree>
-  </p:cSld>
-  <p:clrMapOvr>
-    <a:masterClrMapping/>
-  </p:clrMapOvr>
-</p:sld>
-</file>
-
-<file path=ppt/slides/slide5.xml><?xml version="1.0" encoding="utf-8"?>
-<p:sld xmlns:a="http://schemas.openxmlformats.org/drawingml/2006/main" xmlns:r="http://schemas.openxmlformats.org/officeDocument/2006/relationships" xmlns:p="http://schemas.openxmlformats.org/presentationml/2006/main">
-  <p:cSld>
-    <p:spTree>
-      <p:nvGrpSpPr>
-        <p:cNvPr id="1" name=""/>
-        <p:cNvGrpSpPr/>
-        <p:nvPr/>
-      </p:nvGrpSpPr>
-      <p:grpSpPr>
-        <a:xfrm>
-          <a:off x="0" y="0"/>
-          <a:ext cx="0" cy="0"/>
-          <a:chOff x="0" y="0"/>
-          <a:chExt cx="0" cy="0"/>
-        </a:xfrm>
-      </p:grpSpPr>
-      <p:sp>
-        <p:nvSpPr>
-          <p:cNvPr id="2" name="Rectangle 1"/>
+              <a:t>THE PART NOBODY ELSE DOES</a:t>
+            </a:r>
+          </a:p>
+        </p:txBody>
+      </p:sp>
+      <p:sp>
+        <p:nvSpPr>
+          <p:cNvPr id="4" name="TextBox 3"/>
+          <p:cNvSpPr txBox="1"/>
+          <p:nvPr/>
+        </p:nvSpPr>
+        <p:spPr>
+          <a:xfrm>
+            <a:off x="822960" y="914400"/>
+            <a:ext cx="10515600" cy="914400"/>
+          </a:xfrm>
+          <a:prstGeom prst="rect">
+            <a:avLst/>
+          </a:prstGeom>
+          <a:noFill/>
+        </p:spPr>
+        <p:txBody>
+          <a:bodyPr wrap="square">
+            <a:spAutoFit/>
+          </a:bodyPr>
+          <a:lstStyle/>
+          <a:p>
+            <a:pPr algn="l">
+              <a:lnSpc>
+                <a:spcPct val="125000"/>
+              </a:lnSpc>
+            </a:pPr>
+            <a:r>
+              <a:rPr sz="4000" b="1">
+                <a:solidFill>
+                  <a:srgbClr val="111827"/>
+                </a:solidFill>
+                <a:latin typeface="Arial"/>
+              </a:rPr>
+              <a:t>Gemma asks back when it is unsure.</a:t>
+            </a:r>
+          </a:p>
+        </p:txBody>
+      </p:sp>
+      <p:sp>
+        <p:nvSpPr>
+          <p:cNvPr id="5" name="Rectangle 4"/>
           <p:cNvSpPr/>
           <p:nvPr/>
         </p:nvSpPr>
         <p:spPr>
           <a:xfrm>
-            <a:off x="0" y="0"/>
-            <a:ext cx="12191695" cy="6858000"/>
+            <a:off x="822960" y="1783080"/>
+            <a:ext cx="822960" cy="63500"/>
           </a:xfrm>
           <a:prstGeom prst="rect">
             <a:avLst/>
           </a:prstGeom>
           <a:solidFill>
-            <a:srgbClr val="FFFFFF"/>
+            <a:srgbClr val="4F46E5"/>
           </a:solidFill>
           <a:ln>
             <a:noFill/>
@@ -4747,104 +4631,27 @@
           <a:lstStyle/>
           <a:p>
             <a:pPr algn="ctr"/>
-            <a:endParaRPr/>
-          </a:p>
-        </p:txBody>
-      </p:sp>
-      <p:sp>
-        <p:nvSpPr>
-          <p:cNvPr id="3" name="TextBox 2"/>
-          <p:cNvSpPr txBox="1"/>
-          <p:nvPr/>
-        </p:nvSpPr>
-        <p:spPr>
-          <a:xfrm>
-            <a:off x="822960" y="566928"/>
-            <a:ext cx="10058400" cy="365760"/>
-          </a:xfrm>
-          <a:prstGeom prst="rect">
-            <a:avLst/>
-          </a:prstGeom>
-          <a:noFill/>
-        </p:spPr>
-        <p:txBody>
-          <a:bodyPr wrap="square">
-            <a:spAutoFit/>
-          </a:bodyPr>
-          <a:lstStyle/>
-          <a:p>
-            <a:pPr algn="l">
-              <a:lnSpc>
-                <a:spcPct val="125000"/>
-              </a:lnSpc>
-            </a:pPr>
-            <a:r>
-              <a:rPr sz="1200" b="1">
-                <a:solidFill>
-                  <a:srgbClr val="4F46E5"/>
-                </a:solidFill>
-                <a:latin typeface="Arial"/>
-              </a:rPr>
-              <a:t>THE MODEL</a:t>
-            </a:r>
-          </a:p>
-        </p:txBody>
-      </p:sp>
-      <p:sp>
-        <p:nvSpPr>
-          <p:cNvPr id="4" name="TextBox 3"/>
-          <p:cNvSpPr txBox="1"/>
-          <p:nvPr/>
-        </p:nvSpPr>
-        <p:spPr>
-          <a:xfrm>
-            <a:off x="822960" y="914400"/>
-            <a:ext cx="10515600" cy="914400"/>
-          </a:xfrm>
-          <a:prstGeom prst="rect">
-            <a:avLst/>
-          </a:prstGeom>
-          <a:noFill/>
-        </p:spPr>
-        <p:txBody>
-          <a:bodyPr wrap="square">
-            <a:spAutoFit/>
-          </a:bodyPr>
-          <a:lstStyle/>
-          <a:p>
-            <a:pPr algn="l">
-              <a:lnSpc>
-                <a:spcPct val="125000"/>
-              </a:lnSpc>
-            </a:pPr>
-            <a:r>
-              <a:rPr sz="4000" b="1">
-                <a:solidFill>
-                  <a:srgbClr val="111827"/>
-                </a:solidFill>
-                <a:latin typeface="Arial"/>
-              </a:rPr>
-              <a:t>How we use Gemma 4.</a:t>
-            </a:r>
-          </a:p>
-        </p:txBody>
-      </p:sp>
-      <p:sp>
-        <p:nvSpPr>
-          <p:cNvPr id="5" name="Rectangle 4"/>
+          </a:p>
+        </p:txBody>
+      </p:sp>
+      <p:sp>
+        <p:nvSpPr>
+          <p:cNvPr id="6" name="Rounded Rectangle 5"/>
           <p:cNvSpPr/>
           <p:nvPr/>
         </p:nvSpPr>
         <p:spPr>
           <a:xfrm>
-            <a:off x="822960" y="1783080"/>
-            <a:ext cx="822960" cy="63500"/>
-          </a:xfrm>
-          <a:prstGeom prst="rect">
-            <a:avLst/>
+            <a:off x="822960" y="2240280"/>
+            <a:ext cx="5029200" cy="3017520"/>
+          </a:xfrm>
+          <a:prstGeom prst="roundRect">
+            <a:avLst>
+              <a:gd name="adj" fmla="val 6000"/>
+            </a:avLst>
           </a:prstGeom>
           <a:solidFill>
-            <a:srgbClr val="4F46E5"/>
+            <a:srgbClr val="FFFFFF"/>
           </a:solidFill>
           <a:ln>
             <a:noFill/>
@@ -4870,20 +4677,19 @@
           <a:lstStyle/>
           <a:p>
             <a:pPr algn="ctr"/>
-            <a:endParaRPr/>
-          </a:p>
-        </p:txBody>
-      </p:sp>
-      <p:sp>
-        <p:nvSpPr>
-          <p:cNvPr id="6" name="TextBox 5"/>
+          </a:p>
+        </p:txBody>
+      </p:sp>
+      <p:sp>
+        <p:nvSpPr>
+          <p:cNvPr id="7" name="TextBox 6"/>
           <p:cNvSpPr txBox="1"/>
           <p:nvPr/>
         </p:nvSpPr>
         <p:spPr>
           <a:xfrm>
-            <a:off x="822960" y="2240280"/>
-            <a:ext cx="5029200" cy="2377440"/>
+            <a:off x="1188720" y="2468880"/>
+            <a:ext cx="4389120" cy="2651760"/>
           </a:xfrm>
           <a:prstGeom prst="rect">
             <a:avLst/>
@@ -4902,13 +4708,61 @@
               </a:lnSpc>
             </a:pPr>
             <a:r>
-              <a:rPr sz="2400" b="1">
+              <a:rPr sz="1000" b="1">
+                <a:solidFill>
+                  <a:srgbClr val="6B7280"/>
+                </a:solidFill>
+                <a:latin typeface="Arial"/>
+              </a:rPr>
+              <a:t>Student</a:t>
+            </a:r>
+          </a:p>
+          <a:p>
+            <a:pPr algn="l">
+              <a:lnSpc>
+                <a:spcPct val="125000"/>
+              </a:lnSpc>
+            </a:pPr>
+            <a:r>
+              <a:rPr sz="1700" b="0">
+                <a:solidFill>
+                  <a:srgbClr val="111827"/>
+                </a:solidFill>
+                <a:latin typeface="Arial"/>
+              </a:rPr>
+              <a:t>AC se paani tapak raha hai</a:t>
+            </a:r>
+          </a:p>
+          <a:p>
+            <a:pPr algn="l">
+              <a:lnSpc>
+                <a:spcPct val="125000"/>
+              </a:lnSpc>
+            </a:pPr>
+            <a:r>
+              <a:rPr sz="600" b="0">
+                <a:solidFill>
+                  <a:srgbClr val="6B7280"/>
+                </a:solidFill>
+                <a:latin typeface="Arial"/>
+              </a:rPr>
+              <a:t/>
+            </a:r>
+          </a:p>
+          <a:p>
+            <a:pPr algn="l">
+              <a:lnSpc>
+                <a:spcPct val="125000"/>
+              </a:lnSpc>
+            </a:pPr>
+            <a:r>
+              <a:rPr sz="1000" b="1">
                 <a:solidFill>
                   <a:srgbClr val="4F46E5"/>
                 </a:solidFill>
                 <a:latin typeface="Arial"/>
               </a:rPr>
-              <a:t>gemma-4-26b-a4b-it</a:t>
+              <a:t>Gemma</a:t>
             </a:r>
           </a:p>
           <a:p>
@@ -4918,80 +4772,312 @@
               </a:lnSpc>
             </a:pPr>
             <a:r>
+              <a:rPr sz="1700" b="0">
+                <a:solidFill>
+                  <a:srgbClr val="4F46E5"/>
+                </a:solidFill>
+                <a:latin typeface="Arial"/>
+              </a:rPr>
+              <a:t>Kaunse hostel aur kis room mein?</a:t>
+            </a:r>
+          </a:p>
+          <a:p>
+            <a:pPr algn="l">
+              <a:lnSpc>
+                <a:spcPct val="125000"/>
+              </a:lnSpc>
+            </a:pPr>
+            <a:r>
+              <a:rPr sz="600" b="0">
+                <a:solidFill>
+                  <a:srgbClr val="6B7280"/>
+                </a:solidFill>
+                <a:latin typeface="Arial"/>
+              </a:rPr>
+              <a:t/>
+            </a:r>
+          </a:p>
+          <a:p>
+            <a:pPr algn="l">
+              <a:lnSpc>
+                <a:spcPct val="125000"/>
+              </a:lnSpc>
+            </a:pPr>
+            <a:r>
+              <a:rPr sz="1000" b="1">
+                <a:solidFill>
+                  <a:srgbClr val="6B7280"/>
+                </a:solidFill>
+                <a:latin typeface="Arial"/>
+              </a:rPr>
+              <a:t>Student</a:t>
+            </a:r>
+          </a:p>
+          <a:p>
+            <a:pPr algn="l">
+              <a:lnSpc>
+                <a:spcPct val="125000"/>
+              </a:lnSpc>
+            </a:pPr>
+            <a:r>
+              <a:rPr sz="1700" b="0">
+                <a:solidFill>
+                  <a:srgbClr val="111827"/>
+                </a:solidFill>
+                <a:latin typeface="Arial"/>
+              </a:rPr>
+              <a:t>BH2 E207</a:t>
+            </a:r>
+          </a:p>
+          <a:p>
+            <a:pPr algn="l">
+              <a:lnSpc>
+                <a:spcPct val="125000"/>
+              </a:lnSpc>
+            </a:pPr>
+            <a:r>
+              <a:rPr sz="600" b="0">
+                <a:solidFill>
+                  <a:srgbClr val="6B7280"/>
+                </a:solidFill>
+                <a:latin typeface="Arial"/>
+              </a:rPr>
+              <a:t/>
+            </a:r>
+          </a:p>
+          <a:p>
+            <a:pPr algn="l">
+              <a:lnSpc>
+                <a:spcPct val="125000"/>
+              </a:lnSpc>
+            </a:pPr>
+            <a:r>
+              <a:rPr sz="1300" b="1">
+                <a:solidFill>
+                  <a:srgbClr val="6B7280"/>
+                </a:solidFill>
+                <a:latin typeface="Arial"/>
+              </a:rPr>
+              <a:t>Filed #47 · Hostel Office · BH2 (Gopad) E207</a:t>
+            </a:r>
+          </a:p>
+        </p:txBody>
+      </p:sp>
+      <p:sp>
+        <p:nvSpPr>
+          <p:cNvPr id="8" name="TextBox 7"/>
+          <p:cNvSpPr txBox="1"/>
+          <p:nvPr/>
+        </p:nvSpPr>
+        <p:spPr>
+          <a:xfrm>
+            <a:off x="6309360" y="2286000"/>
+            <a:ext cx="5029200" cy="3108960"/>
+          </a:xfrm>
+          <a:prstGeom prst="rect">
+            <a:avLst/>
+          </a:prstGeom>
+          <a:noFill/>
+        </p:spPr>
+        <p:txBody>
+          <a:bodyPr wrap="square">
+            <a:spAutoFit/>
+          </a:bodyPr>
+          <a:lstStyle/>
+          <a:p>
+            <a:pPr algn="l">
+              <a:lnSpc>
+                <a:spcPct val="130000"/>
+              </a:lnSpc>
+            </a:pPr>
+            <a:r>
+              <a:rPr sz="1800" b="1">
+                <a:solidFill>
+                  <a:srgbClr val="111827"/>
+                </a:solidFill>
+                <a:latin typeface="Arial"/>
+              </a:rPr>
+              <a:t>In the student's own language.</a:t>
+            </a:r>
+          </a:p>
+          <a:p>
+            <a:pPr algn="l">
+              <a:lnSpc>
+                <a:spcPct val="130000"/>
+              </a:lnSpc>
+            </a:pPr>
+            <a:r>
               <a:rPr sz="1500" b="0">
                 <a:solidFill>
                   <a:srgbClr val="6B7280"/>
                 </a:solidFill>
                 <a:latin typeface="Arial"/>
               </a:rPr>
-              <a:t>through the Gemini API, with the google-genai package. Every call in the project goes through one helper.</a:t>
-            </a:r>
-          </a:p>
+              <a:t>Hinglish in, Hinglish out. One short question, at most two per report — a limit our code enforces, not a rule we hope the model follows.</a:t>
+            </a:r>
+          </a:p>
+          <a:p>
+            <a:pPr algn="l">
+              <a:lnSpc>
+                <a:spcPct val="130000"/>
+              </a:lnSpc>
+            </a:pPr>
+            <a:r>
+              <a:rPr sz="800" b="0">
+                <a:solidFill>
+                  <a:srgbClr val="6B7280"/>
+                </a:solidFill>
+                <a:latin typeface="Arial"/>
+              </a:rPr>
+              <a:t/>
+            </a:r>
+          </a:p>
+          <a:p>
+            <a:pPr algn="l">
+              <a:lnSpc>
+                <a:spcPct val="130000"/>
+              </a:lnSpc>
+            </a:pPr>
+            <a:r>
+              <a:rPr sz="1800" b="1">
+                <a:solidFill>
+                  <a:srgbClr val="111827"/>
+                </a:solidFill>
+                <a:latin typeface="Arial"/>
+              </a:rPr>
+              <a:t>It knows what it already has.</a:t>
+            </a:r>
+          </a:p>
+          <a:p>
+            <a:pPr algn="l">
+              <a:lnSpc>
+                <a:spcPct val="130000"/>
+              </a:lnSpc>
+            </a:pPr>
+            <a:r>
+              <a:rPr sz="1500" b="0">
+                <a:solidFill>
+                  <a:srgbClr val="6B7280"/>
+                </a:solidFill>
+                <a:latin typeface="Arial"/>
+              </a:rPr>
+              <a:t>Same issue, same place → merged, and the count goes up. A different room → a new complaint. A hostel that does not exist → it asks.</a:t>
+            </a:r>
+          </a:p>
+        </p:txBody>
+      </p:sp>
+      <p:sp>
+        <p:nvSpPr>
+          <p:cNvPr id="9" name="TextBox 8"/>
+          <p:cNvSpPr txBox="1"/>
+          <p:nvPr/>
+        </p:nvSpPr>
+        <p:spPr>
+          <a:xfrm>
+            <a:off x="822960" y="6355080"/>
+            <a:ext cx="3657600" cy="274320"/>
+          </a:xfrm>
+          <a:prstGeom prst="rect">
+            <a:avLst/>
+          </a:prstGeom>
+          <a:noFill/>
+        </p:spPr>
+        <p:txBody>
+          <a:bodyPr wrap="square">
+            <a:spAutoFit/>
+          </a:bodyPr>
+          <a:lstStyle/>
           <a:p>
             <a:pPr algn="l">
               <a:lnSpc>
                 <a:spcPct val="125000"/>
               </a:lnSpc>
             </a:pPr>
-            <a:endParaRPr sz="1500" b="0">
-              <a:solidFill>
-                <a:srgbClr val="6B7280"/>
-              </a:solidFill>
-              <a:latin typeface="Arial"/>
-            </a:endParaRPr>
-          </a:p>
-          <a:p>
-            <a:pPr algn="l">
+            <a:r>
+              <a:rPr sz="1000" b="0">
+                <a:solidFill>
+                  <a:srgbClr val="6B7280"/>
+                </a:solidFill>
+                <a:latin typeface="Arial"/>
+              </a:rPr>
+              <a:t>Shikayat</a:t>
+            </a:r>
+          </a:p>
+        </p:txBody>
+      </p:sp>
+      <p:sp>
+        <p:nvSpPr>
+          <p:cNvPr id="10" name="TextBox 9"/>
+          <p:cNvSpPr txBox="1"/>
+          <p:nvPr/>
+        </p:nvSpPr>
+        <p:spPr>
+          <a:xfrm>
+            <a:off x="10424160" y="6355080"/>
+            <a:ext cx="914400" cy="274320"/>
+          </a:xfrm>
+          <a:prstGeom prst="rect">
+            <a:avLst/>
+          </a:prstGeom>
+          <a:noFill/>
+        </p:spPr>
+        <p:txBody>
+          <a:bodyPr wrap="square">
+            <a:spAutoFit/>
+          </a:bodyPr>
+          <a:lstStyle/>
+          <a:p>
+            <a:pPr algn="r">
               <a:lnSpc>
                 <a:spcPct val="125000"/>
               </a:lnSpc>
             </a:pPr>
             <a:r>
-              <a:rPr sz="2000" b="1">
-                <a:solidFill>
-                  <a:srgbClr val="111827"/>
-                </a:solidFill>
-                <a:latin typeface="Arial"/>
-              </a:rPr>
-              <a:t>Two calls per complaint.</a:t>
-            </a:r>
-          </a:p>
-          <a:p>
-            <a:pPr algn="l">
-              <a:lnSpc>
-                <a:spcPct val="125000"/>
-              </a:lnSpc>
-            </a:pPr>
-            <a:r>
-              <a:rPr sz="1500" b="0">
+              <a:rPr sz="1000" b="0">
                 <a:solidFill>
                   <a:srgbClr val="6B7280"/>
                 </a:solidFill>
                 <a:latin typeface="Arial"/>
               </a:rPr>
-              <a:t>One to pick a bucket and look for duplicates. One to decide: file, merge, ask or reject. The starter's loop would have taken four.</a:t>
-            </a:r>
-          </a:p>
-        </p:txBody>
-      </p:sp>
-      <p:sp>
-        <p:nvSpPr>
-          <p:cNvPr id="7" name="Rounded Rectangle 6"/>
+              <a:t>4</a:t>
+            </a:r>
+          </a:p>
+        </p:txBody>
+      </p:sp>
+    </p:spTree>
+  </p:cSld>
+  <p:clrMapOvr>
+    <a:masterClrMapping/>
+  </p:clrMapOvr>
+</p:sld>
+</file>
+
+<file path=ppt/slides/slide5.xml><?xml version="1.0" encoding="utf-8"?>
+<p:sld xmlns:a="http://schemas.openxmlformats.org/drawingml/2006/main" xmlns:p="http://schemas.openxmlformats.org/presentationml/2006/main" xmlns:r="http://schemas.openxmlformats.org/officeDocument/2006/relationships">
+  <p:cSld>
+    <p:spTree>
+      <p:nvGrpSpPr>
+        <p:cNvPr id="1" name=""/>
+        <p:cNvGrpSpPr/>
+        <p:nvPr/>
+      </p:nvGrpSpPr>
+      <p:grpSpPr/>
+      <p:sp>
+        <p:nvSpPr>
+          <p:cNvPr id="2" name="Rectangle 1"/>
           <p:cNvSpPr/>
           <p:nvPr/>
         </p:nvSpPr>
         <p:spPr>
           <a:xfrm>
-            <a:off x="6217920" y="2240280"/>
-            <a:ext cx="5120640" cy="1600200"/>
-          </a:xfrm>
-          <a:prstGeom prst="roundRect">
-            <a:avLst>
-              <a:gd name="adj" fmla="val 6000"/>
-            </a:avLst>
+            <a:off x="0" y="0"/>
+            <a:ext cx="12191695" cy="6858000"/>
+          </a:xfrm>
+          <a:prstGeom prst="rect">
+            <a:avLst/>
           </a:prstGeom>
           <a:solidFill>
-            <a:srgbClr val="111827"/>
+            <a:srgbClr val="FFFFFF"/>
           </a:solidFill>
           <a:ln>
             <a:noFill/>
@@ -5017,20 +5103,19 @@
           <a:lstStyle/>
           <a:p>
             <a:pPr algn="ctr"/>
-            <a:endParaRPr/>
-          </a:p>
-        </p:txBody>
-      </p:sp>
-      <p:sp>
-        <p:nvSpPr>
-          <p:cNvPr id="8" name="TextBox 7"/>
+          </a:p>
+        </p:txBody>
+      </p:sp>
+      <p:sp>
+        <p:nvSpPr>
+          <p:cNvPr id="3" name="TextBox 2"/>
           <p:cNvSpPr txBox="1"/>
           <p:nvPr/>
         </p:nvSpPr>
         <p:spPr>
           <a:xfrm>
-            <a:off x="6492240" y="2487168"/>
-            <a:ext cx="4572000" cy="1188720"/>
+            <a:off x="822960" y="566928"/>
+            <a:ext cx="10058400" cy="365760"/>
           </a:xfrm>
           <a:prstGeom prst="rect">
             <a:avLst/>
@@ -5045,79 +5130,31 @@
           <a:p>
             <a:pPr algn="l">
               <a:lnSpc>
-                <a:spcPct val="115000"/>
-              </a:lnSpc>
-            </a:pPr>
-            <a:r>
-              <a:rPr sz="1200" b="0">
-                <a:solidFill>
-                  <a:srgbClr val="9CA3AF"/>
-                </a:solidFill>
-                <a:latin typeface="Courier New"/>
-              </a:rPr>
-              <a:t># gemma_client.py</a:t>
-            </a:r>
-          </a:p>
-          <a:p>
-            <a:pPr algn="l">
-              <a:lnSpc>
-                <a:spcPct val="115000"/>
-              </a:lnSpc>
-            </a:pPr>
-            <a:r>
-              <a:rPr sz="1300" b="0">
-                <a:solidFill>
-                  <a:srgbClr val="FFFFFF"/>
-                </a:solidFill>
-                <a:latin typeface="Courier New"/>
-              </a:rPr>
-              <a:t>client.models.generate_content(</a:t>
-            </a:r>
-          </a:p>
-          <a:p>
-            <a:pPr algn="l">
-              <a:lnSpc>
-                <a:spcPct val="115000"/>
-              </a:lnSpc>
-            </a:pPr>
-            <a:r>
-              <a:rPr sz="1300" b="0">
-                <a:solidFill>
-                  <a:srgbClr val="A5B4FC"/>
-                </a:solidFill>
-                <a:latin typeface="Courier New"/>
-              </a:rPr>
-              <a:t>    model="gemma-4-26b-a4b-it",</a:t>
-            </a:r>
-          </a:p>
-          <a:p>
-            <a:pPr algn="l">
-              <a:lnSpc>
-                <a:spcPct val="115000"/>
-              </a:lnSpc>
-            </a:pPr>
-            <a:r>
-              <a:rPr sz="1300" b="0">
-                <a:solidFill>
-                  <a:srgbClr val="FFFFFF"/>
-                </a:solidFill>
-                <a:latin typeface="Courier New"/>
-              </a:rPr>
-              <a:t>    contents=contents, config=config)</a:t>
-            </a:r>
-          </a:p>
-        </p:txBody>
-      </p:sp>
-      <p:sp>
-        <p:nvSpPr>
-          <p:cNvPr id="9" name="TextBox 8"/>
+                <a:spcPct val="125000"/>
+              </a:lnSpc>
+            </a:pPr>
+            <a:r>
+              <a:rPr sz="1200" b="1">
+                <a:solidFill>
+                  <a:srgbClr val="4F46E5"/>
+                </a:solidFill>
+                <a:latin typeface="Arial"/>
+              </a:rPr>
+              <a:t>THE MODEL</a:t>
+            </a:r>
+          </a:p>
+        </p:txBody>
+      </p:sp>
+      <p:sp>
+        <p:nvSpPr>
+          <p:cNvPr id="4" name="TextBox 3"/>
           <p:cNvSpPr txBox="1"/>
           <p:nvPr/>
         </p:nvSpPr>
         <p:spPr>
           <a:xfrm>
-            <a:off x="6217920" y="4114800"/>
-            <a:ext cx="5120640" cy="2194560"/>
+            <a:off x="822960" y="914400"/>
+            <a:ext cx="10515600" cy="914400"/>
           </a:xfrm>
           <a:prstGeom prst="rect">
             <a:avLst/>
@@ -5136,103 +5173,33 @@
               </a:lnSpc>
             </a:pPr>
             <a:r>
-              <a:rPr sz="1600" b="1">
+              <a:rPr sz="4000" b="1">
                 <a:solidFill>
                   <a:srgbClr val="111827"/>
                 </a:solidFill>
                 <a:latin typeface="Arial"/>
               </a:rPr>
-              <a:t>The model never decides:</a:t>
-            </a:r>
-          </a:p>
-          <a:p>
-            <a:pPr algn="l">
-              <a:lnSpc>
-                <a:spcPct val="125000"/>
-              </a:lnSpc>
-            </a:pPr>
-            <a:r>
-              <a:rPr sz="1500" b="0">
-                <a:solidFill>
-                  <a:srgbClr val="6B7280"/>
-                </a:solidFill>
-                <a:latin typeface="Arial"/>
-              </a:rPr>
-              <a:t>priority · escalation · complaint ids · how many questions it may ask</a:t>
-            </a:r>
-          </a:p>
-          <a:p>
-            <a:pPr algn="l">
-              <a:lnSpc>
-                <a:spcPct val="125000"/>
-              </a:lnSpc>
-            </a:pPr>
-            <a:endParaRPr sz="1500" b="0">
-              <a:solidFill>
-                <a:srgbClr val="6B7280"/>
-              </a:solidFill>
-              <a:latin typeface="Arial"/>
-            </a:endParaRPr>
-          </a:p>
-          <a:p>
-            <a:pPr algn="l">
-              <a:lnSpc>
-                <a:spcPct val="125000"/>
-              </a:lnSpc>
-            </a:pPr>
-            <a:r>
-              <a:rPr sz="1500" b="0">
-                <a:solidFill>
-                  <a:srgbClr val="6B7280"/>
-                </a:solidFill>
-                <a:latin typeface="Arial"/>
-              </a:rPr>
-              <a:t>All four are enforced in our code. merge_into rejects any id that was not in the search results it was just shown.</a:t>
-            </a:r>
-          </a:p>
-        </p:txBody>
-      </p:sp>
-    </p:spTree>
-  </p:cSld>
-  <p:clrMapOvr>
-    <a:masterClrMapping/>
-  </p:clrMapOvr>
-</p:sld>
-</file>
-
-<file path=ppt/slides/slide6.xml><?xml version="1.0" encoding="utf-8"?>
-<p:sld xmlns:a="http://schemas.openxmlformats.org/drawingml/2006/main" xmlns:r="http://schemas.openxmlformats.org/officeDocument/2006/relationships" xmlns:p="http://schemas.openxmlformats.org/presentationml/2006/main">
-  <p:cSld>
-    <p:spTree>
-      <p:nvGrpSpPr>
-        <p:cNvPr id="1" name=""/>
-        <p:cNvGrpSpPr/>
-        <p:nvPr/>
-      </p:nvGrpSpPr>
-      <p:grpSpPr>
-        <a:xfrm>
-          <a:off x="0" y="0"/>
-          <a:ext cx="0" cy="0"/>
-          <a:chOff x="0" y="0"/>
-          <a:chExt cx="0" cy="0"/>
-        </a:xfrm>
-      </p:grpSpPr>
-      <p:sp>
-        <p:nvSpPr>
-          <p:cNvPr id="2" name="Rectangle 1"/>
+              <a:t>How we use Gemma 4.</a:t>
+            </a:r>
+          </a:p>
+        </p:txBody>
+      </p:sp>
+      <p:sp>
+        <p:nvSpPr>
+          <p:cNvPr id="5" name="Rectangle 4"/>
           <p:cNvSpPr/>
           <p:nvPr/>
         </p:nvSpPr>
         <p:spPr>
           <a:xfrm>
-            <a:off x="0" y="0"/>
-            <a:ext cx="12191695" cy="6858000"/>
+            <a:off x="822960" y="1783080"/>
+            <a:ext cx="822960" cy="63500"/>
           </a:xfrm>
           <a:prstGeom prst="rect">
             <a:avLst/>
           </a:prstGeom>
           <a:solidFill>
-            <a:srgbClr val="F5F5F4"/>
+            <a:srgbClr val="4F46E5"/>
           </a:solidFill>
           <a:ln>
             <a:noFill/>
@@ -5258,20 +5225,19 @@
           <a:lstStyle/>
           <a:p>
             <a:pPr algn="ctr"/>
-            <a:endParaRPr/>
-          </a:p>
-        </p:txBody>
-      </p:sp>
-      <p:sp>
-        <p:nvSpPr>
-          <p:cNvPr id="3" name="TextBox 2"/>
+          </a:p>
+        </p:txBody>
+      </p:sp>
+      <p:sp>
+        <p:nvSpPr>
+          <p:cNvPr id="6" name="TextBox 5"/>
           <p:cNvSpPr txBox="1"/>
           <p:nvPr/>
         </p:nvSpPr>
         <p:spPr>
           <a:xfrm>
-            <a:off x="822960" y="566928"/>
-            <a:ext cx="10058400" cy="365760"/>
+            <a:off x="822960" y="2240280"/>
+            <a:ext cx="4937760" cy="2560320"/>
           </a:xfrm>
           <a:prstGeom prst="rect">
             <a:avLst/>
@@ -5286,76 +5252,103 @@
           <a:p>
             <a:pPr algn="l">
               <a:lnSpc>
-                <a:spcPct val="125000"/>
-              </a:lnSpc>
-            </a:pPr>
-            <a:r>
-              <a:rPr sz="1200" b="1">
+                <a:spcPct val="130000"/>
+              </a:lnSpc>
+            </a:pPr>
+            <a:r>
+              <a:rPr sz="2300" b="1">
                 <a:solidFill>
                   <a:srgbClr val="4F46E5"/>
                 </a:solidFill>
                 <a:latin typeface="Arial"/>
               </a:rPr>
-              <a:t>OUR OPEN-SOURCE CONTRIBUTION</a:t>
-            </a:r>
-          </a:p>
-        </p:txBody>
-      </p:sp>
-      <p:sp>
-        <p:nvSpPr>
-          <p:cNvPr id="4" name="TextBox 3"/>
-          <p:cNvSpPr txBox="1"/>
-          <p:nvPr/>
-        </p:nvSpPr>
-        <p:spPr>
-          <a:xfrm>
-            <a:off x="822960" y="914400"/>
-            <a:ext cx="10515600" cy="914400"/>
-          </a:xfrm>
-          <a:prstGeom prst="rect">
-            <a:avLst/>
-          </a:prstGeom>
-          <a:noFill/>
-        </p:spPr>
-        <p:txBody>
-          <a:bodyPr wrap="square">
-            <a:spAutoFit/>
-          </a:bodyPr>
-          <a:lstStyle/>
-          <a:p>
-            <a:pPr algn="l">
-              <a:lnSpc>
-                <a:spcPct val="125000"/>
-              </a:lnSpc>
-            </a:pPr>
-            <a:r>
-              <a:rPr sz="4000" b="1">
+              <a:t>gemma-4-26b-a4b-it</a:t>
+            </a:r>
+          </a:p>
+          <a:p>
+            <a:pPr algn="l">
+              <a:lnSpc>
+                <a:spcPct val="130000"/>
+              </a:lnSpc>
+            </a:pPr>
+            <a:r>
+              <a:rPr sz="1500" b="0">
+                <a:solidFill>
+                  <a:srgbClr val="6B7280"/>
+                </a:solidFill>
+                <a:latin typeface="Arial"/>
+              </a:rPr>
+              <a:t>through the Gemini API, with google-genai. Every call in the project goes through one helper.</a:t>
+            </a:r>
+          </a:p>
+          <a:p>
+            <a:pPr algn="l">
+              <a:lnSpc>
+                <a:spcPct val="130000"/>
+              </a:lnSpc>
+            </a:pPr>
+            <a:r>
+              <a:rPr sz="900" b="0">
+                <a:solidFill>
+                  <a:srgbClr val="6B7280"/>
+                </a:solidFill>
+                <a:latin typeface="Arial"/>
+              </a:rPr>
+              <a:t/>
+            </a:r>
+          </a:p>
+          <a:p>
+            <a:pPr algn="l">
+              <a:lnSpc>
+                <a:spcPct val="130000"/>
+              </a:lnSpc>
+            </a:pPr>
+            <a:r>
+              <a:rPr sz="1900" b="1">
                 <a:solidFill>
                   <a:srgbClr val="111827"/>
                 </a:solidFill>
                 <a:latin typeface="Arial"/>
               </a:rPr>
-              <a:t>What we changed in the harness.</a:t>
-            </a:r>
-          </a:p>
-        </p:txBody>
-      </p:sp>
-      <p:sp>
-        <p:nvSpPr>
-          <p:cNvPr id="5" name="Rectangle 4"/>
+              <a:t>Two calls per complaint.</a:t>
+            </a:r>
+          </a:p>
+          <a:p>
+            <a:pPr algn="l">
+              <a:lnSpc>
+                <a:spcPct val="130000"/>
+              </a:lnSpc>
+            </a:pPr>
+            <a:r>
+              <a:rPr sz="1500" b="0">
+                <a:solidFill>
+                  <a:srgbClr val="6B7280"/>
+                </a:solidFill>
+                <a:latin typeface="Arial"/>
+              </a:rPr>
+              <a:t>One to pick a bucket and look for duplicates. One to decide: file, merge, ask or reject. The starter's loop needed four.</a:t>
+            </a:r>
+          </a:p>
+        </p:txBody>
+      </p:sp>
+      <p:sp>
+        <p:nvSpPr>
+          <p:cNvPr id="7" name="Rounded Rectangle 6"/>
           <p:cNvSpPr/>
           <p:nvPr/>
         </p:nvSpPr>
         <p:spPr>
           <a:xfrm>
-            <a:off x="822960" y="1783080"/>
-            <a:ext cx="822960" cy="63500"/>
-          </a:xfrm>
-          <a:prstGeom prst="rect">
-            <a:avLst/>
+            <a:off x="6309360" y="2240280"/>
+            <a:ext cx="5029200" cy="1463040"/>
+          </a:xfrm>
+          <a:prstGeom prst="roundRect">
+            <a:avLst>
+              <a:gd name="adj" fmla="val 6000"/>
+            </a:avLst>
           </a:prstGeom>
           <a:solidFill>
-            <a:srgbClr val="4F46E5"/>
+            <a:srgbClr val="111827"/>
           </a:solidFill>
           <a:ln>
             <a:noFill/>
@@ -5381,26 +5374,279 @@
           <a:lstStyle/>
           <a:p>
             <a:pPr algn="ctr"/>
-            <a:endParaRPr/>
-          </a:p>
-        </p:txBody>
-      </p:sp>
-      <p:sp>
-        <p:nvSpPr>
-          <p:cNvPr id="6" name="Rectangle 5"/>
+          </a:p>
+        </p:txBody>
+      </p:sp>
+      <p:sp>
+        <p:nvSpPr>
+          <p:cNvPr id="8" name="TextBox 7"/>
+          <p:cNvSpPr txBox="1"/>
+          <p:nvPr/>
+        </p:nvSpPr>
+        <p:spPr>
+          <a:xfrm>
+            <a:off x="6583680" y="2450592"/>
+            <a:ext cx="4572000" cy="1097280"/>
+          </a:xfrm>
+          <a:prstGeom prst="rect">
+            <a:avLst/>
+          </a:prstGeom>
+          <a:noFill/>
+        </p:spPr>
+        <p:txBody>
+          <a:bodyPr wrap="square">
+            <a:spAutoFit/>
+          </a:bodyPr>
+          <a:lstStyle/>
+          <a:p>
+            <a:pPr algn="l">
+              <a:lnSpc>
+                <a:spcPct val="120000"/>
+              </a:lnSpc>
+            </a:pPr>
+            <a:r>
+              <a:rPr sz="1100" b="0">
+                <a:solidFill>
+                  <a:srgbClr val="6B7280"/>
+                </a:solidFill>
+                <a:latin typeface="Courier New"/>
+              </a:rPr>
+              <a:t># gemma_client.py</a:t>
+            </a:r>
+          </a:p>
+          <a:p>
+            <a:pPr algn="l">
+              <a:lnSpc>
+                <a:spcPct val="120000"/>
+              </a:lnSpc>
+            </a:pPr>
+            <a:r>
+              <a:rPr sz="1200" b="0">
+                <a:solidFill>
+                  <a:srgbClr val="FFFFFF"/>
+                </a:solidFill>
+                <a:latin typeface="Courier New"/>
+              </a:rPr>
+              <a:t>client.models.generate_content(</a:t>
+            </a:r>
+          </a:p>
+          <a:p>
+            <a:pPr algn="l">
+              <a:lnSpc>
+                <a:spcPct val="120000"/>
+              </a:lnSpc>
+            </a:pPr>
+            <a:r>
+              <a:rPr sz="1200" b="0">
+                <a:solidFill>
+                  <a:srgbClr val="A5B4FC"/>
+                </a:solidFill>
+                <a:latin typeface="Courier New"/>
+              </a:rPr>
+              <a:t>    model="gemma-4-26b-a4b-it",</a:t>
+            </a:r>
+          </a:p>
+          <a:p>
+            <a:pPr algn="l">
+              <a:lnSpc>
+                <a:spcPct val="120000"/>
+              </a:lnSpc>
+            </a:pPr>
+            <a:r>
+              <a:rPr sz="1200" b="0">
+                <a:solidFill>
+                  <a:srgbClr val="FFFFFF"/>
+                </a:solidFill>
+                <a:latin typeface="Courier New"/>
+              </a:rPr>
+              <a:t>    contents=contents, config=config)</a:t>
+            </a:r>
+          </a:p>
+        </p:txBody>
+      </p:sp>
+      <p:sp>
+        <p:nvSpPr>
+          <p:cNvPr id="9" name="TextBox 8"/>
+          <p:cNvSpPr txBox="1"/>
+          <p:nvPr/>
+        </p:nvSpPr>
+        <p:spPr>
+          <a:xfrm>
+            <a:off x="6309360" y="3977639"/>
+            <a:ext cx="5029200" cy="2011680"/>
+          </a:xfrm>
+          <a:prstGeom prst="rect">
+            <a:avLst/>
+          </a:prstGeom>
+          <a:noFill/>
+        </p:spPr>
+        <p:txBody>
+          <a:bodyPr wrap="square">
+            <a:spAutoFit/>
+          </a:bodyPr>
+          <a:lstStyle/>
+          <a:p>
+            <a:pPr algn="l">
+              <a:lnSpc>
+                <a:spcPct val="130000"/>
+              </a:lnSpc>
+            </a:pPr>
+            <a:r>
+              <a:rPr sz="1600" b="1">
+                <a:solidFill>
+                  <a:srgbClr val="111827"/>
+                </a:solidFill>
+                <a:latin typeface="Arial"/>
+              </a:rPr>
+              <a:t>The model never decides:</a:t>
+            </a:r>
+          </a:p>
+          <a:p>
+            <a:pPr algn="l">
+              <a:lnSpc>
+                <a:spcPct val="130000"/>
+              </a:lnSpc>
+            </a:pPr>
+            <a:r>
+              <a:rPr sz="1400" b="0">
+                <a:solidFill>
+                  <a:srgbClr val="4F46E5"/>
+                </a:solidFill>
+                <a:latin typeface="Arial"/>
+              </a:rPr>
+              <a:t>priority · escalation · complaint ids · how many questions it may ask</a:t>
+            </a:r>
+          </a:p>
+          <a:p>
+            <a:pPr algn="l">
+              <a:lnSpc>
+                <a:spcPct val="130000"/>
+              </a:lnSpc>
+            </a:pPr>
+            <a:r>
+              <a:rPr sz="1400" b="0">
+                <a:solidFill>
+                  <a:srgbClr val="6B7280"/>
+                </a:solidFill>
+                <a:latin typeface="Arial"/>
+              </a:rPr>
+              <a:t>All four are enforced in our code. merge_into rejects any id that was not in the search results it was just shown.</a:t>
+            </a:r>
+          </a:p>
+        </p:txBody>
+      </p:sp>
+      <p:sp>
+        <p:nvSpPr>
+          <p:cNvPr id="10" name="TextBox 9"/>
+          <p:cNvSpPr txBox="1"/>
+          <p:nvPr/>
+        </p:nvSpPr>
+        <p:spPr>
+          <a:xfrm>
+            <a:off x="822960" y="6355080"/>
+            <a:ext cx="3657600" cy="274320"/>
+          </a:xfrm>
+          <a:prstGeom prst="rect">
+            <a:avLst/>
+          </a:prstGeom>
+          <a:noFill/>
+        </p:spPr>
+        <p:txBody>
+          <a:bodyPr wrap="square">
+            <a:spAutoFit/>
+          </a:bodyPr>
+          <a:lstStyle/>
+          <a:p>
+            <a:pPr algn="l">
+              <a:lnSpc>
+                <a:spcPct val="125000"/>
+              </a:lnSpc>
+            </a:pPr>
+            <a:r>
+              <a:rPr sz="1000" b="0">
+                <a:solidFill>
+                  <a:srgbClr val="6B7280"/>
+                </a:solidFill>
+                <a:latin typeface="Arial"/>
+              </a:rPr>
+              <a:t>Shikayat</a:t>
+            </a:r>
+          </a:p>
+        </p:txBody>
+      </p:sp>
+      <p:sp>
+        <p:nvSpPr>
+          <p:cNvPr id="11" name="TextBox 10"/>
+          <p:cNvSpPr txBox="1"/>
+          <p:nvPr/>
+        </p:nvSpPr>
+        <p:spPr>
+          <a:xfrm>
+            <a:off x="10424160" y="6355080"/>
+            <a:ext cx="914400" cy="274320"/>
+          </a:xfrm>
+          <a:prstGeom prst="rect">
+            <a:avLst/>
+          </a:prstGeom>
+          <a:noFill/>
+        </p:spPr>
+        <p:txBody>
+          <a:bodyPr wrap="square">
+            <a:spAutoFit/>
+          </a:bodyPr>
+          <a:lstStyle/>
+          <a:p>
+            <a:pPr algn="r">
+              <a:lnSpc>
+                <a:spcPct val="125000"/>
+              </a:lnSpc>
+            </a:pPr>
+            <a:r>
+              <a:rPr sz="1000" b="0">
+                <a:solidFill>
+                  <a:srgbClr val="6B7280"/>
+                </a:solidFill>
+                <a:latin typeface="Arial"/>
+              </a:rPr>
+              <a:t>5</a:t>
+            </a:r>
+          </a:p>
+        </p:txBody>
+      </p:sp>
+    </p:spTree>
+  </p:cSld>
+  <p:clrMapOvr>
+    <a:masterClrMapping/>
+  </p:clrMapOvr>
+</p:sld>
+</file>
+
+<file path=ppt/slides/slide6.xml><?xml version="1.0" encoding="utf-8"?>
+<p:sld xmlns:a="http://schemas.openxmlformats.org/drawingml/2006/main" xmlns:p="http://schemas.openxmlformats.org/presentationml/2006/main" xmlns:r="http://schemas.openxmlformats.org/officeDocument/2006/relationships">
+  <p:cSld>
+    <p:spTree>
+      <p:nvGrpSpPr>
+        <p:cNvPr id="1" name=""/>
+        <p:cNvGrpSpPr/>
+        <p:nvPr/>
+      </p:nvGrpSpPr>
+      <p:grpSpPr/>
+      <p:sp>
+        <p:nvSpPr>
+          <p:cNvPr id="2" name="Rectangle 1"/>
           <p:cNvSpPr/>
           <p:nvPr/>
         </p:nvSpPr>
         <p:spPr>
           <a:xfrm>
-            <a:off x="822960" y="2331720"/>
-            <a:ext cx="50800" cy="475488"/>
+            <a:off x="0" y="0"/>
+            <a:ext cx="12191695" cy="6858000"/>
           </a:xfrm>
           <a:prstGeom prst="rect">
             <a:avLst/>
           </a:prstGeom>
           <a:solidFill>
-            <a:srgbClr val="4F46E5"/>
+            <a:srgbClr val="F5F5F4"/>
           </a:solidFill>
           <a:ln>
             <a:noFill/>
@@ -5426,20 +5672,19 @@
           <a:lstStyle/>
           <a:p>
             <a:pPr algn="ctr"/>
-            <a:endParaRPr/>
-          </a:p>
-        </p:txBody>
-      </p:sp>
-      <p:sp>
-        <p:nvSpPr>
-          <p:cNvPr id="7" name="TextBox 6"/>
+          </a:p>
+        </p:txBody>
+      </p:sp>
+      <p:sp>
+        <p:nvSpPr>
+          <p:cNvPr id="3" name="TextBox 2"/>
           <p:cNvSpPr txBox="1"/>
           <p:nvPr/>
         </p:nvSpPr>
         <p:spPr>
           <a:xfrm>
-            <a:off x="1097280" y="2240280"/>
-            <a:ext cx="3200400" cy="457200"/>
+            <a:off x="822960" y="566928"/>
+            <a:ext cx="10058400" cy="365760"/>
           </a:xfrm>
           <a:prstGeom prst="rect">
             <a:avLst/>
@@ -5458,27 +5703,27 @@
               </a:lnSpc>
             </a:pPr>
             <a:r>
-              <a:rPr sz="1600" b="1">
-                <a:solidFill>
-                  <a:srgbClr val="111827"/>
-                </a:solidFill>
-                <a:latin typeface="Arial"/>
-              </a:rPr>
-              <a:t>Per-agent tool sets</a:t>
-            </a:r>
-          </a:p>
-        </p:txBody>
-      </p:sp>
-      <p:sp>
-        <p:nvSpPr>
-          <p:cNvPr id="8" name="TextBox 7"/>
+              <a:rPr sz="1200" b="1">
+                <a:solidFill>
+                  <a:srgbClr val="4F46E5"/>
+                </a:solidFill>
+                <a:latin typeface="Arial"/>
+              </a:rPr>
+              <a:t>OUR OPEN-SOURCE CONTRIBUTION</a:t>
+            </a:r>
+          </a:p>
+        </p:txBody>
+      </p:sp>
+      <p:sp>
+        <p:nvSpPr>
+          <p:cNvPr id="4" name="TextBox 3"/>
           <p:cNvSpPr txBox="1"/>
           <p:nvPr/>
         </p:nvSpPr>
         <p:spPr>
           <a:xfrm>
-            <a:off x="4389120" y="2240280"/>
-            <a:ext cx="6949440" cy="457200"/>
+            <a:off x="822960" y="914400"/>
+            <a:ext cx="10515600" cy="914400"/>
           </a:xfrm>
           <a:prstGeom prst="rect">
             <a:avLst/>
@@ -5497,27 +5742,27 @@
               </a:lnSpc>
             </a:pPr>
             <a:r>
-              <a:rPr sz="1400" b="0">
-                <a:solidFill>
-                  <a:srgbClr val="6B7280"/>
-                </a:solidFill>
-                <a:latin typeface="Arial"/>
-              </a:rPr>
-              <a:t>Each agent sends only the tools it needs, not everything registered.</a:t>
-            </a:r>
-          </a:p>
-        </p:txBody>
-      </p:sp>
-      <p:sp>
-        <p:nvSpPr>
-          <p:cNvPr id="9" name="Rectangle 8"/>
+              <a:rPr sz="4000" b="1">
+                <a:solidFill>
+                  <a:srgbClr val="111827"/>
+                </a:solidFill>
+                <a:latin typeface="Arial"/>
+              </a:rPr>
+              <a:t>What we changed in the harness.</a:t>
+            </a:r>
+          </a:p>
+        </p:txBody>
+      </p:sp>
+      <p:sp>
+        <p:nvSpPr>
+          <p:cNvPr id="5" name="Rectangle 4"/>
           <p:cNvSpPr/>
           <p:nvPr/>
         </p:nvSpPr>
         <p:spPr>
           <a:xfrm>
-            <a:off x="822960" y="2990088"/>
-            <a:ext cx="50800" cy="475488"/>
+            <a:off x="822960" y="1783080"/>
+            <a:ext cx="822960" cy="63500"/>
           </a:xfrm>
           <a:prstGeom prst="rect">
             <a:avLst/>
@@ -5549,98 +5794,19 @@
           <a:lstStyle/>
           <a:p>
             <a:pPr algn="ctr"/>
-            <a:endParaRPr/>
-          </a:p>
-        </p:txBody>
-      </p:sp>
-      <p:sp>
-        <p:nvSpPr>
-          <p:cNvPr id="10" name="TextBox 9"/>
-          <p:cNvSpPr txBox="1"/>
-          <p:nvPr/>
-        </p:nvSpPr>
-        <p:spPr>
-          <a:xfrm>
-            <a:off x="1097280" y="2898648"/>
-            <a:ext cx="3200400" cy="457200"/>
-          </a:xfrm>
-          <a:prstGeom prst="rect">
-            <a:avLst/>
-          </a:prstGeom>
-          <a:noFill/>
-        </p:spPr>
-        <p:txBody>
-          <a:bodyPr wrap="square">
-            <a:spAutoFit/>
-          </a:bodyPr>
-          <a:lstStyle/>
-          <a:p>
-            <a:pPr algn="l">
-              <a:lnSpc>
-                <a:spcPct val="125000"/>
-              </a:lnSpc>
-            </a:pPr>
-            <a:r>
-              <a:rPr sz="1600" b="1">
-                <a:solidFill>
-                  <a:srgbClr val="111827"/>
-                </a:solidFill>
-                <a:latin typeface="Arial"/>
-              </a:rPr>
-              <a:t>Image input</a:t>
-            </a:r>
-          </a:p>
-        </p:txBody>
-      </p:sp>
-      <p:sp>
-        <p:nvSpPr>
-          <p:cNvPr id="11" name="TextBox 10"/>
-          <p:cNvSpPr txBox="1"/>
-          <p:nvPr/>
-        </p:nvSpPr>
-        <p:spPr>
-          <a:xfrm>
-            <a:off x="4389120" y="2898648"/>
-            <a:ext cx="6949440" cy="457200"/>
-          </a:xfrm>
-          <a:prstGeom prst="rect">
-            <a:avLst/>
-          </a:prstGeom>
-          <a:noFill/>
-        </p:spPr>
-        <p:txBody>
-          <a:bodyPr wrap="square">
-            <a:spAutoFit/>
-          </a:bodyPr>
-          <a:lstStyle/>
-          <a:p>
-            <a:pPr algn="l">
-              <a:lnSpc>
-                <a:spcPct val="125000"/>
-              </a:lnSpc>
-            </a:pPr>
-            <a:r>
-              <a:rPr sz="1400" b="0">
-                <a:solidFill>
-                  <a:srgbClr val="6B7280"/>
-                </a:solidFill>
-                <a:latin typeface="Arial"/>
-              </a:rPr>
-              <a:t>A photo of an insect on a plate is the evidence. Sent as inline bytes.</a:t>
-            </a:r>
-          </a:p>
-        </p:txBody>
-      </p:sp>
-      <p:sp>
-        <p:nvSpPr>
-          <p:cNvPr id="12" name="Rectangle 11"/>
+          </a:p>
+        </p:txBody>
+      </p:sp>
+      <p:sp>
+        <p:nvSpPr>
+          <p:cNvPr id="6" name="Rectangle 5"/>
           <p:cNvSpPr/>
           <p:nvPr/>
         </p:nvSpPr>
         <p:spPr>
           <a:xfrm>
-            <a:off x="822960" y="3648456"/>
-            <a:ext cx="50800" cy="475488"/>
+            <a:off x="822960" y="2249424"/>
+            <a:ext cx="50800" cy="420624"/>
           </a:xfrm>
           <a:prstGeom prst="rect">
             <a:avLst/>
@@ -5672,20 +5838,19 @@
           <a:lstStyle/>
           <a:p>
             <a:pPr algn="ctr"/>
-            <a:endParaRPr/>
-          </a:p>
-        </p:txBody>
-      </p:sp>
-      <p:sp>
-        <p:nvSpPr>
-          <p:cNvPr id="13" name="TextBox 12"/>
+          </a:p>
+        </p:txBody>
+      </p:sp>
+      <p:sp>
+        <p:nvSpPr>
+          <p:cNvPr id="7" name="TextBox 6"/>
           <p:cNvSpPr txBox="1"/>
           <p:nvPr/>
         </p:nvSpPr>
         <p:spPr>
           <a:xfrm>
-            <a:off x="1097280" y="3557016"/>
-            <a:ext cx="3200400" cy="457200"/>
+            <a:off x="1143000" y="2194560"/>
+            <a:ext cx="3291840" cy="411480"/>
           </a:xfrm>
           <a:prstGeom prst="rect">
             <a:avLst/>
@@ -5710,21 +5875,21 @@
                 </a:solidFill>
                 <a:latin typeface="Arial"/>
               </a:rPr>
-              <a:t>Terminal tools</a:t>
-            </a:r>
-          </a:p>
-        </p:txBody>
-      </p:sp>
-      <p:sp>
-        <p:nvSpPr>
-          <p:cNvPr id="14" name="TextBox 13"/>
+              <a:t>Per-agent tool sets</a:t>
+            </a:r>
+          </a:p>
+        </p:txBody>
+      </p:sp>
+      <p:sp>
+        <p:nvSpPr>
+          <p:cNvPr id="8" name="TextBox 7"/>
           <p:cNvSpPr txBox="1"/>
           <p:nvPr/>
         </p:nvSpPr>
         <p:spPr>
           <a:xfrm>
-            <a:off x="4389120" y="3557016"/>
-            <a:ext cx="6949440" cy="457200"/>
+            <a:off x="4572000" y="2194560"/>
+            <a:ext cx="6766560" cy="411480"/>
           </a:xfrm>
           <a:prstGeom prst="rect">
             <a:avLst/>
@@ -5749,21 +5914,21 @@
                 </a:solidFill>
                 <a:latin typeface="Arial"/>
               </a:rPr>
-              <a:t>@tool(stop=True) ends the run with its own result — no extra model round.</a:t>
-            </a:r>
-          </a:p>
-        </p:txBody>
-      </p:sp>
-      <p:sp>
-        <p:nvSpPr>
-          <p:cNvPr id="15" name="Rectangle 14"/>
+              <a:t>Each agent sends only the tools it needs.</a:t>
+            </a:r>
+          </a:p>
+        </p:txBody>
+      </p:sp>
+      <p:sp>
+        <p:nvSpPr>
+          <p:cNvPr id="9" name="Rectangle 8"/>
           <p:cNvSpPr/>
           <p:nvPr/>
         </p:nvSpPr>
         <p:spPr>
           <a:xfrm>
-            <a:off x="822960" y="4306824"/>
-            <a:ext cx="50800" cy="475488"/>
+            <a:off x="822960" y="2852928"/>
+            <a:ext cx="50800" cy="420624"/>
           </a:xfrm>
           <a:prstGeom prst="rect">
             <a:avLst/>
@@ -5795,20 +5960,19 @@
           <a:lstStyle/>
           <a:p>
             <a:pPr algn="ctr"/>
-            <a:endParaRPr/>
-          </a:p>
-        </p:txBody>
-      </p:sp>
-      <p:sp>
-        <p:nvSpPr>
-          <p:cNvPr id="16" name="TextBox 15"/>
+          </a:p>
+        </p:txBody>
+      </p:sp>
+      <p:sp>
+        <p:nvSpPr>
+          <p:cNvPr id="10" name="TextBox 9"/>
           <p:cNvSpPr txBox="1"/>
           <p:nvPr/>
         </p:nvSpPr>
         <p:spPr>
           <a:xfrm>
-            <a:off x="1097280" y="4215384"/>
-            <a:ext cx="3200400" cy="457200"/>
+            <a:off x="1143000" y="2798064"/>
+            <a:ext cx="3291840" cy="411480"/>
           </a:xfrm>
           <a:prstGeom prst="rect">
             <a:avLst/>
@@ -5833,21 +5997,21 @@
                 </a:solidFill>
                 <a:latin typeface="Arial"/>
               </a:rPr>
-              <a:t>Pause for a human</a:t>
-            </a:r>
-          </a:p>
-        </p:txBody>
-      </p:sp>
-      <p:sp>
-        <p:nvSpPr>
-          <p:cNvPr id="17" name="TextBox 16"/>
+              <a:t>Image input</a:t>
+            </a:r>
+          </a:p>
+        </p:txBody>
+      </p:sp>
+      <p:sp>
+        <p:nvSpPr>
+          <p:cNvPr id="11" name="TextBox 10"/>
           <p:cNvSpPr txBox="1"/>
           <p:nvPr/>
         </p:nvSpPr>
         <p:spPr>
           <a:xfrm>
-            <a:off x="4389120" y="4215384"/>
-            <a:ext cx="6949440" cy="457200"/>
+            <a:off x="4572000" y="2798064"/>
+            <a:ext cx="6766560" cy="411480"/>
           </a:xfrm>
           <a:prstGeom prst="rect">
             <a:avLst/>
@@ -5872,21 +6036,21 @@
                 </a:solidFill>
                 <a:latin typeface="Arial"/>
               </a:rPr>
-              <a:t>@tool(pause=True) returns the question, then resumes the same conversation.</a:t>
-            </a:r>
-          </a:p>
-        </p:txBody>
-      </p:sp>
-      <p:sp>
-        <p:nvSpPr>
-          <p:cNvPr id="18" name="Rectangle 17"/>
+              <a:t>A photo is evidence. Sent as inline bytes.</a:t>
+            </a:r>
+          </a:p>
+        </p:txBody>
+      </p:sp>
+      <p:sp>
+        <p:nvSpPr>
+          <p:cNvPr id="12" name="Rectangle 11"/>
           <p:cNvSpPr/>
           <p:nvPr/>
         </p:nvSpPr>
         <p:spPr>
           <a:xfrm>
-            <a:off x="822960" y="4965192"/>
-            <a:ext cx="50800" cy="475488"/>
+            <a:off x="822960" y="3456432"/>
+            <a:ext cx="50800" cy="420624"/>
           </a:xfrm>
           <a:prstGeom prst="rect">
             <a:avLst/>
@@ -5918,20 +6082,19 @@
           <a:lstStyle/>
           <a:p>
             <a:pPr algn="ctr"/>
-            <a:endParaRPr/>
-          </a:p>
-        </p:txBody>
-      </p:sp>
-      <p:sp>
-        <p:nvSpPr>
-          <p:cNvPr id="19" name="TextBox 18"/>
+          </a:p>
+        </p:txBody>
+      </p:sp>
+      <p:sp>
+        <p:nvSpPr>
+          <p:cNvPr id="13" name="TextBox 12"/>
           <p:cNvSpPr txBox="1"/>
           <p:nvPr/>
         </p:nvSpPr>
         <p:spPr>
           <a:xfrm>
-            <a:off x="1097280" y="4873752"/>
-            <a:ext cx="3200400" cy="457200"/>
+            <a:off x="1143000" y="3401568"/>
+            <a:ext cx="3291840" cy="411480"/>
           </a:xfrm>
           <a:prstGeom prst="rect">
             <a:avLst/>
@@ -5956,21 +6119,21 @@
                 </a:solidFill>
                 <a:latin typeface="Arial"/>
               </a:rPr>
-              <a:t>Step labels + RunResult</a:t>
-            </a:r>
-          </a:p>
-        </p:txBody>
-      </p:sp>
-      <p:sp>
-        <p:nvSpPr>
-          <p:cNvPr id="20" name="TextBox 19"/>
+              <a:t>Terminal tools</a:t>
+            </a:r>
+          </a:p>
+        </p:txBody>
+      </p:sp>
+      <p:sp>
+        <p:nvSpPr>
+          <p:cNvPr id="14" name="TextBox 13"/>
           <p:cNvSpPr txBox="1"/>
           <p:nvPr/>
         </p:nvSpPr>
         <p:spPr>
           <a:xfrm>
-            <a:off x="4389120" y="4873752"/>
-            <a:ext cx="6949440" cy="457200"/>
+            <a:off x="4572000" y="3401568"/>
+            <a:ext cx="6766560" cy="411480"/>
           </a:xfrm>
           <a:prstGeom prst="rect">
             <a:avLst/>
@@ -5995,29 +6158,27 @@
                 </a:solidFill>
                 <a:latin typeface="Arial"/>
               </a:rPr>
-              <a:t>The UI shows "Looking for similar reports in Mess" instead of a spinner.</a:t>
-            </a:r>
-          </a:p>
-        </p:txBody>
-      </p:sp>
-      <p:sp>
-        <p:nvSpPr>
-          <p:cNvPr id="21" name="Rounded Rectangle 20"/>
+              <a:t>@tool(stop=True) ends the run with its own result.</a:t>
+            </a:r>
+          </a:p>
+        </p:txBody>
+      </p:sp>
+      <p:sp>
+        <p:nvSpPr>
+          <p:cNvPr id="15" name="Rectangle 14"/>
           <p:cNvSpPr/>
           <p:nvPr/>
         </p:nvSpPr>
         <p:spPr>
           <a:xfrm>
-            <a:off x="822960" y="5715000"/>
-            <a:ext cx="10515600" cy="777240"/>
-          </a:xfrm>
-          <a:prstGeom prst="roundRect">
-            <a:avLst>
-              <a:gd name="adj" fmla="val 6000"/>
-            </a:avLst>
+            <a:off x="822960" y="4059936"/>
+            <a:ext cx="50800" cy="420624"/>
+          </a:xfrm>
+          <a:prstGeom prst="rect">
+            <a:avLst/>
           </a:prstGeom>
           <a:solidFill>
-            <a:srgbClr val="FFFFFF"/>
+            <a:srgbClr val="4F46E5"/>
           </a:solidFill>
           <a:ln>
             <a:noFill/>
@@ -6043,20 +6204,19 @@
           <a:lstStyle/>
           <a:p>
             <a:pPr algn="ctr"/>
-            <a:endParaRPr/>
-          </a:p>
-        </p:txBody>
-      </p:sp>
-      <p:sp>
-        <p:nvSpPr>
-          <p:cNvPr id="22" name="TextBox 21"/>
+          </a:p>
+        </p:txBody>
+      </p:sp>
+      <p:sp>
+        <p:nvSpPr>
+          <p:cNvPr id="16" name="TextBox 15"/>
           <p:cNvSpPr txBox="1"/>
           <p:nvPr/>
         </p:nvSpPr>
         <p:spPr>
           <a:xfrm>
-            <a:off x="1188720" y="5897880"/>
-            <a:ext cx="9875520" cy="457200"/>
+            <a:off x="1143000" y="4005072"/>
+            <a:ext cx="3291840" cy="411480"/>
           </a:xfrm>
           <a:prstGeom prst="rect">
             <a:avLst/>
@@ -6077,56 +6237,70 @@
             <a:r>
               <a:rPr sz="1600" b="1">
                 <a:solidFill>
-                  <a:srgbClr val="4F46E5"/>
-                </a:solidFill>
-                <a:latin typeface="Arial"/>
-              </a:rPr>
-              <a:t>4 Gemma calls → 2.   34 tests, all on a fake model, so they run with no API key.</a:t>
-            </a:r>
-          </a:p>
-        </p:txBody>
-      </p:sp>
-    </p:spTree>
-  </p:cSld>
-  <p:clrMapOvr>
-    <a:masterClrMapping/>
-  </p:clrMapOvr>
-</p:sld>
-</file>
-
-<file path=ppt/slides/slide7.xml><?xml version="1.0" encoding="utf-8"?>
-<p:sld xmlns:a="http://schemas.openxmlformats.org/drawingml/2006/main" xmlns:r="http://schemas.openxmlformats.org/officeDocument/2006/relationships" xmlns:p="http://schemas.openxmlformats.org/presentationml/2006/main">
-  <p:cSld>
-    <p:spTree>
-      <p:nvGrpSpPr>
-        <p:cNvPr id="1" name=""/>
-        <p:cNvGrpSpPr/>
-        <p:nvPr/>
-      </p:nvGrpSpPr>
-      <p:grpSpPr>
-        <a:xfrm>
-          <a:off x="0" y="0"/>
-          <a:ext cx="0" cy="0"/>
-          <a:chOff x="0" y="0"/>
-          <a:chExt cx="0" cy="0"/>
-        </a:xfrm>
-      </p:grpSpPr>
-      <p:sp>
-        <p:nvSpPr>
-          <p:cNvPr id="2" name="Rectangle 1"/>
+                  <a:srgbClr val="111827"/>
+                </a:solidFill>
+                <a:latin typeface="Arial"/>
+              </a:rPr>
+              <a:t>Pause for a human</a:t>
+            </a:r>
+          </a:p>
+        </p:txBody>
+      </p:sp>
+      <p:sp>
+        <p:nvSpPr>
+          <p:cNvPr id="17" name="TextBox 16"/>
+          <p:cNvSpPr txBox="1"/>
+          <p:nvPr/>
+        </p:nvSpPr>
+        <p:spPr>
+          <a:xfrm>
+            <a:off x="4572000" y="4005072"/>
+            <a:ext cx="6766560" cy="411480"/>
+          </a:xfrm>
+          <a:prstGeom prst="rect">
+            <a:avLst/>
+          </a:prstGeom>
+          <a:noFill/>
+        </p:spPr>
+        <p:txBody>
+          <a:bodyPr wrap="square">
+            <a:spAutoFit/>
+          </a:bodyPr>
+          <a:lstStyle/>
+          <a:p>
+            <a:pPr algn="l">
+              <a:lnSpc>
+                <a:spcPct val="125000"/>
+              </a:lnSpc>
+            </a:pPr>
+            <a:r>
+              <a:rPr sz="1400" b="0">
+                <a:solidFill>
+                  <a:srgbClr val="6B7280"/>
+                </a:solidFill>
+                <a:latin typeface="Arial"/>
+              </a:rPr>
+              <a:t>@tool(pause=True) asks, then resumes the same conversation.</a:t>
+            </a:r>
+          </a:p>
+        </p:txBody>
+      </p:sp>
+      <p:sp>
+        <p:nvSpPr>
+          <p:cNvPr id="18" name="Rectangle 17"/>
           <p:cNvSpPr/>
           <p:nvPr/>
         </p:nvSpPr>
         <p:spPr>
           <a:xfrm>
-            <a:off x="0" y="0"/>
-            <a:ext cx="12191695" cy="6858000"/>
+            <a:off x="822960" y="4663440"/>
+            <a:ext cx="50800" cy="420624"/>
           </a:xfrm>
           <a:prstGeom prst="rect">
             <a:avLst/>
           </a:prstGeom>
           <a:solidFill>
-            <a:srgbClr val="FFFFFF"/>
+            <a:srgbClr val="4F46E5"/>
           </a:solidFill>
           <a:ln>
             <a:noFill/>
@@ -6152,20 +6326,19 @@
           <a:lstStyle/>
           <a:p>
             <a:pPr algn="ctr"/>
-            <a:endParaRPr/>
-          </a:p>
-        </p:txBody>
-      </p:sp>
-      <p:sp>
-        <p:nvSpPr>
-          <p:cNvPr id="3" name="TextBox 2"/>
+          </a:p>
+        </p:txBody>
+      </p:sp>
+      <p:sp>
+        <p:nvSpPr>
+          <p:cNvPr id="19" name="TextBox 18"/>
           <p:cNvSpPr txBox="1"/>
           <p:nvPr/>
         </p:nvSpPr>
         <p:spPr>
           <a:xfrm>
-            <a:off x="822960" y="566928"/>
-            <a:ext cx="10058400" cy="365760"/>
+            <a:off x="1143000" y="4608576"/>
+            <a:ext cx="3291840" cy="411480"/>
           </a:xfrm>
           <a:prstGeom prst="rect">
             <a:avLst/>
@@ -6184,27 +6357,27 @@
               </a:lnSpc>
             </a:pPr>
             <a:r>
-              <a:rPr sz="1200" b="1">
-                <a:solidFill>
-                  <a:srgbClr val="4F46E5"/>
-                </a:solidFill>
-                <a:latin typeface="Arial"/>
-              </a:rPr>
-              <a:t>NEXT</a:t>
-            </a:r>
-          </a:p>
-        </p:txBody>
-      </p:sp>
-      <p:sp>
-        <p:nvSpPr>
-          <p:cNvPr id="4" name="TextBox 3"/>
+              <a:rPr sz="1600" b="1">
+                <a:solidFill>
+                  <a:srgbClr val="111827"/>
+                </a:solidFill>
+                <a:latin typeface="Arial"/>
+              </a:rPr>
+              <a:t>Step labels + RunResult</a:t>
+            </a:r>
+          </a:p>
+        </p:txBody>
+      </p:sp>
+      <p:sp>
+        <p:nvSpPr>
+          <p:cNvPr id="20" name="TextBox 19"/>
           <p:cNvSpPr txBox="1"/>
           <p:nvPr/>
         </p:nvSpPr>
         <p:spPr>
           <a:xfrm>
-            <a:off x="822960" y="914400"/>
-            <a:ext cx="10515600" cy="914400"/>
+            <a:off x="4572000" y="4608576"/>
+            <a:ext cx="6766560" cy="411480"/>
           </a:xfrm>
           <a:prstGeom prst="rect">
             <a:avLst/>
@@ -6223,33 +6396,35 @@
               </a:lnSpc>
             </a:pPr>
             <a:r>
-              <a:rPr sz="4000" b="1">
-                <a:solidFill>
-                  <a:srgbClr val="111827"/>
-                </a:solidFill>
-                <a:latin typeface="Arial"/>
-              </a:rPr>
-              <a:t>What we would do next.</a:t>
-            </a:r>
-          </a:p>
-        </p:txBody>
-      </p:sp>
-      <p:sp>
-        <p:nvSpPr>
-          <p:cNvPr id="5" name="Rectangle 4"/>
+              <a:rPr sz="1400" b="0">
+                <a:solidFill>
+                  <a:srgbClr val="6B7280"/>
+                </a:solidFill>
+                <a:latin typeface="Arial"/>
+              </a:rPr>
+              <a:t>The UI shows "Looking for similar reports in Mess".</a:t>
+            </a:r>
+          </a:p>
+        </p:txBody>
+      </p:sp>
+      <p:sp>
+        <p:nvSpPr>
+          <p:cNvPr id="21" name="Rounded Rectangle 20"/>
           <p:cNvSpPr/>
           <p:nvPr/>
         </p:nvSpPr>
         <p:spPr>
           <a:xfrm>
-            <a:off x="822960" y="1783080"/>
-            <a:ext cx="822960" cy="63500"/>
-          </a:xfrm>
-          <a:prstGeom prst="rect">
-            <a:avLst/>
+            <a:off x="822960" y="5440680"/>
+            <a:ext cx="10515600" cy="914400"/>
+          </a:xfrm>
+          <a:prstGeom prst="roundRect">
+            <a:avLst>
+              <a:gd name="adj" fmla="val 14000"/>
+            </a:avLst>
           </a:prstGeom>
           <a:solidFill>
-            <a:srgbClr val="4F46E5"/>
+            <a:srgbClr val="111827"/>
           </a:solidFill>
           <a:ln>
             <a:noFill/>
@@ -6275,20 +6450,19 @@
           <a:lstStyle/>
           <a:p>
             <a:pPr algn="ctr"/>
-            <a:endParaRPr/>
-          </a:p>
-        </p:txBody>
-      </p:sp>
-      <p:sp>
-        <p:nvSpPr>
-          <p:cNvPr id="6" name="TextBox 5"/>
+          </a:p>
+        </p:txBody>
+      </p:sp>
+      <p:sp>
+        <p:nvSpPr>
+          <p:cNvPr id="22" name="TextBox 21"/>
           <p:cNvSpPr txBox="1"/>
           <p:nvPr/>
         </p:nvSpPr>
         <p:spPr>
           <a:xfrm>
-            <a:off x="822960" y="2286000"/>
-            <a:ext cx="3291840" cy="457200"/>
+            <a:off x="1280160" y="5650992"/>
+            <a:ext cx="9692640" cy="457200"/>
           </a:xfrm>
           <a:prstGeom prst="rect">
             <a:avLst/>
@@ -6309,25 +6483,25 @@
             <a:r>
               <a:rPr sz="1700" b="1">
                 <a:solidFill>
-                  <a:srgbClr val="4F46E5"/>
-                </a:solidFill>
-                <a:latin typeface="Arial"/>
-              </a:rPr>
-              <a:t>Institute SSO</a:t>
-            </a:r>
-          </a:p>
-        </p:txBody>
-      </p:sp>
-      <p:sp>
-        <p:nvSpPr>
-          <p:cNvPr id="7" name="TextBox 6"/>
+                  <a:srgbClr val="FFFFFF"/>
+                </a:solidFill>
+                <a:latin typeface="Arial"/>
+              </a:rPr>
+              <a:t>4 Gemma calls → 2.    36 tests, all on a fake model, so they run with no API key.</a:t>
+            </a:r>
+          </a:p>
+        </p:txBody>
+      </p:sp>
+      <p:sp>
+        <p:nvSpPr>
+          <p:cNvPr id="23" name="TextBox 22"/>
           <p:cNvSpPr txBox="1"/>
           <p:nvPr/>
         </p:nvSpPr>
         <p:spPr>
           <a:xfrm>
-            <a:off x="4389120" y="2286000"/>
-            <a:ext cx="6949440" cy="548640"/>
+            <a:off x="822960" y="6355080"/>
+            <a:ext cx="3657600" cy="274320"/>
           </a:xfrm>
           <a:prstGeom prst="rect">
             <a:avLst/>
@@ -6346,27 +6520,27 @@
               </a:lnSpc>
             </a:pPr>
             <a:r>
-              <a:rPr sz="1400" b="0">
+              <a:rPr sz="1000" b="0">
                 <a:solidFill>
                   <a:srgbClr val="6B7280"/>
                 </a:solidFill>
                 <a:latin typeface="Arial"/>
               </a:rPr>
-              <a:t>The role picker is a demo stand-in. Real deployment authenticates against the institute.</a:t>
-            </a:r>
-          </a:p>
-        </p:txBody>
-      </p:sp>
-      <p:sp>
-        <p:nvSpPr>
-          <p:cNvPr id="8" name="TextBox 7"/>
+              <a:t>Shikayat</a:t>
+            </a:r>
+          </a:p>
+        </p:txBody>
+      </p:sp>
+      <p:sp>
+        <p:nvSpPr>
+          <p:cNvPr id="24" name="TextBox 23"/>
           <p:cNvSpPr txBox="1"/>
           <p:nvPr/>
         </p:nvSpPr>
         <p:spPr>
           <a:xfrm>
-            <a:off x="822960" y="3063240"/>
-            <a:ext cx="3291840" cy="457200"/>
+            <a:off x="10424160" y="6355080"/>
+            <a:ext cx="914400" cy="274320"/>
           </a:xfrm>
           <a:prstGeom prst="rect">
             <a:avLst/>
@@ -6379,33 +6553,95 @@
           </a:bodyPr>
           <a:lstStyle/>
           <a:p>
-            <a:pPr algn="l">
+            <a:pPr algn="r">
               <a:lnSpc>
                 <a:spcPct val="125000"/>
               </a:lnSpc>
             </a:pPr>
             <a:r>
-              <a:rPr sz="1700" b="1">
-                <a:solidFill>
-                  <a:srgbClr val="4F46E5"/>
-                </a:solidFill>
-                <a:latin typeface="Arial"/>
-              </a:rPr>
-              <a:t>Object storage for photos</a:t>
-            </a:r>
-          </a:p>
-        </p:txBody>
-      </p:sp>
-      <p:sp>
-        <p:nvSpPr>
-          <p:cNvPr id="9" name="TextBox 8"/>
+              <a:rPr sz="1000" b="0">
+                <a:solidFill>
+                  <a:srgbClr val="6B7280"/>
+                </a:solidFill>
+                <a:latin typeface="Arial"/>
+              </a:rPr>
+              <a:t>6</a:t>
+            </a:r>
+          </a:p>
+        </p:txBody>
+      </p:sp>
+    </p:spTree>
+  </p:cSld>
+  <p:clrMapOvr>
+    <a:masterClrMapping/>
+  </p:clrMapOvr>
+</p:sld>
+</file>
+
+<file path=ppt/slides/slide7.xml><?xml version="1.0" encoding="utf-8"?>
+<p:sld xmlns:a="http://schemas.openxmlformats.org/drawingml/2006/main" xmlns:p="http://schemas.openxmlformats.org/presentationml/2006/main" xmlns:r="http://schemas.openxmlformats.org/officeDocument/2006/relationships">
+  <p:cSld>
+    <p:spTree>
+      <p:nvGrpSpPr>
+        <p:cNvPr id="1" name=""/>
+        <p:cNvGrpSpPr/>
+        <p:nvPr/>
+      </p:nvGrpSpPr>
+      <p:grpSpPr/>
+      <p:sp>
+        <p:nvSpPr>
+          <p:cNvPr id="2" name="Rectangle 1"/>
+          <p:cNvSpPr/>
+          <p:nvPr/>
+        </p:nvSpPr>
+        <p:spPr>
+          <a:xfrm>
+            <a:off x="0" y="0"/>
+            <a:ext cx="12191695" cy="6858000"/>
+          </a:xfrm>
+          <a:prstGeom prst="rect">
+            <a:avLst/>
+          </a:prstGeom>
+          <a:solidFill>
+            <a:srgbClr val="FFFFFF"/>
+          </a:solidFill>
+          <a:ln>
+            <a:noFill/>
+          </a:ln>
+          <a:effectLst/>
+        </p:spPr>
+        <p:style>
+          <a:lnRef idx="1">
+            <a:schemeClr val="accent1"/>
+          </a:lnRef>
+          <a:fillRef idx="3">
+            <a:schemeClr val="accent1"/>
+          </a:fillRef>
+          <a:effectRef idx="2">
+            <a:schemeClr val="accent1"/>
+          </a:effectRef>
+          <a:fontRef idx="minor">
+            <a:schemeClr val="lt1"/>
+          </a:fontRef>
+        </p:style>
+        <p:txBody>
+          <a:bodyPr rtlCol="0" anchor="ctr"/>
+          <a:lstStyle/>
+          <a:p>
+            <a:pPr algn="ctr"/>
+          </a:p>
+        </p:txBody>
+      </p:sp>
+      <p:sp>
+        <p:nvSpPr>
+          <p:cNvPr id="3" name="TextBox 2"/>
           <p:cNvSpPr txBox="1"/>
           <p:nvPr/>
         </p:nvSpPr>
         <p:spPr>
           <a:xfrm>
-            <a:off x="4389120" y="3063240"/>
-            <a:ext cx="6949440" cy="548640"/>
+            <a:off x="822960" y="566928"/>
+            <a:ext cx="10058400" cy="365760"/>
           </a:xfrm>
           <a:prstGeom prst="rect">
             <a:avLst/>
@@ -6424,27 +6660,27 @@
               </a:lnSpc>
             </a:pPr>
             <a:r>
-              <a:rPr sz="1400" b="0">
-                <a:solidFill>
-                  <a:srgbClr val="6B7280"/>
-                </a:solidFill>
-                <a:latin typeface="Arial"/>
-              </a:rPr>
-              <a:t>Photos are on local disk today. Production would use S3 or Cloud Storage.</a:t>
-            </a:r>
-          </a:p>
-        </p:txBody>
-      </p:sp>
-      <p:sp>
-        <p:nvSpPr>
-          <p:cNvPr id="10" name="TextBox 9"/>
+              <a:rPr sz="1200" b="1">
+                <a:solidFill>
+                  <a:srgbClr val="4F46E5"/>
+                </a:solidFill>
+                <a:latin typeface="Arial"/>
+              </a:rPr>
+              <a:t>NEXT</a:t>
+            </a:r>
+          </a:p>
+        </p:txBody>
+      </p:sp>
+      <p:sp>
+        <p:nvSpPr>
+          <p:cNvPr id="4" name="TextBox 3"/>
           <p:cNvSpPr txBox="1"/>
           <p:nvPr/>
         </p:nvSpPr>
         <p:spPr>
           <a:xfrm>
-            <a:off x="822960" y="3840480"/>
-            <a:ext cx="3291840" cy="457200"/>
+            <a:off x="822960" y="914400"/>
+            <a:ext cx="10515600" cy="914400"/>
           </a:xfrm>
           <a:prstGeom prst="rect">
             <a:avLst/>
@@ -6463,27 +6699,71 @@
               </a:lnSpc>
             </a:pPr>
             <a:r>
-              <a:rPr sz="1700" b="1">
-                <a:solidFill>
-                  <a:srgbClr val="4F46E5"/>
-                </a:solidFill>
-                <a:latin typeface="Arial"/>
-              </a:rPr>
-              <a:t>WhatsApp intake</a:t>
-            </a:r>
-          </a:p>
-        </p:txBody>
-      </p:sp>
-      <p:sp>
-        <p:nvSpPr>
-          <p:cNvPr id="11" name="TextBox 10"/>
+              <a:rPr sz="4000" b="1">
+                <a:solidFill>
+                  <a:srgbClr val="111827"/>
+                </a:solidFill>
+                <a:latin typeface="Arial"/>
+              </a:rPr>
+              <a:t>What we would do next.</a:t>
+            </a:r>
+          </a:p>
+        </p:txBody>
+      </p:sp>
+      <p:sp>
+        <p:nvSpPr>
+          <p:cNvPr id="5" name="Rectangle 4"/>
+          <p:cNvSpPr/>
+          <p:nvPr/>
+        </p:nvSpPr>
+        <p:spPr>
+          <a:xfrm>
+            <a:off x="822960" y="1783080"/>
+            <a:ext cx="822960" cy="63500"/>
+          </a:xfrm>
+          <a:prstGeom prst="rect">
+            <a:avLst/>
+          </a:prstGeom>
+          <a:solidFill>
+            <a:srgbClr val="4F46E5"/>
+          </a:solidFill>
+          <a:ln>
+            <a:noFill/>
+          </a:ln>
+          <a:effectLst/>
+        </p:spPr>
+        <p:style>
+          <a:lnRef idx="1">
+            <a:schemeClr val="accent1"/>
+          </a:lnRef>
+          <a:fillRef idx="3">
+            <a:schemeClr val="accent1"/>
+          </a:fillRef>
+          <a:effectRef idx="2">
+            <a:schemeClr val="accent1"/>
+          </a:effectRef>
+          <a:fontRef idx="minor">
+            <a:schemeClr val="lt1"/>
+          </a:fontRef>
+        </p:style>
+        <p:txBody>
+          <a:bodyPr rtlCol="0" anchor="ctr"/>
+          <a:lstStyle/>
+          <a:p>
+            <a:pPr algn="ctr"/>
+          </a:p>
+        </p:txBody>
+      </p:sp>
+      <p:sp>
+        <p:nvSpPr>
+          <p:cNvPr id="6" name="TextBox 5"/>
           <p:cNvSpPr txBox="1"/>
           <p:nvPr/>
         </p:nvSpPr>
         <p:spPr>
           <a:xfrm>
-            <a:off x="4389120" y="3840480"/>
-            <a:ext cx="6949440" cy="548640"/>
+            <a:off x="822960" y="2286000"/>
+            <a:ext cx="3566160" cy="411480"/>
           </a:xfrm>
           <a:prstGeom prst="rect">
             <a:avLst/>
@@ -6502,27 +6782,27 @@
               </a:lnSpc>
             </a:pPr>
             <a:r>
-              <a:rPr sz="1400" b="0">
-                <a:solidFill>
-                  <a:srgbClr val="6B7280"/>
-                </a:solidFill>
-                <a:latin typeface="Arial"/>
-              </a:rPr>
-              <a:t>Students already complain in hostel groups. Meet them where they are.</a:t>
-            </a:r>
-          </a:p>
-        </p:txBody>
-      </p:sp>
-      <p:sp>
-        <p:nvSpPr>
-          <p:cNvPr id="12" name="TextBox 11"/>
+              <a:rPr sz="1700" b="1">
+                <a:solidFill>
+                  <a:srgbClr val="4F46E5"/>
+                </a:solidFill>
+                <a:latin typeface="Arial"/>
+              </a:rPr>
+              <a:t>Institute SSO</a:t>
+            </a:r>
+          </a:p>
+        </p:txBody>
+      </p:sp>
+      <p:sp>
+        <p:nvSpPr>
+          <p:cNvPr id="7" name="TextBox 6"/>
           <p:cNvSpPr txBox="1"/>
           <p:nvPr/>
         </p:nvSpPr>
         <p:spPr>
           <a:xfrm>
-            <a:off x="822960" y="4617720"/>
-            <a:ext cx="3291840" cy="457200"/>
+            <a:off x="4572000" y="2286000"/>
+            <a:ext cx="6766560" cy="457200"/>
           </a:xfrm>
           <a:prstGeom prst="rect">
             <a:avLst/>
@@ -6541,27 +6821,27 @@
               </a:lnSpc>
             </a:pPr>
             <a:r>
-              <a:rPr sz="1700" b="1">
-                <a:solidFill>
-                  <a:srgbClr val="4F46E5"/>
-                </a:solidFill>
-                <a:latin typeface="Arial"/>
-              </a:rPr>
-              <a:t>Promote the Other bucket</a:t>
-            </a:r>
-          </a:p>
-        </p:txBody>
-      </p:sp>
-      <p:sp>
-        <p:nvSpPr>
-          <p:cNvPr id="13" name="TextBox 12"/>
+              <a:rPr sz="1400" b="0">
+                <a:solidFill>
+                  <a:srgbClr val="6B7280"/>
+                </a:solidFill>
+                <a:latin typeface="Arial"/>
+              </a:rPr>
+              <a:t>The role picker is a demo stand-in.</a:t>
+            </a:r>
+          </a:p>
+        </p:txBody>
+      </p:sp>
+      <p:sp>
+        <p:nvSpPr>
+          <p:cNvPr id="8" name="TextBox 7"/>
           <p:cNvSpPr txBox="1"/>
           <p:nvPr/>
         </p:nvSpPr>
         <p:spPr>
           <a:xfrm>
-            <a:off x="4389120" y="4617720"/>
-            <a:ext cx="6949440" cy="548640"/>
+            <a:off x="822960" y="3035808"/>
+            <a:ext cx="3566160" cy="411480"/>
           </a:xfrm>
           <a:prstGeom prst="rect">
             <a:avLst/>
@@ -6580,27 +6860,27 @@
               </a:lnSpc>
             </a:pPr>
             <a:r>
-              <a:rPr sz="1400" b="0">
-                <a:solidFill>
-                  <a:srgbClr val="6B7280"/>
-                </a:solidFill>
-                <a:latin typeface="Arial"/>
-              </a:rPr>
-              <a:t>Four students reported laundry issues. Admin can turn a suggestion into a real category.</a:t>
-            </a:r>
-          </a:p>
-        </p:txBody>
-      </p:sp>
-      <p:sp>
-        <p:nvSpPr>
-          <p:cNvPr id="14" name="TextBox 13"/>
+              <a:rPr sz="1700" b="1">
+                <a:solidFill>
+                  <a:srgbClr val="4F46E5"/>
+                </a:solidFill>
+                <a:latin typeface="Arial"/>
+              </a:rPr>
+              <a:t>Object storage for photos</a:t>
+            </a:r>
+          </a:p>
+        </p:txBody>
+      </p:sp>
+      <p:sp>
+        <p:nvSpPr>
+          <p:cNvPr id="9" name="TextBox 8"/>
           <p:cNvSpPr txBox="1"/>
           <p:nvPr/>
         </p:nvSpPr>
         <p:spPr>
           <a:xfrm>
-            <a:off x="822960" y="5943600"/>
-            <a:ext cx="10515600" cy="457200"/>
+            <a:off x="4572000" y="3035808"/>
+            <a:ext cx="6766560" cy="457200"/>
           </a:xfrm>
           <a:prstGeom prst="rect">
             <a:avLst/>
@@ -6625,7 +6905,280 @@
                 </a:solidFill>
                 <a:latin typeface="Arial"/>
               </a:rPr>
-              <a:t>github.com/sarthak0707git/shikayat   ·   MIT</a:t>
+              <a:t>Local disk today; S3 or Cloud Storage in production.</a:t>
+            </a:r>
+          </a:p>
+        </p:txBody>
+      </p:sp>
+      <p:sp>
+        <p:nvSpPr>
+          <p:cNvPr id="10" name="TextBox 9"/>
+          <p:cNvSpPr txBox="1"/>
+          <p:nvPr/>
+        </p:nvSpPr>
+        <p:spPr>
+          <a:xfrm>
+            <a:off x="822960" y="3785616"/>
+            <a:ext cx="3566160" cy="411480"/>
+          </a:xfrm>
+          <a:prstGeom prst="rect">
+            <a:avLst/>
+          </a:prstGeom>
+          <a:noFill/>
+        </p:spPr>
+        <p:txBody>
+          <a:bodyPr wrap="square">
+            <a:spAutoFit/>
+          </a:bodyPr>
+          <a:lstStyle/>
+          <a:p>
+            <a:pPr algn="l">
+              <a:lnSpc>
+                <a:spcPct val="125000"/>
+              </a:lnSpc>
+            </a:pPr>
+            <a:r>
+              <a:rPr sz="1700" b="1">
+                <a:solidFill>
+                  <a:srgbClr val="4F46E5"/>
+                </a:solidFill>
+                <a:latin typeface="Arial"/>
+              </a:rPr>
+              <a:t>WhatsApp intake</a:t>
+            </a:r>
+          </a:p>
+        </p:txBody>
+      </p:sp>
+      <p:sp>
+        <p:nvSpPr>
+          <p:cNvPr id="11" name="TextBox 10"/>
+          <p:cNvSpPr txBox="1"/>
+          <p:nvPr/>
+        </p:nvSpPr>
+        <p:spPr>
+          <a:xfrm>
+            <a:off x="4572000" y="3785616"/>
+            <a:ext cx="6766560" cy="457200"/>
+          </a:xfrm>
+          <a:prstGeom prst="rect">
+            <a:avLst/>
+          </a:prstGeom>
+          <a:noFill/>
+        </p:spPr>
+        <p:txBody>
+          <a:bodyPr wrap="square">
+            <a:spAutoFit/>
+          </a:bodyPr>
+          <a:lstStyle/>
+          <a:p>
+            <a:pPr algn="l">
+              <a:lnSpc>
+                <a:spcPct val="125000"/>
+              </a:lnSpc>
+            </a:pPr>
+            <a:r>
+              <a:rPr sz="1400" b="0">
+                <a:solidFill>
+                  <a:srgbClr val="6B7280"/>
+                </a:solidFill>
+                <a:latin typeface="Arial"/>
+              </a:rPr>
+              <a:t>Students already complain in hostel groups. Meet them there.</a:t>
+            </a:r>
+          </a:p>
+        </p:txBody>
+      </p:sp>
+      <p:sp>
+        <p:nvSpPr>
+          <p:cNvPr id="12" name="TextBox 11"/>
+          <p:cNvSpPr txBox="1"/>
+          <p:nvPr/>
+        </p:nvSpPr>
+        <p:spPr>
+          <a:xfrm>
+            <a:off x="822960" y="4535424"/>
+            <a:ext cx="3566160" cy="411480"/>
+          </a:xfrm>
+          <a:prstGeom prst="rect">
+            <a:avLst/>
+          </a:prstGeom>
+          <a:noFill/>
+        </p:spPr>
+        <p:txBody>
+          <a:bodyPr wrap="square">
+            <a:spAutoFit/>
+          </a:bodyPr>
+          <a:lstStyle/>
+          <a:p>
+            <a:pPr algn="l">
+              <a:lnSpc>
+                <a:spcPct val="125000"/>
+              </a:lnSpc>
+            </a:pPr>
+            <a:r>
+              <a:rPr sz="1700" b="1">
+                <a:solidFill>
+                  <a:srgbClr val="4F46E5"/>
+                </a:solidFill>
+                <a:latin typeface="Arial"/>
+              </a:rPr>
+              <a:t>Promote the Other bucket</a:t>
+            </a:r>
+          </a:p>
+        </p:txBody>
+      </p:sp>
+      <p:sp>
+        <p:nvSpPr>
+          <p:cNvPr id="13" name="TextBox 12"/>
+          <p:cNvSpPr txBox="1"/>
+          <p:nvPr/>
+        </p:nvSpPr>
+        <p:spPr>
+          <a:xfrm>
+            <a:off x="4572000" y="4535424"/>
+            <a:ext cx="6766560" cy="457200"/>
+          </a:xfrm>
+          <a:prstGeom prst="rect">
+            <a:avLst/>
+          </a:prstGeom>
+          <a:noFill/>
+        </p:spPr>
+        <p:txBody>
+          <a:bodyPr wrap="square">
+            <a:spAutoFit/>
+          </a:bodyPr>
+          <a:lstStyle/>
+          <a:p>
+            <a:pPr algn="l">
+              <a:lnSpc>
+                <a:spcPct val="125000"/>
+              </a:lnSpc>
+            </a:pPr>
+            <a:r>
+              <a:rPr sz="1400" b="0">
+                <a:solidFill>
+                  <a:srgbClr val="6B7280"/>
+                </a:solidFill>
+                <a:latin typeface="Arial"/>
+              </a:rPr>
+              <a:t>Four laundry reports. Admin turns a suggestion into a category.</a:t>
+            </a:r>
+          </a:p>
+        </p:txBody>
+      </p:sp>
+      <p:sp>
+        <p:nvSpPr>
+          <p:cNvPr id="14" name="TextBox 13"/>
+          <p:cNvSpPr txBox="1"/>
+          <p:nvPr/>
+        </p:nvSpPr>
+        <p:spPr>
+          <a:xfrm>
+            <a:off x="822960" y="5760720"/>
+            <a:ext cx="10515600" cy="365760"/>
+          </a:xfrm>
+          <a:prstGeom prst="rect">
+            <a:avLst/>
+          </a:prstGeom>
+          <a:noFill/>
+        </p:spPr>
+        <p:txBody>
+          <a:bodyPr wrap="square">
+            <a:spAutoFit/>
+          </a:bodyPr>
+          <a:lstStyle/>
+          <a:p>
+            <a:pPr algn="l">
+              <a:lnSpc>
+                <a:spcPct val="125000"/>
+              </a:lnSpc>
+            </a:pPr>
+            <a:r>
+              <a:rPr sz="1400" b="0">
+                <a:solidFill>
+                  <a:srgbClr val="6B7280"/>
+                </a:solidFill>
+                <a:latin typeface="Arial"/>
+              </a:rPr>
+              <a:t>github.com/sarthak0707git/shikayat   ·   MIT   ·   built today</a:t>
+            </a:r>
+          </a:p>
+        </p:txBody>
+      </p:sp>
+      <p:sp>
+        <p:nvSpPr>
+          <p:cNvPr id="15" name="TextBox 14"/>
+          <p:cNvSpPr txBox="1"/>
+          <p:nvPr/>
+        </p:nvSpPr>
+        <p:spPr>
+          <a:xfrm>
+            <a:off x="822960" y="6355080"/>
+            <a:ext cx="3657600" cy="274320"/>
+          </a:xfrm>
+          <a:prstGeom prst="rect">
+            <a:avLst/>
+          </a:prstGeom>
+          <a:noFill/>
+        </p:spPr>
+        <p:txBody>
+          <a:bodyPr wrap="square">
+            <a:spAutoFit/>
+          </a:bodyPr>
+          <a:lstStyle/>
+          <a:p>
+            <a:pPr algn="l">
+              <a:lnSpc>
+                <a:spcPct val="125000"/>
+              </a:lnSpc>
+            </a:pPr>
+            <a:r>
+              <a:rPr sz="1000" b="0">
+                <a:solidFill>
+                  <a:srgbClr val="6B7280"/>
+                </a:solidFill>
+                <a:latin typeface="Arial"/>
+              </a:rPr>
+              <a:t>Shikayat</a:t>
+            </a:r>
+          </a:p>
+        </p:txBody>
+      </p:sp>
+      <p:sp>
+        <p:nvSpPr>
+          <p:cNvPr id="16" name="TextBox 15"/>
+          <p:cNvSpPr txBox="1"/>
+          <p:nvPr/>
+        </p:nvSpPr>
+        <p:spPr>
+          <a:xfrm>
+            <a:off x="10424160" y="6355080"/>
+            <a:ext cx="914400" cy="274320"/>
+          </a:xfrm>
+          <a:prstGeom prst="rect">
+            <a:avLst/>
+          </a:prstGeom>
+          <a:noFill/>
+        </p:spPr>
+        <p:txBody>
+          <a:bodyPr wrap="square">
+            <a:spAutoFit/>
+          </a:bodyPr>
+          <a:lstStyle/>
+          <a:p>
+            <a:pPr algn="r">
+              <a:lnSpc>
+                <a:spcPct val="125000"/>
+              </a:lnSpc>
+            </a:pPr>
+            <a:r>
+              <a:rPr sz="1000" b="0">
+                <a:solidFill>
+                  <a:srgbClr val="6B7280"/>
+                </a:solidFill>
+                <a:latin typeface="Arial"/>
+              </a:rPr>
+              <a:t>7</a:t>
             </a:r>
           </a:p>
         </p:txBody>
